--- a/pz-analysis/PZ_Nigeria_Analysis.pptx
+++ b/pz-analysis/PZ_Nigeria_Analysis.pptx
@@ -147,15 +147,27 @@
           </c:tx>
           <c:spPr>
             <a:solidFill>
-              <a:schemeClr val="tx1">
-                <a:lumMod val="65000"/>
-                <a:lumOff val="35000"/>
+              <a:schemeClr val="accent1">
+                <a:lumMod val="50000"/>
               </a:schemeClr>
             </a:solidFill>
             <a:ln>
               <a:noFill/>
             </a:ln>
           </c:spPr>
+          <c:dPt>
+            <c:idx val="1"/>
+            <c:spPr>
+              <a:solidFill>
+                <a:schemeClr val="accent2">
+                  <a:lumMod val="75000"/>
+                </a:schemeClr>
+              </a:solidFill>
+              <a:ln>
+                <a:noFill/>
+              </a:ln>
+            </c:spPr>
+          </c:dPt>
           <c:cat>
             <c:strRef>
               <c:f>Sheet1!$A$2:$A$7</c:f>
@@ -341,15 +353,40 @@
           </c:tx>
           <c:spPr>
             <a:solidFill>
-              <a:schemeClr val="tx1">
-                <a:lumMod val="65000"/>
-                <a:lumOff val="35000"/>
+              <a:schemeClr val="accent1">
+                <a:lumMod val="50000"/>
               </a:schemeClr>
             </a:solidFill>
             <a:ln>
               <a:noFill/>
             </a:ln>
           </c:spPr>
+          <c:dPt>
+            <c:idx val="1"/>
+            <c:spPr>
+              <a:solidFill>
+                <a:schemeClr val="accent2">
+                  <a:lumMod val="75000"/>
+                </a:schemeClr>
+              </a:solidFill>
+              <a:ln>
+                <a:noFill/>
+              </a:ln>
+            </c:spPr>
+          </c:dPt>
+          <c:dPt>
+            <c:idx val="3"/>
+            <c:spPr>
+              <a:solidFill>
+                <a:schemeClr val="accent2">
+                  <a:lumMod val="75000"/>
+                </a:schemeClr>
+              </a:solidFill>
+              <a:ln>
+                <a:noFill/>
+              </a:ln>
+            </c:spPr>
+          </c:dPt>
           <c:cat>
             <c:strRef>
               <c:f>Sheet1!$A$2:$A$5</c:f>
@@ -535,15 +572,27 @@
           </c:tx>
           <c:spPr>
             <a:solidFill>
-              <a:schemeClr val="tx1">
-                <a:lumMod val="65000"/>
-                <a:lumOff val="35000"/>
+              <a:schemeClr val="accent1">
+                <a:lumMod val="50000"/>
               </a:schemeClr>
             </a:solidFill>
             <a:ln>
               <a:noFill/>
             </a:ln>
           </c:spPr>
+          <c:dPt>
+            <c:idx val="0"/>
+            <c:spPr>
+              <a:solidFill>
+                <a:schemeClr val="accent2">
+                  <a:lumMod val="75000"/>
+                </a:schemeClr>
+              </a:solidFill>
+              <a:ln>
+                <a:noFill/>
+              </a:ln>
+            </c:spPr>
+          </c:dPt>
           <c:cat>
             <c:strRef>
               <c:f>Sheet1!$A$2:$A$6</c:f>
@@ -4670,7 +4719,9 @@
         <a:buNone/>
         <a:defRPr sz="4400" kern="1200">
           <a:solidFill>
-            <a:schemeClr val="tx1"/>
+            <a:schemeClr val="accent1">
+              <a:lumMod val="50000"/>
+            </a:schemeClr>
           </a:solidFill>
           <a:latin typeface="+mj-lt"/>
           <a:ea typeface="+mj-ea"/>
@@ -4961,7 +5012,12 @@
             <p:ph type="ctrTitle"/>
           </p:nvPr>
         </p:nvSpPr>
-        <p:spPr/>
+        <p:spPr>
+          <a:xfrm>
+            <a:off x="1524000" y="848043"/>
+            <a:ext cx="9144000" cy="2387600"/>
+          </a:xfrm>
+        </p:spPr>
         <p:txBody>
           <a:bodyPr/>
           <a:lstStyle/>
@@ -5002,6 +5058,43 @@
           </a:p>
         </p:txBody>
       </p:sp>
+      <p:cxnSp>
+        <p:nvCxnSpPr>
+          <p:cNvPr id="4" name="Straight Connector 3"/>
+          <p:cNvCxnSpPr/>
+          <p:nvPr/>
+        </p:nvCxnSpPr>
+        <p:spPr>
+          <a:xfrm>
+            <a:off x="4727448" y="3381947"/>
+            <a:ext cx="2743200" cy="0"/>
+          </a:xfrm>
+          <a:prstGeom prst="line">
+            <a:avLst/>
+          </a:prstGeom>
+          <a:ln w="38100">
+            <a:solidFill>
+              <a:schemeClr val="accent2">
+                <a:lumMod val="75000"/>
+              </a:schemeClr>
+            </a:solidFill>
+          </a:ln>
+        </p:spPr>
+        <p:style>
+          <a:lnRef idx="2">
+            <a:schemeClr val="accent1"/>
+          </a:lnRef>
+          <a:fillRef idx="0">
+            <a:schemeClr val="accent1"/>
+          </a:fillRef>
+          <a:effectRef idx="1">
+            <a:schemeClr val="accent1"/>
+          </a:effectRef>
+          <a:fontRef idx="minor">
+            <a:schemeClr val="tx1"/>
+          </a:fontRef>
+        </p:style>
+      </p:cxnSp>
     </p:spTree>
   </p:cSld>
   <p:clrMapOvr>
@@ -5068,24 +5161,59 @@
                                   </p:childTnLst>
                                 </p:cTn>
                               </p:par>
-                            </p:childTnLst>
-                          </p:cTn>
-                        </p:par>
-                        <p:par>
-                          <p:cTn id="8" fill="hold">
-                            <p:stCondLst>
-                              <p:cond delay="500"/>
-                            </p:stCondLst>
-                            <p:childTnLst>
                               <p:par>
-                                <p:cTn id="9" presetID="10" presetClass="entr" presetSubtype="0" fill="hold" grpId="0" nodeType="afterEffect">
+                                <p:cTn id="8" presetID="22" presetClass="entr" presetSubtype="8" fill="hold" nodeType="withEffect">
                                   <p:stCondLst>
                                     <p:cond delay="0"/>
                                   </p:stCondLst>
                                   <p:childTnLst>
                                     <p:set>
                                       <p:cBhvr>
-                                        <p:cTn id="10" dur="1" fill="hold">
+                                        <p:cTn id="9" dur="1" fill="hold">
+                                          <p:stCondLst>
+                                            <p:cond delay="0"/>
+                                          </p:stCondLst>
+                                        </p:cTn>
+                                        <p:tgtEl>
+                                          <p:spTgt spid="4"/>
+                                        </p:tgtEl>
+                                        <p:attrNameLst>
+                                          <p:attrName>style.visibility</p:attrName>
+                                        </p:attrNameLst>
+                                      </p:cBhvr>
+                                      <p:to>
+                                        <p:strVal val="visible"/>
+                                      </p:to>
+                                    </p:set>
+                                    <p:animEffect transition="in" filter="wipe(right)">
+                                      <p:cBhvr>
+                                        <p:cTn id="10" dur="500"/>
+                                        <p:tgtEl>
+                                          <p:spTgt spid="4"/>
+                                        </p:tgtEl>
+                                      </p:cBhvr>
+                                    </p:animEffect>
+                                  </p:childTnLst>
+                                </p:cTn>
+                              </p:par>
+                            </p:childTnLst>
+                          </p:cTn>
+                        </p:par>
+                        <p:par>
+                          <p:cTn id="11" fill="hold">
+                            <p:stCondLst>
+                              <p:cond delay="500"/>
+                            </p:stCondLst>
+                            <p:childTnLst>
+                              <p:par>
+                                <p:cTn id="12" presetID="10" presetClass="entr" presetSubtype="0" fill="hold" grpId="0" nodeType="afterEffect">
+                                  <p:stCondLst>
+                                    <p:cond delay="0"/>
+                                  </p:stCondLst>
+                                  <p:childTnLst>
+                                    <p:set>
+                                      <p:cBhvr>
+                                        <p:cTn id="13" dur="1" fill="hold">
                                           <p:stCondLst>
                                             <p:cond delay="0"/>
                                           </p:stCondLst>
@@ -5103,7 +5231,7 @@
                                     </p:set>
                                     <p:animEffect transition="in" filter="fade">
                                       <p:cBhvr>
-                                        <p:cTn id="11" dur="500"/>
+                                        <p:cTn id="14" dur="500"/>
                                         <p:tgtEl>
                                           <p:spTgt spid="3"/>
                                         </p:tgtEl>
@@ -5213,7 +5341,7 @@
                       <a:r>
                         <a:rPr sz="1500" b="1">
                           <a:solidFill>
-                            <a:schemeClr val="tx1"/>
+                            <a:schemeClr val="bg1"/>
                           </a:solidFill>
                         </a:rPr>
                         <a:t>Competitor</a:t>
@@ -5223,7 +5351,9 @@
                   <a:tcPr anchor="ctr">
                     <a:lnL w="12700" cap="flat" cmpd="sng" algn="ctr">
                       <a:solidFill>
-                        <a:schemeClr val="tx1"/>
+                        <a:schemeClr val="bg1">
+                          <a:lumMod val="75000"/>
+                        </a:schemeClr>
                       </a:solidFill>
                       <a:prstDash val="solid"/>
                       <a:round/>
@@ -5232,7 +5362,9 @@
                     </a:lnL>
                     <a:lnR w="12700" cap="flat" cmpd="sng" algn="ctr">
                       <a:solidFill>
-                        <a:schemeClr val="tx1"/>
+                        <a:schemeClr val="bg1">
+                          <a:lumMod val="75000"/>
+                        </a:schemeClr>
                       </a:solidFill>
                       <a:prstDash val="solid"/>
                       <a:round/>
@@ -5241,7 +5373,9 @@
                     </a:lnR>
                     <a:lnT w="12700" cap="flat" cmpd="sng" algn="ctr">
                       <a:solidFill>
-                        <a:schemeClr val="tx1"/>
+                        <a:schemeClr val="bg1">
+                          <a:lumMod val="75000"/>
+                        </a:schemeClr>
                       </a:solidFill>
                       <a:prstDash val="solid"/>
                       <a:round/>
@@ -5250,7 +5384,9 @@
                     </a:lnT>
                     <a:lnB w="12700" cap="flat" cmpd="sng" algn="ctr">
                       <a:solidFill>
-                        <a:schemeClr val="tx1"/>
+                        <a:schemeClr val="bg1">
+                          <a:lumMod val="75000"/>
+                        </a:schemeClr>
                       </a:solidFill>
                       <a:prstDash val="solid"/>
                       <a:round/>
@@ -5258,8 +5394,8 @@
                       <a:tailEnd type="none" w="med" len="med"/>
                     </a:lnB>
                     <a:solidFill>
-                      <a:schemeClr val="bg1">
-                        <a:lumMod val="85000"/>
+                      <a:schemeClr val="accent1">
+                        <a:lumMod val="50000"/>
                       </a:schemeClr>
                     </a:solidFill>
                   </a:tcPr>
@@ -5272,7 +5408,7 @@
                       <a:r>
                         <a:rPr sz="1500" b="1">
                           <a:solidFill>
-                            <a:schemeClr val="tx1"/>
+                            <a:schemeClr val="bg1"/>
                           </a:solidFill>
                         </a:rPr>
                         <a:t>Key brands</a:t>
@@ -5282,7 +5418,9 @@
                   <a:tcPr anchor="ctr">
                     <a:lnL w="12700" cap="flat" cmpd="sng" algn="ctr">
                       <a:solidFill>
-                        <a:schemeClr val="tx1"/>
+                        <a:schemeClr val="bg1">
+                          <a:lumMod val="75000"/>
+                        </a:schemeClr>
                       </a:solidFill>
                       <a:prstDash val="solid"/>
                       <a:round/>
@@ -5291,7 +5429,9 @@
                     </a:lnL>
                     <a:lnR w="12700" cap="flat" cmpd="sng" algn="ctr">
                       <a:solidFill>
-                        <a:schemeClr val="tx1"/>
+                        <a:schemeClr val="bg1">
+                          <a:lumMod val="75000"/>
+                        </a:schemeClr>
                       </a:solidFill>
                       <a:prstDash val="solid"/>
                       <a:round/>
@@ -5300,7 +5440,9 @@
                     </a:lnR>
                     <a:lnT w="12700" cap="flat" cmpd="sng" algn="ctr">
                       <a:solidFill>
-                        <a:schemeClr val="tx1"/>
+                        <a:schemeClr val="bg1">
+                          <a:lumMod val="75000"/>
+                        </a:schemeClr>
                       </a:solidFill>
                       <a:prstDash val="solid"/>
                       <a:round/>
@@ -5309,7 +5451,9 @@
                     </a:lnT>
                     <a:lnB w="12700" cap="flat" cmpd="sng" algn="ctr">
                       <a:solidFill>
-                        <a:schemeClr val="tx1"/>
+                        <a:schemeClr val="bg1">
+                          <a:lumMod val="75000"/>
+                        </a:schemeClr>
                       </a:solidFill>
                       <a:prstDash val="solid"/>
                       <a:round/>
@@ -5317,8 +5461,8 @@
                       <a:tailEnd type="none" w="med" len="med"/>
                     </a:lnB>
                     <a:solidFill>
-                      <a:schemeClr val="bg1">
-                        <a:lumMod val="85000"/>
+                      <a:schemeClr val="accent1">
+                        <a:lumMod val="50000"/>
                       </a:schemeClr>
                     </a:solidFill>
                   </a:tcPr>
@@ -5331,7 +5475,7 @@
                       <a:r>
                         <a:rPr sz="1500" b="1">
                           <a:solidFill>
-                            <a:schemeClr val="tx1"/>
+                            <a:schemeClr val="bg1"/>
                           </a:solidFill>
                         </a:rPr>
                         <a:t>Competes with PZ in</a:t>
@@ -5341,7 +5485,9 @@
                   <a:tcPr anchor="ctr">
                     <a:lnL w="12700" cap="flat" cmpd="sng" algn="ctr">
                       <a:solidFill>
-                        <a:schemeClr val="tx1"/>
+                        <a:schemeClr val="bg1">
+                          <a:lumMod val="75000"/>
+                        </a:schemeClr>
                       </a:solidFill>
                       <a:prstDash val="solid"/>
                       <a:round/>
@@ -5350,7 +5496,9 @@
                     </a:lnL>
                     <a:lnR w="12700" cap="flat" cmpd="sng" algn="ctr">
                       <a:solidFill>
-                        <a:schemeClr val="tx1"/>
+                        <a:schemeClr val="bg1">
+                          <a:lumMod val="75000"/>
+                        </a:schemeClr>
                       </a:solidFill>
                       <a:prstDash val="solid"/>
                       <a:round/>
@@ -5359,7 +5507,9 @@
                     </a:lnR>
                     <a:lnT w="12700" cap="flat" cmpd="sng" algn="ctr">
                       <a:solidFill>
-                        <a:schemeClr val="tx1"/>
+                        <a:schemeClr val="bg1">
+                          <a:lumMod val="75000"/>
+                        </a:schemeClr>
                       </a:solidFill>
                       <a:prstDash val="solid"/>
                       <a:round/>
@@ -5368,7 +5518,9 @@
                     </a:lnT>
                     <a:lnB w="12700" cap="flat" cmpd="sng" algn="ctr">
                       <a:solidFill>
-                        <a:schemeClr val="tx1"/>
+                        <a:schemeClr val="bg1">
+                          <a:lumMod val="75000"/>
+                        </a:schemeClr>
                       </a:solidFill>
                       <a:prstDash val="solid"/>
                       <a:round/>
@@ -5376,8 +5528,8 @@
                       <a:tailEnd type="none" w="med" len="med"/>
                     </a:lnB>
                     <a:solidFill>
-                      <a:schemeClr val="bg1">
-                        <a:lumMod val="85000"/>
+                      <a:schemeClr val="accent1">
+                        <a:lumMod val="50000"/>
                       </a:schemeClr>
                     </a:solidFill>
                   </a:tcPr>
@@ -5390,7 +5542,7 @@
                       <a:r>
                         <a:rPr sz="1500" b="1">
                           <a:solidFill>
-                            <a:schemeClr val="tx1"/>
+                            <a:schemeClr val="bg1"/>
                           </a:solidFill>
                         </a:rPr>
                         <a:t>Position</a:t>
@@ -5400,7 +5552,9 @@
                   <a:tcPr anchor="ctr">
                     <a:lnL w="12700" cap="flat" cmpd="sng" algn="ctr">
                       <a:solidFill>
-                        <a:schemeClr val="tx1"/>
+                        <a:schemeClr val="bg1">
+                          <a:lumMod val="75000"/>
+                        </a:schemeClr>
                       </a:solidFill>
                       <a:prstDash val="solid"/>
                       <a:round/>
@@ -5409,7 +5563,9 @@
                     </a:lnL>
                     <a:lnR w="12700" cap="flat" cmpd="sng" algn="ctr">
                       <a:solidFill>
-                        <a:schemeClr val="tx1"/>
+                        <a:schemeClr val="bg1">
+                          <a:lumMod val="75000"/>
+                        </a:schemeClr>
                       </a:solidFill>
                       <a:prstDash val="solid"/>
                       <a:round/>
@@ -5418,7 +5574,9 @@
                     </a:lnR>
                     <a:lnT w="12700" cap="flat" cmpd="sng" algn="ctr">
                       <a:solidFill>
-                        <a:schemeClr val="tx1"/>
+                        <a:schemeClr val="bg1">
+                          <a:lumMod val="75000"/>
+                        </a:schemeClr>
                       </a:solidFill>
                       <a:prstDash val="solid"/>
                       <a:round/>
@@ -5427,7 +5585,9 @@
                     </a:lnT>
                     <a:lnB w="12700" cap="flat" cmpd="sng" algn="ctr">
                       <a:solidFill>
-                        <a:schemeClr val="tx1"/>
+                        <a:schemeClr val="bg1">
+                          <a:lumMod val="75000"/>
+                        </a:schemeClr>
                       </a:solidFill>
                       <a:prstDash val="solid"/>
                       <a:round/>
@@ -5435,8 +5595,8 @@
                       <a:tailEnd type="none" w="med" len="med"/>
                     </a:lnB>
                     <a:solidFill>
-                      <a:schemeClr val="bg1">
-                        <a:lumMod val="85000"/>
+                      <a:schemeClr val="accent1">
+                        <a:lumMod val="50000"/>
                       </a:schemeClr>
                     </a:solidFill>
                   </a:tcPr>
@@ -5451,7 +5611,9 @@
                       <a:r>
                         <a:rPr sz="1500" b="1">
                           <a:solidFill>
-                            <a:schemeClr val="tx1"/>
+                            <a:schemeClr val="accent1">
+                              <a:lumMod val="50000"/>
+                            </a:schemeClr>
                           </a:solidFill>
                         </a:rPr>
                         <a:t>Unilever Nigeria</a:t>
@@ -5461,7 +5623,9 @@
                   <a:tcPr anchor="ctr">
                     <a:lnL w="12700" cap="flat" cmpd="sng" algn="ctr">
                       <a:solidFill>
-                        <a:schemeClr val="tx1"/>
+                        <a:schemeClr val="bg1">
+                          <a:lumMod val="75000"/>
+                        </a:schemeClr>
                       </a:solidFill>
                       <a:prstDash val="solid"/>
                       <a:round/>
@@ -5470,7 +5634,9 @@
                     </a:lnL>
                     <a:lnR w="12700" cap="flat" cmpd="sng" algn="ctr">
                       <a:solidFill>
-                        <a:schemeClr val="tx1"/>
+                        <a:schemeClr val="bg1">
+                          <a:lumMod val="75000"/>
+                        </a:schemeClr>
                       </a:solidFill>
                       <a:prstDash val="solid"/>
                       <a:round/>
@@ -5479,7 +5645,9 @@
                     </a:lnR>
                     <a:lnT w="12700" cap="flat" cmpd="sng" algn="ctr">
                       <a:solidFill>
-                        <a:schemeClr val="tx1"/>
+                        <a:schemeClr val="bg1">
+                          <a:lumMod val="75000"/>
+                        </a:schemeClr>
                       </a:solidFill>
                       <a:prstDash val="solid"/>
                       <a:round/>
@@ -5488,7 +5656,9 @@
                     </a:lnT>
                     <a:lnB w="12700" cap="flat" cmpd="sng" algn="ctr">
                       <a:solidFill>
-                        <a:schemeClr val="tx1"/>
+                        <a:schemeClr val="bg1">
+                          <a:lumMod val="75000"/>
+                        </a:schemeClr>
                       </a:solidFill>
                       <a:prstDash val="solid"/>
                       <a:round/>
@@ -5516,7 +5686,9 @@
                   <a:tcPr anchor="ctr">
                     <a:lnL w="12700" cap="flat" cmpd="sng" algn="ctr">
                       <a:solidFill>
-                        <a:schemeClr val="tx1"/>
+                        <a:schemeClr val="bg1">
+                          <a:lumMod val="75000"/>
+                        </a:schemeClr>
                       </a:solidFill>
                       <a:prstDash val="solid"/>
                       <a:round/>
@@ -5525,7 +5697,9 @@
                     </a:lnL>
                     <a:lnR w="12700" cap="flat" cmpd="sng" algn="ctr">
                       <a:solidFill>
-                        <a:schemeClr val="tx1"/>
+                        <a:schemeClr val="bg1">
+                          <a:lumMod val="75000"/>
+                        </a:schemeClr>
                       </a:solidFill>
                       <a:prstDash val="solid"/>
                       <a:round/>
@@ -5534,7 +5708,9 @@
                     </a:lnR>
                     <a:lnT w="12700" cap="flat" cmpd="sng" algn="ctr">
                       <a:solidFill>
-                        <a:schemeClr val="tx1"/>
+                        <a:schemeClr val="bg1">
+                          <a:lumMod val="75000"/>
+                        </a:schemeClr>
                       </a:solidFill>
                       <a:prstDash val="solid"/>
                       <a:round/>
@@ -5543,7 +5719,9 @@
                     </a:lnT>
                     <a:lnB w="12700" cap="flat" cmpd="sng" algn="ctr">
                       <a:solidFill>
-                        <a:schemeClr val="tx1"/>
+                        <a:schemeClr val="bg1">
+                          <a:lumMod val="75000"/>
+                        </a:schemeClr>
                       </a:solidFill>
                       <a:prstDash val="solid"/>
                       <a:round/>
@@ -5571,7 +5749,9 @@
                   <a:tcPr anchor="ctr">
                     <a:lnL w="12700" cap="flat" cmpd="sng" algn="ctr">
                       <a:solidFill>
-                        <a:schemeClr val="tx1"/>
+                        <a:schemeClr val="bg1">
+                          <a:lumMod val="75000"/>
+                        </a:schemeClr>
                       </a:solidFill>
                       <a:prstDash val="solid"/>
                       <a:round/>
@@ -5580,7 +5760,9 @@
                     </a:lnL>
                     <a:lnR w="12700" cap="flat" cmpd="sng" algn="ctr">
                       <a:solidFill>
-                        <a:schemeClr val="tx1"/>
+                        <a:schemeClr val="bg1">
+                          <a:lumMod val="75000"/>
+                        </a:schemeClr>
                       </a:solidFill>
                       <a:prstDash val="solid"/>
                       <a:round/>
@@ -5589,7 +5771,9 @@
                     </a:lnR>
                     <a:lnT w="12700" cap="flat" cmpd="sng" algn="ctr">
                       <a:solidFill>
-                        <a:schemeClr val="tx1"/>
+                        <a:schemeClr val="bg1">
+                          <a:lumMod val="75000"/>
+                        </a:schemeClr>
                       </a:solidFill>
                       <a:prstDash val="solid"/>
                       <a:round/>
@@ -5598,7 +5782,9 @@
                     </a:lnT>
                     <a:lnB w="12700" cap="flat" cmpd="sng" algn="ctr">
                       <a:solidFill>
-                        <a:schemeClr val="tx1"/>
+                        <a:schemeClr val="bg1">
+                          <a:lumMod val="75000"/>
+                        </a:schemeClr>
                       </a:solidFill>
                       <a:prstDash val="solid"/>
                       <a:round/>
@@ -5626,7 +5812,9 @@
                   <a:tcPr anchor="ctr">
                     <a:lnL w="12700" cap="flat" cmpd="sng" algn="ctr">
                       <a:solidFill>
-                        <a:schemeClr val="tx1"/>
+                        <a:schemeClr val="bg1">
+                          <a:lumMod val="75000"/>
+                        </a:schemeClr>
                       </a:solidFill>
                       <a:prstDash val="solid"/>
                       <a:round/>
@@ -5635,7 +5823,9 @@
                     </a:lnL>
                     <a:lnR w="12700" cap="flat" cmpd="sng" algn="ctr">
                       <a:solidFill>
-                        <a:schemeClr val="tx1"/>
+                        <a:schemeClr val="bg1">
+                          <a:lumMod val="75000"/>
+                        </a:schemeClr>
                       </a:solidFill>
                       <a:prstDash val="solid"/>
                       <a:round/>
@@ -5644,7 +5834,9 @@
                     </a:lnR>
                     <a:lnT w="12700" cap="flat" cmpd="sng" algn="ctr">
                       <a:solidFill>
-                        <a:schemeClr val="tx1"/>
+                        <a:schemeClr val="bg1">
+                          <a:lumMod val="75000"/>
+                        </a:schemeClr>
                       </a:solidFill>
                       <a:prstDash val="solid"/>
                       <a:round/>
@@ -5653,7 +5845,9 @@
                     </a:lnT>
                     <a:lnB w="12700" cap="flat" cmpd="sng" algn="ctr">
                       <a:solidFill>
-                        <a:schemeClr val="tx1"/>
+                        <a:schemeClr val="bg1">
+                          <a:lumMod val="75000"/>
+                        </a:schemeClr>
                       </a:solidFill>
                       <a:prstDash val="solid"/>
                       <a:round/>
@@ -5673,7 +5867,9 @@
                       <a:r>
                         <a:rPr sz="1500" b="1">
                           <a:solidFill>
-                            <a:schemeClr val="tx1"/>
+                            <a:schemeClr val="accent1">
+                              <a:lumMod val="50000"/>
+                            </a:schemeClr>
                           </a:solidFill>
                         </a:rPr>
                         <a:t>Procter &amp; Gamble</a:t>
@@ -5683,7 +5879,9 @@
                   <a:tcPr anchor="ctr">
                     <a:lnL w="12700" cap="flat" cmpd="sng" algn="ctr">
                       <a:solidFill>
-                        <a:schemeClr val="tx1"/>
+                        <a:schemeClr val="bg1">
+                          <a:lumMod val="75000"/>
+                        </a:schemeClr>
                       </a:solidFill>
                       <a:prstDash val="solid"/>
                       <a:round/>
@@ -5692,7 +5890,9 @@
                     </a:lnL>
                     <a:lnR w="12700" cap="flat" cmpd="sng" algn="ctr">
                       <a:solidFill>
-                        <a:schemeClr val="tx1"/>
+                        <a:schemeClr val="bg1">
+                          <a:lumMod val="75000"/>
+                        </a:schemeClr>
                       </a:solidFill>
                       <a:prstDash val="solid"/>
                       <a:round/>
@@ -5701,7 +5901,9 @@
                     </a:lnR>
                     <a:lnT w="12700" cap="flat" cmpd="sng" algn="ctr">
                       <a:solidFill>
-                        <a:schemeClr val="tx1"/>
+                        <a:schemeClr val="bg1">
+                          <a:lumMod val="75000"/>
+                        </a:schemeClr>
                       </a:solidFill>
                       <a:prstDash val="solid"/>
                       <a:round/>
@@ -5710,7 +5912,9 @@
                     </a:lnT>
                     <a:lnB w="12700" cap="flat" cmpd="sng" algn="ctr">
                       <a:solidFill>
-                        <a:schemeClr val="tx1"/>
+                        <a:schemeClr val="bg1">
+                          <a:lumMod val="75000"/>
+                        </a:schemeClr>
                       </a:solidFill>
                       <a:prstDash val="solid"/>
                       <a:round/>
@@ -5738,7 +5942,9 @@
                   <a:tcPr anchor="ctr">
                     <a:lnL w="12700" cap="flat" cmpd="sng" algn="ctr">
                       <a:solidFill>
-                        <a:schemeClr val="tx1"/>
+                        <a:schemeClr val="bg1">
+                          <a:lumMod val="75000"/>
+                        </a:schemeClr>
                       </a:solidFill>
                       <a:prstDash val="solid"/>
                       <a:round/>
@@ -5747,7 +5953,9 @@
                     </a:lnL>
                     <a:lnR w="12700" cap="flat" cmpd="sng" algn="ctr">
                       <a:solidFill>
-                        <a:schemeClr val="tx1"/>
+                        <a:schemeClr val="bg1">
+                          <a:lumMod val="75000"/>
+                        </a:schemeClr>
                       </a:solidFill>
                       <a:prstDash val="solid"/>
                       <a:round/>
@@ -5756,7 +5964,9 @@
                     </a:lnR>
                     <a:lnT w="12700" cap="flat" cmpd="sng" algn="ctr">
                       <a:solidFill>
-                        <a:schemeClr val="tx1"/>
+                        <a:schemeClr val="bg1">
+                          <a:lumMod val="75000"/>
+                        </a:schemeClr>
                       </a:solidFill>
                       <a:prstDash val="solid"/>
                       <a:round/>
@@ -5765,7 +5975,9 @@
                     </a:lnT>
                     <a:lnB w="12700" cap="flat" cmpd="sng" algn="ctr">
                       <a:solidFill>
-                        <a:schemeClr val="tx1"/>
+                        <a:schemeClr val="bg1">
+                          <a:lumMod val="75000"/>
+                        </a:schemeClr>
                       </a:solidFill>
                       <a:prstDash val="solid"/>
                       <a:round/>
@@ -5793,7 +6005,9 @@
                   <a:tcPr anchor="ctr">
                     <a:lnL w="12700" cap="flat" cmpd="sng" algn="ctr">
                       <a:solidFill>
-                        <a:schemeClr val="tx1"/>
+                        <a:schemeClr val="bg1">
+                          <a:lumMod val="75000"/>
+                        </a:schemeClr>
                       </a:solidFill>
                       <a:prstDash val="solid"/>
                       <a:round/>
@@ -5802,7 +6016,9 @@
                     </a:lnL>
                     <a:lnR w="12700" cap="flat" cmpd="sng" algn="ctr">
                       <a:solidFill>
-                        <a:schemeClr val="tx1"/>
+                        <a:schemeClr val="bg1">
+                          <a:lumMod val="75000"/>
+                        </a:schemeClr>
                       </a:solidFill>
                       <a:prstDash val="solid"/>
                       <a:round/>
@@ -5811,7 +6027,9 @@
                     </a:lnR>
                     <a:lnT w="12700" cap="flat" cmpd="sng" algn="ctr">
                       <a:solidFill>
-                        <a:schemeClr val="tx1"/>
+                        <a:schemeClr val="bg1">
+                          <a:lumMod val="75000"/>
+                        </a:schemeClr>
                       </a:solidFill>
                       <a:prstDash val="solid"/>
                       <a:round/>
@@ -5820,7 +6038,9 @@
                     </a:lnT>
                     <a:lnB w="12700" cap="flat" cmpd="sng" algn="ctr">
                       <a:solidFill>
-                        <a:schemeClr val="tx1"/>
+                        <a:schemeClr val="bg1">
+                          <a:lumMod val="75000"/>
+                        </a:schemeClr>
                       </a:solidFill>
                       <a:prstDash val="solid"/>
                       <a:round/>
@@ -5848,7 +6068,9 @@
                   <a:tcPr anchor="ctr">
                     <a:lnL w="12700" cap="flat" cmpd="sng" algn="ctr">
                       <a:solidFill>
-                        <a:schemeClr val="tx1"/>
+                        <a:schemeClr val="bg1">
+                          <a:lumMod val="75000"/>
+                        </a:schemeClr>
                       </a:solidFill>
                       <a:prstDash val="solid"/>
                       <a:round/>
@@ -5857,7 +6079,9 @@
                     </a:lnL>
                     <a:lnR w="12700" cap="flat" cmpd="sng" algn="ctr">
                       <a:solidFill>
-                        <a:schemeClr val="tx1"/>
+                        <a:schemeClr val="bg1">
+                          <a:lumMod val="75000"/>
+                        </a:schemeClr>
                       </a:solidFill>
                       <a:prstDash val="solid"/>
                       <a:round/>
@@ -5866,7 +6090,9 @@
                     </a:lnR>
                     <a:lnT w="12700" cap="flat" cmpd="sng" algn="ctr">
                       <a:solidFill>
-                        <a:schemeClr val="tx1"/>
+                        <a:schemeClr val="bg1">
+                          <a:lumMod val="75000"/>
+                        </a:schemeClr>
                       </a:solidFill>
                       <a:prstDash val="solid"/>
                       <a:round/>
@@ -5875,7 +6101,9 @@
                     </a:lnT>
                     <a:lnB w="12700" cap="flat" cmpd="sng" algn="ctr">
                       <a:solidFill>
-                        <a:schemeClr val="tx1"/>
+                        <a:schemeClr val="bg1">
+                          <a:lumMod val="75000"/>
+                        </a:schemeClr>
                       </a:solidFill>
                       <a:prstDash val="solid"/>
                       <a:round/>
@@ -5895,7 +6123,9 @@
                       <a:r>
                         <a:rPr sz="1500" b="1">
                           <a:solidFill>
-                            <a:schemeClr val="tx1"/>
+                            <a:schemeClr val="accent1">
+                              <a:lumMod val="50000"/>
+                            </a:schemeClr>
                           </a:solidFill>
                         </a:rPr>
                         <a:t>Reckitt Nigeria</a:t>
@@ -5905,7 +6135,9 @@
                   <a:tcPr anchor="ctr">
                     <a:lnL w="12700" cap="flat" cmpd="sng" algn="ctr">
                       <a:solidFill>
-                        <a:schemeClr val="tx1"/>
+                        <a:schemeClr val="bg1">
+                          <a:lumMod val="75000"/>
+                        </a:schemeClr>
                       </a:solidFill>
                       <a:prstDash val="solid"/>
                       <a:round/>
@@ -5914,7 +6146,9 @@
                     </a:lnL>
                     <a:lnR w="12700" cap="flat" cmpd="sng" algn="ctr">
                       <a:solidFill>
-                        <a:schemeClr val="tx1"/>
+                        <a:schemeClr val="bg1">
+                          <a:lumMod val="75000"/>
+                        </a:schemeClr>
                       </a:solidFill>
                       <a:prstDash val="solid"/>
                       <a:round/>
@@ -5923,7 +6157,9 @@
                     </a:lnR>
                     <a:lnT w="12700" cap="flat" cmpd="sng" algn="ctr">
                       <a:solidFill>
-                        <a:schemeClr val="tx1"/>
+                        <a:schemeClr val="bg1">
+                          <a:lumMod val="75000"/>
+                        </a:schemeClr>
                       </a:solidFill>
                       <a:prstDash val="solid"/>
                       <a:round/>
@@ -5932,7 +6168,9 @@
                     </a:lnT>
                     <a:lnB w="12700" cap="flat" cmpd="sng" algn="ctr">
                       <a:solidFill>
-                        <a:schemeClr val="tx1"/>
+                        <a:schemeClr val="bg1">
+                          <a:lumMod val="75000"/>
+                        </a:schemeClr>
                       </a:solidFill>
                       <a:prstDash val="solid"/>
                       <a:round/>
@@ -5960,7 +6198,9 @@
                   <a:tcPr anchor="ctr">
                     <a:lnL w="12700" cap="flat" cmpd="sng" algn="ctr">
                       <a:solidFill>
-                        <a:schemeClr val="tx1"/>
+                        <a:schemeClr val="bg1">
+                          <a:lumMod val="75000"/>
+                        </a:schemeClr>
                       </a:solidFill>
                       <a:prstDash val="solid"/>
                       <a:round/>
@@ -5969,7 +6209,9 @@
                     </a:lnL>
                     <a:lnR w="12700" cap="flat" cmpd="sng" algn="ctr">
                       <a:solidFill>
-                        <a:schemeClr val="tx1"/>
+                        <a:schemeClr val="bg1">
+                          <a:lumMod val="75000"/>
+                        </a:schemeClr>
                       </a:solidFill>
                       <a:prstDash val="solid"/>
                       <a:round/>
@@ -5978,7 +6220,9 @@
                     </a:lnR>
                     <a:lnT w="12700" cap="flat" cmpd="sng" algn="ctr">
                       <a:solidFill>
-                        <a:schemeClr val="tx1"/>
+                        <a:schemeClr val="bg1">
+                          <a:lumMod val="75000"/>
+                        </a:schemeClr>
                       </a:solidFill>
                       <a:prstDash val="solid"/>
                       <a:round/>
@@ -5987,7 +6231,9 @@
                     </a:lnT>
                     <a:lnB w="12700" cap="flat" cmpd="sng" algn="ctr">
                       <a:solidFill>
-                        <a:schemeClr val="tx1"/>
+                        <a:schemeClr val="bg1">
+                          <a:lumMod val="75000"/>
+                        </a:schemeClr>
                       </a:solidFill>
                       <a:prstDash val="solid"/>
                       <a:round/>
@@ -6015,7 +6261,9 @@
                   <a:tcPr anchor="ctr">
                     <a:lnL w="12700" cap="flat" cmpd="sng" algn="ctr">
                       <a:solidFill>
-                        <a:schemeClr val="tx1"/>
+                        <a:schemeClr val="bg1">
+                          <a:lumMod val="75000"/>
+                        </a:schemeClr>
                       </a:solidFill>
                       <a:prstDash val="solid"/>
                       <a:round/>
@@ -6024,7 +6272,9 @@
                     </a:lnL>
                     <a:lnR w="12700" cap="flat" cmpd="sng" algn="ctr">
                       <a:solidFill>
-                        <a:schemeClr val="tx1"/>
+                        <a:schemeClr val="bg1">
+                          <a:lumMod val="75000"/>
+                        </a:schemeClr>
                       </a:solidFill>
                       <a:prstDash val="solid"/>
                       <a:round/>
@@ -6033,7 +6283,9 @@
                     </a:lnR>
                     <a:lnT w="12700" cap="flat" cmpd="sng" algn="ctr">
                       <a:solidFill>
-                        <a:schemeClr val="tx1"/>
+                        <a:schemeClr val="bg1">
+                          <a:lumMod val="75000"/>
+                        </a:schemeClr>
                       </a:solidFill>
                       <a:prstDash val="solid"/>
                       <a:round/>
@@ -6042,7 +6294,9 @@
                     </a:lnT>
                     <a:lnB w="12700" cap="flat" cmpd="sng" algn="ctr">
                       <a:solidFill>
-                        <a:schemeClr val="tx1"/>
+                        <a:schemeClr val="bg1">
+                          <a:lumMod val="75000"/>
+                        </a:schemeClr>
                       </a:solidFill>
                       <a:prstDash val="solid"/>
                       <a:round/>
@@ -6070,7 +6324,9 @@
                   <a:tcPr anchor="ctr">
                     <a:lnL w="12700" cap="flat" cmpd="sng" algn="ctr">
                       <a:solidFill>
-                        <a:schemeClr val="tx1"/>
+                        <a:schemeClr val="bg1">
+                          <a:lumMod val="75000"/>
+                        </a:schemeClr>
                       </a:solidFill>
                       <a:prstDash val="solid"/>
                       <a:round/>
@@ -6079,7 +6335,9 @@
                     </a:lnL>
                     <a:lnR w="12700" cap="flat" cmpd="sng" algn="ctr">
                       <a:solidFill>
-                        <a:schemeClr val="tx1"/>
+                        <a:schemeClr val="bg1">
+                          <a:lumMod val="75000"/>
+                        </a:schemeClr>
                       </a:solidFill>
                       <a:prstDash val="solid"/>
                       <a:round/>
@@ -6088,7 +6346,9 @@
                     </a:lnR>
                     <a:lnT w="12700" cap="flat" cmpd="sng" algn="ctr">
                       <a:solidFill>
-                        <a:schemeClr val="tx1"/>
+                        <a:schemeClr val="bg1">
+                          <a:lumMod val="75000"/>
+                        </a:schemeClr>
                       </a:solidFill>
                       <a:prstDash val="solid"/>
                       <a:round/>
@@ -6097,7 +6357,9 @@
                     </a:lnT>
                     <a:lnB w="12700" cap="flat" cmpd="sng" algn="ctr">
                       <a:solidFill>
-                        <a:schemeClr val="tx1"/>
+                        <a:schemeClr val="bg1">
+                          <a:lumMod val="75000"/>
+                        </a:schemeClr>
                       </a:solidFill>
                       <a:prstDash val="solid"/>
                       <a:round/>
@@ -6117,7 +6379,9 @@
                       <a:r>
                         <a:rPr sz="1500" b="1">
                           <a:solidFill>
-                            <a:schemeClr val="tx1"/>
+                            <a:schemeClr val="accent1">
+                              <a:lumMod val="50000"/>
+                            </a:schemeClr>
                           </a:solidFill>
                         </a:rPr>
                         <a:t>Hayat Kimya</a:t>
@@ -6127,7 +6391,9 @@
                   <a:tcPr anchor="ctr">
                     <a:lnL w="12700" cap="flat" cmpd="sng" algn="ctr">
                       <a:solidFill>
-                        <a:schemeClr val="tx1"/>
+                        <a:schemeClr val="bg1">
+                          <a:lumMod val="75000"/>
+                        </a:schemeClr>
                       </a:solidFill>
                       <a:prstDash val="solid"/>
                       <a:round/>
@@ -6136,7 +6402,9 @@
                     </a:lnL>
                     <a:lnR w="12700" cap="flat" cmpd="sng" algn="ctr">
                       <a:solidFill>
-                        <a:schemeClr val="tx1"/>
+                        <a:schemeClr val="bg1">
+                          <a:lumMod val="75000"/>
+                        </a:schemeClr>
                       </a:solidFill>
                       <a:prstDash val="solid"/>
                       <a:round/>
@@ -6145,7 +6413,9 @@
                     </a:lnR>
                     <a:lnT w="12700" cap="flat" cmpd="sng" algn="ctr">
                       <a:solidFill>
-                        <a:schemeClr val="tx1"/>
+                        <a:schemeClr val="bg1">
+                          <a:lumMod val="75000"/>
+                        </a:schemeClr>
                       </a:solidFill>
                       <a:prstDash val="solid"/>
                       <a:round/>
@@ -6154,7 +6424,9 @@
                     </a:lnT>
                     <a:lnB w="12700" cap="flat" cmpd="sng" algn="ctr">
                       <a:solidFill>
-                        <a:schemeClr val="tx1"/>
+                        <a:schemeClr val="bg1">
+                          <a:lumMod val="75000"/>
+                        </a:schemeClr>
                       </a:solidFill>
                       <a:prstDash val="solid"/>
                       <a:round/>
@@ -6182,7 +6454,9 @@
                   <a:tcPr anchor="ctr">
                     <a:lnL w="12700" cap="flat" cmpd="sng" algn="ctr">
                       <a:solidFill>
-                        <a:schemeClr val="tx1"/>
+                        <a:schemeClr val="bg1">
+                          <a:lumMod val="75000"/>
+                        </a:schemeClr>
                       </a:solidFill>
                       <a:prstDash val="solid"/>
                       <a:round/>
@@ -6191,7 +6465,9 @@
                     </a:lnL>
                     <a:lnR w="12700" cap="flat" cmpd="sng" algn="ctr">
                       <a:solidFill>
-                        <a:schemeClr val="tx1"/>
+                        <a:schemeClr val="bg1">
+                          <a:lumMod val="75000"/>
+                        </a:schemeClr>
                       </a:solidFill>
                       <a:prstDash val="solid"/>
                       <a:round/>
@@ -6200,7 +6476,9 @@
                     </a:lnR>
                     <a:lnT w="12700" cap="flat" cmpd="sng" algn="ctr">
                       <a:solidFill>
-                        <a:schemeClr val="tx1"/>
+                        <a:schemeClr val="bg1">
+                          <a:lumMod val="75000"/>
+                        </a:schemeClr>
                       </a:solidFill>
                       <a:prstDash val="solid"/>
                       <a:round/>
@@ -6209,7 +6487,9 @@
                     </a:lnT>
                     <a:lnB w="12700" cap="flat" cmpd="sng" algn="ctr">
                       <a:solidFill>
-                        <a:schemeClr val="tx1"/>
+                        <a:schemeClr val="bg1">
+                          <a:lumMod val="75000"/>
+                        </a:schemeClr>
                       </a:solidFill>
                       <a:prstDash val="solid"/>
                       <a:round/>
@@ -6237,7 +6517,9 @@
                   <a:tcPr anchor="ctr">
                     <a:lnL w="12700" cap="flat" cmpd="sng" algn="ctr">
                       <a:solidFill>
-                        <a:schemeClr val="tx1"/>
+                        <a:schemeClr val="bg1">
+                          <a:lumMod val="75000"/>
+                        </a:schemeClr>
                       </a:solidFill>
                       <a:prstDash val="solid"/>
                       <a:round/>
@@ -6246,7 +6528,9 @@
                     </a:lnL>
                     <a:lnR w="12700" cap="flat" cmpd="sng" algn="ctr">
                       <a:solidFill>
-                        <a:schemeClr val="tx1"/>
+                        <a:schemeClr val="bg1">
+                          <a:lumMod val="75000"/>
+                        </a:schemeClr>
                       </a:solidFill>
                       <a:prstDash val="solid"/>
                       <a:round/>
@@ -6255,7 +6539,9 @@
                     </a:lnR>
                     <a:lnT w="12700" cap="flat" cmpd="sng" algn="ctr">
                       <a:solidFill>
-                        <a:schemeClr val="tx1"/>
+                        <a:schemeClr val="bg1">
+                          <a:lumMod val="75000"/>
+                        </a:schemeClr>
                       </a:solidFill>
                       <a:prstDash val="solid"/>
                       <a:round/>
@@ -6264,7 +6550,9 @@
                     </a:lnT>
                     <a:lnB w="12700" cap="flat" cmpd="sng" algn="ctr">
                       <a:solidFill>
-                        <a:schemeClr val="tx1"/>
+                        <a:schemeClr val="bg1">
+                          <a:lumMod val="75000"/>
+                        </a:schemeClr>
                       </a:solidFill>
                       <a:prstDash val="solid"/>
                       <a:round/>
@@ -6292,7 +6580,9 @@
                   <a:tcPr anchor="ctr">
                     <a:lnL w="12700" cap="flat" cmpd="sng" algn="ctr">
                       <a:solidFill>
-                        <a:schemeClr val="tx1"/>
+                        <a:schemeClr val="bg1">
+                          <a:lumMod val="75000"/>
+                        </a:schemeClr>
                       </a:solidFill>
                       <a:prstDash val="solid"/>
                       <a:round/>
@@ -6301,7 +6591,9 @@
                     </a:lnL>
                     <a:lnR w="12700" cap="flat" cmpd="sng" algn="ctr">
                       <a:solidFill>
-                        <a:schemeClr val="tx1"/>
+                        <a:schemeClr val="bg1">
+                          <a:lumMod val="75000"/>
+                        </a:schemeClr>
                       </a:solidFill>
                       <a:prstDash val="solid"/>
                       <a:round/>
@@ -6310,7 +6602,9 @@
                     </a:lnR>
                     <a:lnT w="12700" cap="flat" cmpd="sng" algn="ctr">
                       <a:solidFill>
-                        <a:schemeClr val="tx1"/>
+                        <a:schemeClr val="bg1">
+                          <a:lumMod val="75000"/>
+                        </a:schemeClr>
                       </a:solidFill>
                       <a:prstDash val="solid"/>
                       <a:round/>
@@ -6319,7 +6613,9 @@
                     </a:lnT>
                     <a:lnB w="12700" cap="flat" cmpd="sng" algn="ctr">
                       <a:solidFill>
-                        <a:schemeClr val="tx1"/>
+                        <a:schemeClr val="bg1">
+                          <a:lumMod val="75000"/>
+                        </a:schemeClr>
                       </a:solidFill>
                       <a:prstDash val="solid"/>
                       <a:round/>
@@ -6339,7 +6635,9 @@
                       <a:r>
                         <a:rPr sz="1500" b="1">
                           <a:solidFill>
-                            <a:schemeClr val="tx1"/>
+                            <a:schemeClr val="accent1">
+                              <a:lumMod val="50000"/>
+                            </a:schemeClr>
                           </a:solidFill>
                         </a:rPr>
                         <a:t>Local low-cost brands</a:t>
@@ -6349,7 +6647,9 @@
                   <a:tcPr anchor="ctr">
                     <a:lnL w="12700" cap="flat" cmpd="sng" algn="ctr">
                       <a:solidFill>
-                        <a:schemeClr val="tx1"/>
+                        <a:schemeClr val="bg1">
+                          <a:lumMod val="75000"/>
+                        </a:schemeClr>
                       </a:solidFill>
                       <a:prstDash val="solid"/>
                       <a:round/>
@@ -6358,7 +6658,9 @@
                     </a:lnL>
                     <a:lnR w="12700" cap="flat" cmpd="sng" algn="ctr">
                       <a:solidFill>
-                        <a:schemeClr val="tx1"/>
+                        <a:schemeClr val="bg1">
+                          <a:lumMod val="75000"/>
+                        </a:schemeClr>
                       </a:solidFill>
                       <a:prstDash val="solid"/>
                       <a:round/>
@@ -6367,7 +6669,9 @@
                     </a:lnR>
                     <a:lnT w="12700" cap="flat" cmpd="sng" algn="ctr">
                       <a:solidFill>
-                        <a:schemeClr val="tx1"/>
+                        <a:schemeClr val="bg1">
+                          <a:lumMod val="75000"/>
+                        </a:schemeClr>
                       </a:solidFill>
                       <a:prstDash val="solid"/>
                       <a:round/>
@@ -6376,7 +6680,9 @@
                     </a:lnT>
                     <a:lnB w="12700" cap="flat" cmpd="sng" algn="ctr">
                       <a:solidFill>
-                        <a:schemeClr val="tx1"/>
+                        <a:schemeClr val="bg1">
+                          <a:lumMod val="75000"/>
+                        </a:schemeClr>
                       </a:solidFill>
                       <a:prstDash val="solid"/>
                       <a:round/>
@@ -6404,7 +6710,9 @@
                   <a:tcPr anchor="ctr">
                     <a:lnL w="12700" cap="flat" cmpd="sng" algn="ctr">
                       <a:solidFill>
-                        <a:schemeClr val="tx1"/>
+                        <a:schemeClr val="bg1">
+                          <a:lumMod val="75000"/>
+                        </a:schemeClr>
                       </a:solidFill>
                       <a:prstDash val="solid"/>
                       <a:round/>
@@ -6413,7 +6721,9 @@
                     </a:lnL>
                     <a:lnR w="12700" cap="flat" cmpd="sng" algn="ctr">
                       <a:solidFill>
-                        <a:schemeClr val="tx1"/>
+                        <a:schemeClr val="bg1">
+                          <a:lumMod val="75000"/>
+                        </a:schemeClr>
                       </a:solidFill>
                       <a:prstDash val="solid"/>
                       <a:round/>
@@ -6422,7 +6732,9 @@
                     </a:lnR>
                     <a:lnT w="12700" cap="flat" cmpd="sng" algn="ctr">
                       <a:solidFill>
-                        <a:schemeClr val="tx1"/>
+                        <a:schemeClr val="bg1">
+                          <a:lumMod val="75000"/>
+                        </a:schemeClr>
                       </a:solidFill>
                       <a:prstDash val="solid"/>
                       <a:round/>
@@ -6431,7 +6743,9 @@
                     </a:lnT>
                     <a:lnB w="12700" cap="flat" cmpd="sng" algn="ctr">
                       <a:solidFill>
-                        <a:schemeClr val="tx1"/>
+                        <a:schemeClr val="bg1">
+                          <a:lumMod val="75000"/>
+                        </a:schemeClr>
                       </a:solidFill>
                       <a:prstDash val="solid"/>
                       <a:round/>
@@ -6459,7 +6773,9 @@
                   <a:tcPr anchor="ctr">
                     <a:lnL w="12700" cap="flat" cmpd="sng" algn="ctr">
                       <a:solidFill>
-                        <a:schemeClr val="tx1"/>
+                        <a:schemeClr val="bg1">
+                          <a:lumMod val="75000"/>
+                        </a:schemeClr>
                       </a:solidFill>
                       <a:prstDash val="solid"/>
                       <a:round/>
@@ -6468,7 +6784,9 @@
                     </a:lnL>
                     <a:lnR w="12700" cap="flat" cmpd="sng" algn="ctr">
                       <a:solidFill>
-                        <a:schemeClr val="tx1"/>
+                        <a:schemeClr val="bg1">
+                          <a:lumMod val="75000"/>
+                        </a:schemeClr>
                       </a:solidFill>
                       <a:prstDash val="solid"/>
                       <a:round/>
@@ -6477,7 +6795,9 @@
                     </a:lnR>
                     <a:lnT w="12700" cap="flat" cmpd="sng" algn="ctr">
                       <a:solidFill>
-                        <a:schemeClr val="tx1"/>
+                        <a:schemeClr val="bg1">
+                          <a:lumMod val="75000"/>
+                        </a:schemeClr>
                       </a:solidFill>
                       <a:prstDash val="solid"/>
                       <a:round/>
@@ -6486,7 +6806,9 @@
                     </a:lnT>
                     <a:lnB w="12700" cap="flat" cmpd="sng" algn="ctr">
                       <a:solidFill>
-                        <a:schemeClr val="tx1"/>
+                        <a:schemeClr val="bg1">
+                          <a:lumMod val="75000"/>
+                        </a:schemeClr>
                       </a:solidFill>
                       <a:prstDash val="solid"/>
                       <a:round/>
@@ -6514,7 +6836,9 @@
                   <a:tcPr anchor="ctr">
                     <a:lnL w="12700" cap="flat" cmpd="sng" algn="ctr">
                       <a:solidFill>
-                        <a:schemeClr val="tx1"/>
+                        <a:schemeClr val="bg1">
+                          <a:lumMod val="75000"/>
+                        </a:schemeClr>
                       </a:solidFill>
                       <a:prstDash val="solid"/>
                       <a:round/>
@@ -6523,7 +6847,9 @@
                     </a:lnL>
                     <a:lnR w="12700" cap="flat" cmpd="sng" algn="ctr">
                       <a:solidFill>
-                        <a:schemeClr val="tx1"/>
+                        <a:schemeClr val="bg1">
+                          <a:lumMod val="75000"/>
+                        </a:schemeClr>
                       </a:solidFill>
                       <a:prstDash val="solid"/>
                       <a:round/>
@@ -6532,7 +6858,9 @@
                     </a:lnR>
                     <a:lnT w="12700" cap="flat" cmpd="sng" algn="ctr">
                       <a:solidFill>
-                        <a:schemeClr val="tx1"/>
+                        <a:schemeClr val="bg1">
+                          <a:lumMod val="75000"/>
+                        </a:schemeClr>
                       </a:solidFill>
                       <a:prstDash val="solid"/>
                       <a:round/>
@@ -6541,7 +6869,9 @@
                     </a:lnT>
                     <a:lnB w="12700" cap="flat" cmpd="sng" algn="ctr">
                       <a:solidFill>
-                        <a:schemeClr val="tx1"/>
+                        <a:schemeClr val="bg1">
+                          <a:lumMod val="75000"/>
+                        </a:schemeClr>
                       </a:solidFill>
                       <a:prstDash val="solid"/>
                       <a:round/>
@@ -6561,7 +6891,9 @@
                       <a:r>
                         <a:rPr sz="1500" b="1">
                           <a:solidFill>
-                            <a:schemeClr val="tx1"/>
+                            <a:schemeClr val="accent1">
+                              <a:lumMod val="50000"/>
+                            </a:schemeClr>
                           </a:solidFill>
                         </a:rPr>
                         <a:t>LG, Samsung, Hisense, Scanfrost</a:t>
@@ -6571,7 +6903,9 @@
                   <a:tcPr anchor="ctr">
                     <a:lnL w="12700" cap="flat" cmpd="sng" algn="ctr">
                       <a:solidFill>
-                        <a:schemeClr val="tx1"/>
+                        <a:schemeClr val="bg1">
+                          <a:lumMod val="75000"/>
+                        </a:schemeClr>
                       </a:solidFill>
                       <a:prstDash val="solid"/>
                       <a:round/>
@@ -6580,7 +6914,9 @@
                     </a:lnL>
                     <a:lnR w="12700" cap="flat" cmpd="sng" algn="ctr">
                       <a:solidFill>
-                        <a:schemeClr val="tx1"/>
+                        <a:schemeClr val="bg1">
+                          <a:lumMod val="75000"/>
+                        </a:schemeClr>
                       </a:solidFill>
                       <a:prstDash val="solid"/>
                       <a:round/>
@@ -6589,7 +6925,9 @@
                     </a:lnR>
                     <a:lnT w="12700" cap="flat" cmpd="sng" algn="ctr">
                       <a:solidFill>
-                        <a:schemeClr val="tx1"/>
+                        <a:schemeClr val="bg1">
+                          <a:lumMod val="75000"/>
+                        </a:schemeClr>
                       </a:solidFill>
                       <a:prstDash val="solid"/>
                       <a:round/>
@@ -6598,7 +6936,9 @@
                     </a:lnT>
                     <a:lnB w="12700" cap="flat" cmpd="sng" algn="ctr">
                       <a:solidFill>
-                        <a:schemeClr val="tx1"/>
+                        <a:schemeClr val="bg1">
+                          <a:lumMod val="75000"/>
+                        </a:schemeClr>
                       </a:solidFill>
                       <a:prstDash val="solid"/>
                       <a:round/>
@@ -6626,7 +6966,9 @@
                   <a:tcPr anchor="ctr">
                     <a:lnL w="12700" cap="flat" cmpd="sng" algn="ctr">
                       <a:solidFill>
-                        <a:schemeClr val="tx1"/>
+                        <a:schemeClr val="bg1">
+                          <a:lumMod val="75000"/>
+                        </a:schemeClr>
                       </a:solidFill>
                       <a:prstDash val="solid"/>
                       <a:round/>
@@ -6635,7 +6977,9 @@
                     </a:lnL>
                     <a:lnR w="12700" cap="flat" cmpd="sng" algn="ctr">
                       <a:solidFill>
-                        <a:schemeClr val="tx1"/>
+                        <a:schemeClr val="bg1">
+                          <a:lumMod val="75000"/>
+                        </a:schemeClr>
                       </a:solidFill>
                       <a:prstDash val="solid"/>
                       <a:round/>
@@ -6644,7 +6988,9 @@
                     </a:lnR>
                     <a:lnT w="12700" cap="flat" cmpd="sng" algn="ctr">
                       <a:solidFill>
-                        <a:schemeClr val="tx1"/>
+                        <a:schemeClr val="bg1">
+                          <a:lumMod val="75000"/>
+                        </a:schemeClr>
                       </a:solidFill>
                       <a:prstDash val="solid"/>
                       <a:round/>
@@ -6653,7 +6999,9 @@
                     </a:lnT>
                     <a:lnB w="12700" cap="flat" cmpd="sng" algn="ctr">
                       <a:solidFill>
-                        <a:schemeClr val="tx1"/>
+                        <a:schemeClr val="bg1">
+                          <a:lumMod val="75000"/>
+                        </a:schemeClr>
                       </a:solidFill>
                       <a:prstDash val="solid"/>
                       <a:round/>
@@ -6681,7 +7029,9 @@
                   <a:tcPr anchor="ctr">
                     <a:lnL w="12700" cap="flat" cmpd="sng" algn="ctr">
                       <a:solidFill>
-                        <a:schemeClr val="tx1"/>
+                        <a:schemeClr val="bg1">
+                          <a:lumMod val="75000"/>
+                        </a:schemeClr>
                       </a:solidFill>
                       <a:prstDash val="solid"/>
                       <a:round/>
@@ -6690,7 +7040,9 @@
                     </a:lnL>
                     <a:lnR w="12700" cap="flat" cmpd="sng" algn="ctr">
                       <a:solidFill>
-                        <a:schemeClr val="tx1"/>
+                        <a:schemeClr val="bg1">
+                          <a:lumMod val="75000"/>
+                        </a:schemeClr>
                       </a:solidFill>
                       <a:prstDash val="solid"/>
                       <a:round/>
@@ -6699,7 +7051,9 @@
                     </a:lnR>
                     <a:lnT w="12700" cap="flat" cmpd="sng" algn="ctr">
                       <a:solidFill>
-                        <a:schemeClr val="tx1"/>
+                        <a:schemeClr val="bg1">
+                          <a:lumMod val="75000"/>
+                        </a:schemeClr>
                       </a:solidFill>
                       <a:prstDash val="solid"/>
                       <a:round/>
@@ -6708,7 +7062,9 @@
                     </a:lnT>
                     <a:lnB w="12700" cap="flat" cmpd="sng" algn="ctr">
                       <a:solidFill>
-                        <a:schemeClr val="tx1"/>
+                        <a:schemeClr val="bg1">
+                          <a:lumMod val="75000"/>
+                        </a:schemeClr>
                       </a:solidFill>
                       <a:prstDash val="solid"/>
                       <a:round/>
@@ -6736,7 +7092,9 @@
                   <a:tcPr anchor="ctr">
                     <a:lnL w="12700" cap="flat" cmpd="sng" algn="ctr">
                       <a:solidFill>
-                        <a:schemeClr val="tx1"/>
+                        <a:schemeClr val="bg1">
+                          <a:lumMod val="75000"/>
+                        </a:schemeClr>
                       </a:solidFill>
                       <a:prstDash val="solid"/>
                       <a:round/>
@@ -6745,7 +7103,9 @@
                     </a:lnL>
                     <a:lnR w="12700" cap="flat" cmpd="sng" algn="ctr">
                       <a:solidFill>
-                        <a:schemeClr val="tx1"/>
+                        <a:schemeClr val="bg1">
+                          <a:lumMod val="75000"/>
+                        </a:schemeClr>
                       </a:solidFill>
                       <a:prstDash val="solid"/>
                       <a:round/>
@@ -6754,7 +7114,9 @@
                     </a:lnR>
                     <a:lnT w="12700" cap="flat" cmpd="sng" algn="ctr">
                       <a:solidFill>
-                        <a:schemeClr val="tx1"/>
+                        <a:schemeClr val="bg1">
+                          <a:lumMod val="75000"/>
+                        </a:schemeClr>
                       </a:solidFill>
                       <a:prstDash val="solid"/>
                       <a:round/>
@@ -6763,7 +7125,9 @@
                     </a:lnT>
                     <a:lnB w="12700" cap="flat" cmpd="sng" algn="ctr">
                       <a:solidFill>
-                        <a:schemeClr val="tx1"/>
+                        <a:schemeClr val="bg1">
+                          <a:lumMod val="75000"/>
+                        </a:schemeClr>
                       </a:solidFill>
                       <a:prstDash val="solid"/>
                       <a:round/>
@@ -6968,13 +7332,15 @@
             <a:avLst/>
           </a:prstGeom>
           <a:solidFill>
-            <a:schemeClr val="bg1">
-              <a:lumMod val="85000"/>
+            <a:schemeClr val="accent2">
+              <a:lumMod val="75000"/>
             </a:schemeClr>
           </a:solidFill>
-          <a:ln w="12700">
+          <a:ln w="19050">
             <a:solidFill>
-              <a:schemeClr val="tx1"/>
+              <a:schemeClr val="accent2">
+                <a:lumMod val="75000"/>
+              </a:schemeClr>
             </a:solidFill>
           </a:ln>
         </p:spPr>
@@ -7000,7 +7366,7 @@
             <a:r>
               <a:rPr sz="1800" b="1">
                 <a:solidFill>
-                  <a:schemeClr val="tx1"/>
+                  <a:schemeClr val="bg1"/>
                 </a:solidFill>
               </a:rPr>
               <a:t>Competitive rivalry</a:t>
@@ -7011,7 +7377,7 @@
             <a:r>
               <a:rPr sz="1600" b="1">
                 <a:solidFill>
-                  <a:schemeClr val="tx1"/>
+                  <a:schemeClr val="bg1"/>
                 </a:solidFill>
               </a:rPr>
               <a:t>High: 5 of 5</a:t>
@@ -7022,7 +7388,7 @@
             <a:r>
               <a:rPr sz="1400" b="0">
                 <a:solidFill>
-                  <a:schemeClr val="tx1"/>
+                  <a:schemeClr val="bg1"/>
                 </a:solidFill>
               </a:rPr>
               <a:t>Many local and foreign brands fight on price, promotions and shelf space</a:t>
@@ -7047,9 +7413,11 @@
           <a:solidFill>
             <a:schemeClr val="bg1"/>
           </a:solidFill>
-          <a:ln w="12700">
+          <a:ln w="19050">
             <a:solidFill>
-              <a:schemeClr val="tx1"/>
+              <a:schemeClr val="accent1">
+                <a:lumMod val="50000"/>
+              </a:schemeClr>
             </a:solidFill>
           </a:ln>
         </p:spPr>
@@ -7075,7 +7443,9 @@
             <a:r>
               <a:rPr sz="1800" b="1">
                 <a:solidFill>
-                  <a:schemeClr val="tx1"/>
+                  <a:schemeClr val="accent1">
+                    <a:lumMod val="50000"/>
+                  </a:schemeClr>
                 </a:solidFill>
               </a:rPr>
               <a:t>Threat of new entrants</a:t>
@@ -7107,7 +7477,7 @@
       </p:sp>
       <p:cxnSp>
         <p:nvCxnSpPr>
-          <p:cNvPr id="5" name="Connector 4"/>
+          <p:cNvPr id="5" name="Straight Arrow Connector 4"/>
           <p:cNvCxnSpPr/>
           <p:nvPr/>
         </p:nvCxnSpPr>
@@ -7121,7 +7491,9 @@
           </a:prstGeom>
           <a:ln w="19050">
             <a:solidFill>
-              <a:schemeClr val="tx1"/>
+              <a:schemeClr val="accent1">
+                <a:lumMod val="50000"/>
+              </a:schemeClr>
             </a:solidFill>
             <a:tailEnd type="triangle"/>
           </a:ln>
@@ -7158,9 +7530,11 @@
           <a:solidFill>
             <a:schemeClr val="bg1"/>
           </a:solidFill>
-          <a:ln w="12700">
+          <a:ln w="19050">
             <a:solidFill>
-              <a:schemeClr val="tx1"/>
+              <a:schemeClr val="accent1">
+                <a:lumMod val="50000"/>
+              </a:schemeClr>
             </a:solidFill>
           </a:ln>
         </p:spPr>
@@ -7186,7 +7560,9 @@
             <a:r>
               <a:rPr sz="1800" b="1">
                 <a:solidFill>
-                  <a:schemeClr val="tx1"/>
+                  <a:schemeClr val="accent1">
+                    <a:lumMod val="50000"/>
+                  </a:schemeClr>
                 </a:solidFill>
               </a:rPr>
               <a:t>Bargaining power of suppliers</a:t>
@@ -7218,7 +7594,7 @@
       </p:sp>
       <p:cxnSp>
         <p:nvCxnSpPr>
-          <p:cNvPr id="7" name="Connector 6"/>
+          <p:cNvPr id="7" name="Straight Arrow Connector 6"/>
           <p:cNvCxnSpPr/>
           <p:nvPr/>
         </p:nvCxnSpPr>
@@ -7232,7 +7608,9 @@
           </a:prstGeom>
           <a:ln w="19050">
             <a:solidFill>
-              <a:schemeClr val="tx1"/>
+              <a:schemeClr val="accent1">
+                <a:lumMod val="50000"/>
+              </a:schemeClr>
             </a:solidFill>
             <a:tailEnd type="triangle"/>
           </a:ln>
@@ -7269,9 +7647,11 @@
           <a:solidFill>
             <a:schemeClr val="bg1"/>
           </a:solidFill>
-          <a:ln w="12700">
+          <a:ln w="19050">
             <a:solidFill>
-              <a:schemeClr val="tx1"/>
+              <a:schemeClr val="accent1">
+                <a:lumMod val="50000"/>
+              </a:schemeClr>
             </a:solidFill>
           </a:ln>
         </p:spPr>
@@ -7297,7 +7677,9 @@
             <a:r>
               <a:rPr sz="1800" b="1">
                 <a:solidFill>
-                  <a:schemeClr val="tx1"/>
+                  <a:schemeClr val="accent1">
+                    <a:lumMod val="50000"/>
+                  </a:schemeClr>
                 </a:solidFill>
               </a:rPr>
               <a:t>Bargaining power of buyers</a:t>
@@ -7329,7 +7711,7 @@
       </p:sp>
       <p:cxnSp>
         <p:nvCxnSpPr>
-          <p:cNvPr id="9" name="Connector 8"/>
+          <p:cNvPr id="9" name="Straight Arrow Connector 8"/>
           <p:cNvCxnSpPr/>
           <p:nvPr/>
         </p:nvCxnSpPr>
@@ -7343,7 +7725,9 @@
           </a:prstGeom>
           <a:ln w="19050">
             <a:solidFill>
-              <a:schemeClr val="tx1"/>
+              <a:schemeClr val="accent1">
+                <a:lumMod val="50000"/>
+              </a:schemeClr>
             </a:solidFill>
             <a:tailEnd type="triangle"/>
           </a:ln>
@@ -7380,9 +7764,11 @@
           <a:solidFill>
             <a:schemeClr val="bg1"/>
           </a:solidFill>
-          <a:ln w="12700">
+          <a:ln w="19050">
             <a:solidFill>
-              <a:schemeClr val="tx1"/>
+              <a:schemeClr val="accent1">
+                <a:lumMod val="50000"/>
+              </a:schemeClr>
             </a:solidFill>
           </a:ln>
         </p:spPr>
@@ -7408,7 +7794,9 @@
             <a:r>
               <a:rPr sz="1800" b="1">
                 <a:solidFill>
-                  <a:schemeClr val="tx1"/>
+                  <a:schemeClr val="accent1">
+                    <a:lumMod val="50000"/>
+                  </a:schemeClr>
                 </a:solidFill>
               </a:rPr>
               <a:t>Threat of substitutes</a:t>
@@ -7440,7 +7828,7 @@
       </p:sp>
       <p:cxnSp>
         <p:nvCxnSpPr>
-          <p:cNvPr id="11" name="Connector 10"/>
+          <p:cNvPr id="11" name="Straight Arrow Connector 10"/>
           <p:cNvCxnSpPr/>
           <p:nvPr/>
         </p:nvCxnSpPr>
@@ -7454,7 +7842,9 @@
           </a:prstGeom>
           <a:ln w="19050">
             <a:solidFill>
-              <a:schemeClr val="tx1"/>
+              <a:schemeClr val="accent1">
+                <a:lumMod val="50000"/>
+              </a:schemeClr>
             </a:solidFill>
             <a:tailEnd type="triangle"/>
           </a:ln>
@@ -8018,7 +8408,13 @@
               <a:t>Average: </a:t>
             </a:r>
             <a:r>
-              <a:rPr sz="2200" b="1"/>
+              <a:rPr sz="2200" b="1">
+                <a:solidFill>
+                  <a:schemeClr val="accent1">
+                    <a:lumMod val="50000"/>
+                  </a:schemeClr>
+                </a:solidFill>
+              </a:rPr>
               <a:t>3.6 of 5 (High)</a:t>
             </a:r>
           </a:p>
@@ -8036,7 +8432,13 @@
               <a:t>Strongest: </a:t>
             </a:r>
             <a:r>
-              <a:rPr sz="2200" b="1"/>
+              <a:rPr sz="2200" b="1">
+                <a:solidFill>
+                  <a:schemeClr val="accent2">
+                    <a:lumMod val="75000"/>
+                  </a:schemeClr>
+                </a:solidFill>
+              </a:rPr>
               <a:t>Competitive rivalry</a:t>
             </a:r>
           </a:p>
@@ -8047,7 +8449,13 @@
               <a:t>Weakest: </a:t>
             </a:r>
             <a:r>
-              <a:rPr sz="2200" b="1"/>
+              <a:rPr sz="2200" b="1">
+                <a:solidFill>
+                  <a:schemeClr val="accent1">
+                    <a:lumMod val="50000"/>
+                  </a:schemeClr>
+                </a:solidFill>
+              </a:rPr>
               <a:t>Threat of new entrants</a:t>
             </a:r>
           </a:p>
@@ -8058,7 +8466,13 @@
               <a:t>Rated high: </a:t>
             </a:r>
             <a:r>
-              <a:rPr sz="2200" b="1"/>
+              <a:rPr sz="2200" b="1">
+                <a:solidFill>
+                  <a:schemeClr val="accent1">
+                    <a:lumMod val="50000"/>
+                  </a:schemeClr>
+                </a:solidFill>
+              </a:rPr>
               <a:t>3 of 5 forces</a:t>
             </a:r>
           </a:p>
@@ -8307,7 +8721,13 @@
               <a:buAutoNum type="arabicPeriod"/>
             </a:pPr>
             <a:r>
-              <a:rPr sz="2400" b="1"/>
+              <a:rPr sz="2400" b="1">
+                <a:solidFill>
+                  <a:schemeClr val="accent1">
+                    <a:lumMod val="50000"/>
+                  </a:schemeClr>
+                </a:solidFill>
+              </a:rPr>
               <a:t>Buy more raw materials in Nigeria</a:t>
             </a:r>
           </a:p>
@@ -8324,7 +8744,13 @@
               <a:buAutoNum type="arabicPeriod"/>
             </a:pPr>
             <a:r>
-              <a:rPr sz="2400" b="1"/>
+              <a:rPr sz="2400" b="1">
+                <a:solidFill>
+                  <a:schemeClr val="accent1">
+                    <a:lumMod val="50000"/>
+                  </a:schemeClr>
+                </a:solidFill>
+              </a:rPr>
               <a:t>Sell smaller, affordable packs</a:t>
             </a:r>
           </a:p>
@@ -8341,7 +8767,13 @@
               <a:buAutoNum type="arabicPeriod"/>
             </a:pPr>
             <a:r>
-              <a:rPr sz="2400" b="1"/>
+              <a:rPr sz="2400" b="1">
+                <a:solidFill>
+                  <a:schemeClr val="accent1">
+                    <a:lumMod val="50000"/>
+                  </a:schemeClr>
+                </a:solidFill>
+              </a:rPr>
               <a:t>Grow digital marketing and online sales</a:t>
             </a:r>
           </a:p>
@@ -8358,7 +8790,13 @@
               <a:buAutoNum type="arabicPeriod"/>
             </a:pPr>
             <a:r>
-              <a:rPr sz="2400" b="1"/>
+              <a:rPr sz="2400" b="1">
+                <a:solidFill>
+                  <a:schemeClr val="accent1">
+                    <a:lumMod val="50000"/>
+                  </a:schemeClr>
+                </a:solidFill>
+              </a:rPr>
               <a:t>Win customers competitors left behind</a:t>
             </a:r>
           </a:p>
@@ -8375,7 +8813,13 @@
               <a:buAutoNum type="arabicPeriod"/>
             </a:pPr>
             <a:r>
-              <a:rPr sz="2400" b="1"/>
+              <a:rPr sz="2400" b="1">
+                <a:solidFill>
+                  <a:schemeClr val="accent1">
+                    <a:lumMod val="50000"/>
+                  </a:schemeClr>
+                </a:solidFill>
+              </a:rPr>
               <a:t>Make decisions faster</a:t>
             </a:r>
           </a:p>
@@ -8581,7 +9025,13 @@
           <a:p>
             <a:pPr/>
             <a:r>
-              <a:rPr sz="2800" b="1"/>
+              <a:rPr sz="2800" b="1">
+                <a:solidFill>
+                  <a:schemeClr val="accent1">
+                    <a:lumMod val="50000"/>
+                  </a:schemeClr>
+                </a:solidFill>
+              </a:rPr>
               <a:t>PESTLE: </a:t>
             </a:r>
             <a:r>
@@ -8592,7 +9042,13 @@
           <a:p>
             <a:pPr/>
             <a:r>
-              <a:rPr sz="2800" b="1"/>
+              <a:rPr sz="2800" b="1">
+                <a:solidFill>
+                  <a:schemeClr val="accent1">
+                    <a:lumMod val="50000"/>
+                  </a:schemeClr>
+                </a:solidFill>
+              </a:rPr>
               <a:t>SWOT: </a:t>
             </a:r>
             <a:r>
@@ -8603,7 +9059,13 @@
           <a:p>
             <a:pPr/>
             <a:r>
-              <a:rPr sz="2800" b="1"/>
+              <a:rPr sz="2800" b="1">
+                <a:solidFill>
+                  <a:schemeClr val="accent1">
+                    <a:lumMod val="50000"/>
+                  </a:schemeClr>
+                </a:solidFill>
+              </a:rPr>
               <a:t>Industry: </a:t>
             </a:r>
             <a:r>
@@ -8614,7 +9076,13 @@
           <a:p>
             <a:pPr/>
             <a:r>
-              <a:rPr sz="2800" b="1"/>
+              <a:rPr sz="2800" b="1">
+                <a:solidFill>
+                  <a:schemeClr val="accent1">
+                    <a:lumMod val="50000"/>
+                  </a:schemeClr>
+                </a:solidFill>
+              </a:rPr>
               <a:t>Strategy: </a:t>
             </a:r>
             <a:r>
@@ -8789,7 +9257,12 @@
             <p:ph type="ctrTitle"/>
           </p:nvPr>
         </p:nvSpPr>
-        <p:spPr/>
+        <p:spPr>
+          <a:xfrm>
+            <a:off x="1524000" y="848043"/>
+            <a:ext cx="9144000" cy="2387600"/>
+          </a:xfrm>
+        </p:spPr>
         <p:txBody>
           <a:bodyPr/>
           <a:lstStyle/>
@@ -8823,6 +9296,43 @@
           </a:p>
         </p:txBody>
       </p:sp>
+      <p:cxnSp>
+        <p:nvCxnSpPr>
+          <p:cNvPr id="4" name="Straight Connector 3"/>
+          <p:cNvCxnSpPr/>
+          <p:nvPr/>
+        </p:nvCxnSpPr>
+        <p:spPr>
+          <a:xfrm>
+            <a:off x="4727448" y="3381947"/>
+            <a:ext cx="2743200" cy="0"/>
+          </a:xfrm>
+          <a:prstGeom prst="line">
+            <a:avLst/>
+          </a:prstGeom>
+          <a:ln w="38100">
+            <a:solidFill>
+              <a:schemeClr val="accent2">
+                <a:lumMod val="75000"/>
+              </a:schemeClr>
+            </a:solidFill>
+          </a:ln>
+        </p:spPr>
+        <p:style>
+          <a:lnRef idx="2">
+            <a:schemeClr val="accent1"/>
+          </a:lnRef>
+          <a:fillRef idx="0">
+            <a:schemeClr val="accent1"/>
+          </a:fillRef>
+          <a:effectRef idx="1">
+            <a:schemeClr val="accent1"/>
+          </a:effectRef>
+          <a:fontRef idx="minor">
+            <a:schemeClr val="tx1"/>
+          </a:fontRef>
+        </p:style>
+      </p:cxnSp>
     </p:spTree>
   </p:cSld>
   <p:clrMapOvr>
@@ -8889,24 +9399,59 @@
                                   </p:childTnLst>
                                 </p:cTn>
                               </p:par>
-                            </p:childTnLst>
-                          </p:cTn>
-                        </p:par>
-                        <p:par>
-                          <p:cTn id="8" fill="hold">
-                            <p:stCondLst>
-                              <p:cond delay="500"/>
-                            </p:stCondLst>
-                            <p:childTnLst>
                               <p:par>
-                                <p:cTn id="9" presetID="10" presetClass="entr" presetSubtype="0" fill="hold" grpId="0" nodeType="afterEffect">
+                                <p:cTn id="8" presetID="22" presetClass="entr" presetSubtype="8" fill="hold" nodeType="withEffect">
                                   <p:stCondLst>
                                     <p:cond delay="0"/>
                                   </p:stCondLst>
                                   <p:childTnLst>
                                     <p:set>
                                       <p:cBhvr>
-                                        <p:cTn id="10" dur="1" fill="hold">
+                                        <p:cTn id="9" dur="1" fill="hold">
+                                          <p:stCondLst>
+                                            <p:cond delay="0"/>
+                                          </p:stCondLst>
+                                        </p:cTn>
+                                        <p:tgtEl>
+                                          <p:spTgt spid="4"/>
+                                        </p:tgtEl>
+                                        <p:attrNameLst>
+                                          <p:attrName>style.visibility</p:attrName>
+                                        </p:attrNameLst>
+                                      </p:cBhvr>
+                                      <p:to>
+                                        <p:strVal val="visible"/>
+                                      </p:to>
+                                    </p:set>
+                                    <p:animEffect transition="in" filter="wipe(right)">
+                                      <p:cBhvr>
+                                        <p:cTn id="10" dur="500"/>
+                                        <p:tgtEl>
+                                          <p:spTgt spid="4"/>
+                                        </p:tgtEl>
+                                      </p:cBhvr>
+                                    </p:animEffect>
+                                  </p:childTnLst>
+                                </p:cTn>
+                              </p:par>
+                            </p:childTnLst>
+                          </p:cTn>
+                        </p:par>
+                        <p:par>
+                          <p:cTn id="11" fill="hold">
+                            <p:stCondLst>
+                              <p:cond delay="500"/>
+                            </p:stCondLst>
+                            <p:childTnLst>
+                              <p:par>
+                                <p:cTn id="12" presetID="10" presetClass="entr" presetSubtype="0" fill="hold" grpId="0" nodeType="afterEffect">
+                                  <p:stCondLst>
+                                    <p:cond delay="0"/>
+                                  </p:stCondLst>
+                                  <p:childTnLst>
+                                    <p:set>
+                                      <p:cBhvr>
+                                        <p:cTn id="13" dur="1" fill="hold">
                                           <p:stCondLst>
                                             <p:cond delay="0"/>
                                           </p:stCondLst>
@@ -8924,7 +9469,7 @@
                                     </p:set>
                                     <p:animEffect transition="in" filter="fade">
                                       <p:cBhvr>
-                                        <p:cTn id="11" dur="500"/>
+                                        <p:cTn id="14" dur="500"/>
                                         <p:tgtEl>
                                           <p:spTgt spid="3"/>
                                         </p:tgtEl>
@@ -9016,7 +9561,13 @@
           <a:p>
             <a:pPr/>
             <a:r>
-              <a:rPr sz="2400" b="1"/>
+              <a:rPr sz="2400" b="1">
+                <a:solidFill>
+                  <a:schemeClr val="accent1">
+                    <a:lumMod val="50000"/>
+                  </a:schemeClr>
+                </a:solidFill>
+              </a:rPr>
               <a:t>Family Care (consumer)</a:t>
             </a:r>
           </a:p>
@@ -9030,7 +9581,13 @@
           <a:p>
             <a:pPr/>
             <a:r>
-              <a:rPr sz="2400" b="1"/>
+              <a:rPr sz="2400" b="1">
+                <a:solidFill>
+                  <a:schemeClr val="accent1">
+                    <a:lumMod val="50000"/>
+                  </a:schemeClr>
+                </a:solidFill>
+              </a:rPr>
               <a:t>Electrical</a:t>
             </a:r>
           </a:p>
@@ -9044,7 +9601,13 @@
           <a:p>
             <a:pPr/>
             <a:r>
-              <a:rPr sz="2400" b="1"/>
+              <a:rPr sz="2400" b="1">
+                <a:solidFill>
+                  <a:schemeClr val="accent1">
+                    <a:lumMod val="50000"/>
+                  </a:schemeClr>
+                </a:solidFill>
+              </a:rPr>
               <a:t>Owner</a:t>
             </a:r>
           </a:p>
@@ -9074,7 +9637,13 @@
           <a:p>
             <a:pPr/>
             <a:r>
-              <a:rPr sz="2400" b="1"/>
+              <a:rPr sz="2400" b="1">
+                <a:solidFill>
+                  <a:schemeClr val="accent1">
+                    <a:lumMod val="50000"/>
+                  </a:schemeClr>
+                </a:solidFill>
+              </a:rPr>
               <a:t>Mr Oghale Ogueni</a:t>
             </a:r>
             <a:r>
@@ -9085,7 +9654,13 @@
           <a:p>
             <a:pPr/>
             <a:r>
-              <a:rPr sz="2400" b="1"/>
+              <a:rPr sz="2400" b="1">
+                <a:solidFill>
+                  <a:schemeClr val="accent1">
+                    <a:lumMod val="50000"/>
+                  </a:schemeClr>
+                </a:solidFill>
+              </a:rPr>
               <a:t>Mr Oladare Oresukan</a:t>
             </a:r>
             <a:r>
@@ -9096,7 +9671,13 @@
           <a:p>
             <a:pPr/>
             <a:r>
-              <a:rPr sz="2400" b="1"/>
+              <a:rPr sz="2400" b="1">
+                <a:solidFill>
+                  <a:schemeClr val="accent1">
+                    <a:lumMod val="50000"/>
+                  </a:schemeClr>
+                </a:solidFill>
+              </a:rPr>
               <a:t>Structure</a:t>
             </a:r>
           </a:p>
@@ -9387,7 +9968,7 @@
                       <a:r>
                         <a:rPr sz="1600" b="1">
                           <a:solidFill>
-                            <a:schemeClr val="tx1"/>
+                            <a:schemeClr val="bg1"/>
                           </a:solidFill>
                         </a:rPr>
                         <a:t>Factor</a:t>
@@ -9397,7 +9978,9 @@
                   <a:tcPr anchor="ctr">
                     <a:lnL w="12700" cap="flat" cmpd="sng" algn="ctr">
                       <a:solidFill>
-                        <a:schemeClr val="tx1"/>
+                        <a:schemeClr val="bg1">
+                          <a:lumMod val="75000"/>
+                        </a:schemeClr>
                       </a:solidFill>
                       <a:prstDash val="solid"/>
                       <a:round/>
@@ -9406,7 +9989,9 @@
                     </a:lnL>
                     <a:lnR w="12700" cap="flat" cmpd="sng" algn="ctr">
                       <a:solidFill>
-                        <a:schemeClr val="tx1"/>
+                        <a:schemeClr val="bg1">
+                          <a:lumMod val="75000"/>
+                        </a:schemeClr>
                       </a:solidFill>
                       <a:prstDash val="solid"/>
                       <a:round/>
@@ -9415,7 +10000,9 @@
                     </a:lnR>
                     <a:lnT w="12700" cap="flat" cmpd="sng" algn="ctr">
                       <a:solidFill>
-                        <a:schemeClr val="tx1"/>
+                        <a:schemeClr val="bg1">
+                          <a:lumMod val="75000"/>
+                        </a:schemeClr>
                       </a:solidFill>
                       <a:prstDash val="solid"/>
                       <a:round/>
@@ -9424,7 +10011,9 @@
                     </a:lnT>
                     <a:lnB w="12700" cap="flat" cmpd="sng" algn="ctr">
                       <a:solidFill>
-                        <a:schemeClr val="tx1"/>
+                        <a:schemeClr val="bg1">
+                          <a:lumMod val="75000"/>
+                        </a:schemeClr>
                       </a:solidFill>
                       <a:prstDash val="solid"/>
                       <a:round/>
@@ -9432,8 +10021,8 @@
                       <a:tailEnd type="none" w="med" len="med"/>
                     </a:lnB>
                     <a:solidFill>
-                      <a:schemeClr val="bg1">
-                        <a:lumMod val="85000"/>
+                      <a:schemeClr val="accent1">
+                        <a:lumMod val="50000"/>
                       </a:schemeClr>
                     </a:solidFill>
                   </a:tcPr>
@@ -9446,7 +10035,7 @@
                       <a:r>
                         <a:rPr sz="1600" b="1">
                           <a:solidFill>
-                            <a:schemeClr val="tx1"/>
+                            <a:schemeClr val="bg1"/>
                           </a:solidFill>
                         </a:rPr>
                         <a:t>Issue</a:t>
@@ -9456,7 +10045,9 @@
                   <a:tcPr anchor="ctr">
                     <a:lnL w="12700" cap="flat" cmpd="sng" algn="ctr">
                       <a:solidFill>
-                        <a:schemeClr val="tx1"/>
+                        <a:schemeClr val="bg1">
+                          <a:lumMod val="75000"/>
+                        </a:schemeClr>
                       </a:solidFill>
                       <a:prstDash val="solid"/>
                       <a:round/>
@@ -9465,7 +10056,9 @@
                     </a:lnL>
                     <a:lnR w="12700" cap="flat" cmpd="sng" algn="ctr">
                       <a:solidFill>
-                        <a:schemeClr val="tx1"/>
+                        <a:schemeClr val="bg1">
+                          <a:lumMod val="75000"/>
+                        </a:schemeClr>
                       </a:solidFill>
                       <a:prstDash val="solid"/>
                       <a:round/>
@@ -9474,7 +10067,9 @@
                     </a:lnR>
                     <a:lnT w="12700" cap="flat" cmpd="sng" algn="ctr">
                       <a:solidFill>
-                        <a:schemeClr val="tx1"/>
+                        <a:schemeClr val="bg1">
+                          <a:lumMod val="75000"/>
+                        </a:schemeClr>
                       </a:solidFill>
                       <a:prstDash val="solid"/>
                       <a:round/>
@@ -9483,7 +10078,9 @@
                     </a:lnT>
                     <a:lnB w="12700" cap="flat" cmpd="sng" algn="ctr">
                       <a:solidFill>
-                        <a:schemeClr val="tx1"/>
+                        <a:schemeClr val="bg1">
+                          <a:lumMod val="75000"/>
+                        </a:schemeClr>
                       </a:solidFill>
                       <a:prstDash val="solid"/>
                       <a:round/>
@@ -9491,8 +10088,8 @@
                       <a:tailEnd type="none" w="med" len="med"/>
                     </a:lnB>
                     <a:solidFill>
-                      <a:schemeClr val="bg1">
-                        <a:lumMod val="85000"/>
+                      <a:schemeClr val="accent1">
+                        <a:lumMod val="50000"/>
                       </a:schemeClr>
                     </a:solidFill>
                   </a:tcPr>
@@ -9505,7 +10102,7 @@
                       <a:r>
                         <a:rPr sz="1600" b="1">
                           <a:solidFill>
-                            <a:schemeClr val="tx1"/>
+                            <a:schemeClr val="bg1"/>
                           </a:solidFill>
                         </a:rPr>
                         <a:t>Effect on PZ Nigeria</a:t>
@@ -9515,7 +10112,9 @@
                   <a:tcPr anchor="ctr">
                     <a:lnL w="12700" cap="flat" cmpd="sng" algn="ctr">
                       <a:solidFill>
-                        <a:schemeClr val="tx1"/>
+                        <a:schemeClr val="bg1">
+                          <a:lumMod val="75000"/>
+                        </a:schemeClr>
                       </a:solidFill>
                       <a:prstDash val="solid"/>
                       <a:round/>
@@ -9524,7 +10123,9 @@
                     </a:lnL>
                     <a:lnR w="12700" cap="flat" cmpd="sng" algn="ctr">
                       <a:solidFill>
-                        <a:schemeClr val="tx1"/>
+                        <a:schemeClr val="bg1">
+                          <a:lumMod val="75000"/>
+                        </a:schemeClr>
                       </a:solidFill>
                       <a:prstDash val="solid"/>
                       <a:round/>
@@ -9533,7 +10134,9 @@
                     </a:lnR>
                     <a:lnT w="12700" cap="flat" cmpd="sng" algn="ctr">
                       <a:solidFill>
-                        <a:schemeClr val="tx1"/>
+                        <a:schemeClr val="bg1">
+                          <a:lumMod val="75000"/>
+                        </a:schemeClr>
                       </a:solidFill>
                       <a:prstDash val="solid"/>
                       <a:round/>
@@ -9542,7 +10145,9 @@
                     </a:lnT>
                     <a:lnB w="12700" cap="flat" cmpd="sng" algn="ctr">
                       <a:solidFill>
-                        <a:schemeClr val="tx1"/>
+                        <a:schemeClr val="bg1">
+                          <a:lumMod val="75000"/>
+                        </a:schemeClr>
                       </a:solidFill>
                       <a:prstDash val="solid"/>
                       <a:round/>
@@ -9550,8 +10155,8 @@
                       <a:tailEnd type="none" w="med" len="med"/>
                     </a:lnB>
                     <a:solidFill>
-                      <a:schemeClr val="bg1">
-                        <a:lumMod val="85000"/>
+                      <a:schemeClr val="accent1">
+                        <a:lumMod val="50000"/>
                       </a:schemeClr>
                     </a:solidFill>
                   </a:tcPr>
@@ -9565,7 +10170,7 @@
                       <a:r>
                         <a:rPr sz="1600" b="1">
                           <a:solidFill>
-                            <a:schemeClr val="tx1"/>
+                            <a:schemeClr val="bg1"/>
                           </a:solidFill>
                         </a:rPr>
                         <a:t>Score (of 25)</a:t>
@@ -9575,7 +10180,9 @@
                   <a:tcPr anchor="ctr">
                     <a:lnL w="12700" cap="flat" cmpd="sng" algn="ctr">
                       <a:solidFill>
-                        <a:schemeClr val="tx1"/>
+                        <a:schemeClr val="bg1">
+                          <a:lumMod val="75000"/>
+                        </a:schemeClr>
                       </a:solidFill>
                       <a:prstDash val="solid"/>
                       <a:round/>
@@ -9584,7 +10191,9 @@
                     </a:lnL>
                     <a:lnR w="12700" cap="flat" cmpd="sng" algn="ctr">
                       <a:solidFill>
-                        <a:schemeClr val="tx1"/>
+                        <a:schemeClr val="bg1">
+                          <a:lumMod val="75000"/>
+                        </a:schemeClr>
                       </a:solidFill>
                       <a:prstDash val="solid"/>
                       <a:round/>
@@ -9593,7 +10202,9 @@
                     </a:lnR>
                     <a:lnT w="12700" cap="flat" cmpd="sng" algn="ctr">
                       <a:solidFill>
-                        <a:schemeClr val="tx1"/>
+                        <a:schemeClr val="bg1">
+                          <a:lumMod val="75000"/>
+                        </a:schemeClr>
                       </a:solidFill>
                       <a:prstDash val="solid"/>
                       <a:round/>
@@ -9602,7 +10213,9 @@
                     </a:lnT>
                     <a:lnB w="12700" cap="flat" cmpd="sng" algn="ctr">
                       <a:solidFill>
-                        <a:schemeClr val="tx1"/>
+                        <a:schemeClr val="bg1">
+                          <a:lumMod val="75000"/>
+                        </a:schemeClr>
                       </a:solidFill>
                       <a:prstDash val="solid"/>
                       <a:round/>
@@ -9610,8 +10223,8 @@
                       <a:tailEnd type="none" w="med" len="med"/>
                     </a:lnB>
                     <a:solidFill>
-                      <a:schemeClr val="bg1">
-                        <a:lumMod val="85000"/>
+                      <a:schemeClr val="accent1">
+                        <a:lumMod val="50000"/>
                       </a:schemeClr>
                     </a:solidFill>
                   </a:tcPr>
@@ -9625,7 +10238,7 @@
                       <a:r>
                         <a:rPr sz="1600" b="1">
                           <a:solidFill>
-                            <a:schemeClr val="tx1"/>
+                            <a:schemeClr val="bg1"/>
                           </a:solidFill>
                         </a:rPr>
                         <a:t>Priority</a:t>
@@ -9635,7 +10248,9 @@
                   <a:tcPr anchor="ctr">
                     <a:lnL w="12700" cap="flat" cmpd="sng" algn="ctr">
                       <a:solidFill>
-                        <a:schemeClr val="tx1"/>
+                        <a:schemeClr val="bg1">
+                          <a:lumMod val="75000"/>
+                        </a:schemeClr>
                       </a:solidFill>
                       <a:prstDash val="solid"/>
                       <a:round/>
@@ -9644,7 +10259,9 @@
                     </a:lnL>
                     <a:lnR w="12700" cap="flat" cmpd="sng" algn="ctr">
                       <a:solidFill>
-                        <a:schemeClr val="tx1"/>
+                        <a:schemeClr val="bg1">
+                          <a:lumMod val="75000"/>
+                        </a:schemeClr>
                       </a:solidFill>
                       <a:prstDash val="solid"/>
                       <a:round/>
@@ -9653,7 +10270,9 @@
                     </a:lnR>
                     <a:lnT w="12700" cap="flat" cmpd="sng" algn="ctr">
                       <a:solidFill>
-                        <a:schemeClr val="tx1"/>
+                        <a:schemeClr val="bg1">
+                          <a:lumMod val="75000"/>
+                        </a:schemeClr>
                       </a:solidFill>
                       <a:prstDash val="solid"/>
                       <a:round/>
@@ -9662,7 +10281,9 @@
                     </a:lnT>
                     <a:lnB w="12700" cap="flat" cmpd="sng" algn="ctr">
                       <a:solidFill>
-                        <a:schemeClr val="tx1"/>
+                        <a:schemeClr val="bg1">
+                          <a:lumMod val="75000"/>
+                        </a:schemeClr>
                       </a:solidFill>
                       <a:prstDash val="solid"/>
                       <a:round/>
@@ -9670,8 +10291,8 @@
                       <a:tailEnd type="none" w="med" len="med"/>
                     </a:lnB>
                     <a:solidFill>
-                      <a:schemeClr val="bg1">
-                        <a:lumMod val="85000"/>
+                      <a:schemeClr val="accent1">
+                        <a:lumMod val="50000"/>
                       </a:schemeClr>
                     </a:solidFill>
                   </a:tcPr>
@@ -9686,7 +10307,9 @@
                       <a:r>
                         <a:rPr sz="1600" b="1">
                           <a:solidFill>
-                            <a:schemeClr val="tx1"/>
+                            <a:schemeClr val="accent1">
+                              <a:lumMod val="50000"/>
+                            </a:schemeClr>
                           </a:solidFill>
                         </a:rPr>
                         <a:t>Political</a:t>
@@ -9694,7 +10317,7 @@
                     </a:p>
                     <a:p>
                       <a:r>
-                        <a:rPr sz="1400" b="0">
+                        <a:rPr sz="1400">
                           <a:solidFill>
                             <a:schemeClr val="tx1"/>
                           </a:solidFill>
@@ -9706,7 +10329,9 @@
                   <a:tcPr anchor="ctr">
                     <a:lnL w="12700" cap="flat" cmpd="sng" algn="ctr">
                       <a:solidFill>
-                        <a:schemeClr val="tx1"/>
+                        <a:schemeClr val="bg1">
+                          <a:lumMod val="75000"/>
+                        </a:schemeClr>
                       </a:solidFill>
                       <a:prstDash val="solid"/>
                       <a:round/>
@@ -9715,7 +10340,9 @@
                     </a:lnL>
                     <a:lnR w="12700" cap="flat" cmpd="sng" algn="ctr">
                       <a:solidFill>
-                        <a:schemeClr val="tx1"/>
+                        <a:schemeClr val="bg1">
+                          <a:lumMod val="75000"/>
+                        </a:schemeClr>
                       </a:solidFill>
                       <a:prstDash val="solid"/>
                       <a:round/>
@@ -9724,7 +10351,9 @@
                     </a:lnR>
                     <a:lnT w="12700" cap="flat" cmpd="sng" algn="ctr">
                       <a:solidFill>
-                        <a:schemeClr val="tx1"/>
+                        <a:schemeClr val="bg1">
+                          <a:lumMod val="75000"/>
+                        </a:schemeClr>
                       </a:solidFill>
                       <a:prstDash val="solid"/>
                       <a:round/>
@@ -9733,7 +10362,9 @@
                     </a:lnT>
                     <a:lnB w="12700" cap="flat" cmpd="sng" algn="ctr">
                       <a:solidFill>
-                        <a:schemeClr val="tx1"/>
+                        <a:schemeClr val="bg1">
+                          <a:lumMod val="75000"/>
+                        </a:schemeClr>
                       </a:solidFill>
                       <a:prstDash val="solid"/>
                       <a:round/>
@@ -9761,7 +10392,9 @@
                   <a:tcPr anchor="ctr">
                     <a:lnL w="12700" cap="flat" cmpd="sng" algn="ctr">
                       <a:solidFill>
-                        <a:schemeClr val="tx1"/>
+                        <a:schemeClr val="bg1">
+                          <a:lumMod val="75000"/>
+                        </a:schemeClr>
                       </a:solidFill>
                       <a:prstDash val="solid"/>
                       <a:round/>
@@ -9770,7 +10403,9 @@
                     </a:lnL>
                     <a:lnR w="12700" cap="flat" cmpd="sng" algn="ctr">
                       <a:solidFill>
-                        <a:schemeClr val="tx1"/>
+                        <a:schemeClr val="bg1">
+                          <a:lumMod val="75000"/>
+                        </a:schemeClr>
                       </a:solidFill>
                       <a:prstDash val="solid"/>
                       <a:round/>
@@ -9779,7 +10414,9 @@
                     </a:lnR>
                     <a:lnT w="12700" cap="flat" cmpd="sng" algn="ctr">
                       <a:solidFill>
-                        <a:schemeClr val="tx1"/>
+                        <a:schemeClr val="bg1">
+                          <a:lumMod val="75000"/>
+                        </a:schemeClr>
                       </a:solidFill>
                       <a:prstDash val="solid"/>
                       <a:round/>
@@ -9788,7 +10425,9 @@
                     </a:lnT>
                     <a:lnB w="12700" cap="flat" cmpd="sng" algn="ctr">
                       <a:solidFill>
-                        <a:schemeClr val="tx1"/>
+                        <a:schemeClr val="bg1">
+                          <a:lumMod val="75000"/>
+                        </a:schemeClr>
                       </a:solidFill>
                       <a:prstDash val="solid"/>
                       <a:round/>
@@ -9816,7 +10455,9 @@
                   <a:tcPr anchor="ctr">
                     <a:lnL w="12700" cap="flat" cmpd="sng" algn="ctr">
                       <a:solidFill>
-                        <a:schemeClr val="tx1"/>
+                        <a:schemeClr val="bg1">
+                          <a:lumMod val="75000"/>
+                        </a:schemeClr>
                       </a:solidFill>
                       <a:prstDash val="solid"/>
                       <a:round/>
@@ -9825,7 +10466,9 @@
                     </a:lnL>
                     <a:lnR w="12700" cap="flat" cmpd="sng" algn="ctr">
                       <a:solidFill>
-                        <a:schemeClr val="tx1"/>
+                        <a:schemeClr val="bg1">
+                          <a:lumMod val="75000"/>
+                        </a:schemeClr>
                       </a:solidFill>
                       <a:prstDash val="solid"/>
                       <a:round/>
@@ -9834,7 +10477,9 @@
                     </a:lnR>
                     <a:lnT w="12700" cap="flat" cmpd="sng" algn="ctr">
                       <a:solidFill>
-                        <a:schemeClr val="tx1"/>
+                        <a:schemeClr val="bg1">
+                          <a:lumMod val="75000"/>
+                        </a:schemeClr>
                       </a:solidFill>
                       <a:prstDash val="solid"/>
                       <a:round/>
@@ -9843,7 +10488,9 @@
                     </a:lnT>
                     <a:lnB w="12700" cap="flat" cmpd="sng" algn="ctr">
                       <a:solidFill>
-                        <a:schemeClr val="tx1"/>
+                        <a:schemeClr val="bg1">
+                          <a:lumMod val="75000"/>
+                        </a:schemeClr>
                       </a:solidFill>
                       <a:prstDash val="solid"/>
                       <a:round/>
@@ -9872,7 +10519,9 @@
                   <a:tcPr anchor="ctr">
                     <a:lnL w="12700" cap="flat" cmpd="sng" algn="ctr">
                       <a:solidFill>
-                        <a:schemeClr val="tx1"/>
+                        <a:schemeClr val="bg1">
+                          <a:lumMod val="75000"/>
+                        </a:schemeClr>
                       </a:solidFill>
                       <a:prstDash val="solid"/>
                       <a:round/>
@@ -9881,7 +10530,9 @@
                     </a:lnL>
                     <a:lnR w="12700" cap="flat" cmpd="sng" algn="ctr">
                       <a:solidFill>
-                        <a:schemeClr val="tx1"/>
+                        <a:schemeClr val="bg1">
+                          <a:lumMod val="75000"/>
+                        </a:schemeClr>
                       </a:solidFill>
                       <a:prstDash val="solid"/>
                       <a:round/>
@@ -9890,7 +10541,9 @@
                     </a:lnR>
                     <a:lnT w="12700" cap="flat" cmpd="sng" algn="ctr">
                       <a:solidFill>
-                        <a:schemeClr val="tx1"/>
+                        <a:schemeClr val="bg1">
+                          <a:lumMod val="75000"/>
+                        </a:schemeClr>
                       </a:solidFill>
                       <a:prstDash val="solid"/>
                       <a:round/>
@@ -9899,7 +10552,9 @@
                     </a:lnT>
                     <a:lnB w="12700" cap="flat" cmpd="sng" algn="ctr">
                       <a:solidFill>
-                        <a:schemeClr val="tx1"/>
+                        <a:schemeClr val="bg1">
+                          <a:lumMod val="75000"/>
+                        </a:schemeClr>
                       </a:solidFill>
                       <a:prstDash val="solid"/>
                       <a:round/>
@@ -9916,9 +10571,11 @@
                     <a:p>
                       <a:pPr algn="ctr"/>
                       <a:r>
-                        <a:rPr sz="1600" b="0">
+                        <a:rPr sz="1600" b="1">
                           <a:solidFill>
-                            <a:schemeClr val="tx1"/>
+                            <a:schemeClr val="accent2">
+                              <a:lumMod val="75000"/>
+                            </a:schemeClr>
                           </a:solidFill>
                         </a:rPr>
                         <a:t>High</a:t>
@@ -9928,7 +10585,9 @@
                   <a:tcPr anchor="ctr">
                     <a:lnL w="12700" cap="flat" cmpd="sng" algn="ctr">
                       <a:solidFill>
-                        <a:schemeClr val="tx1"/>
+                        <a:schemeClr val="bg1">
+                          <a:lumMod val="75000"/>
+                        </a:schemeClr>
                       </a:solidFill>
                       <a:prstDash val="solid"/>
                       <a:round/>
@@ -9937,7 +10596,9 @@
                     </a:lnL>
                     <a:lnR w="12700" cap="flat" cmpd="sng" algn="ctr">
                       <a:solidFill>
-                        <a:schemeClr val="tx1"/>
+                        <a:schemeClr val="bg1">
+                          <a:lumMod val="75000"/>
+                        </a:schemeClr>
                       </a:solidFill>
                       <a:prstDash val="solid"/>
                       <a:round/>
@@ -9946,7 +10607,9 @@
                     </a:lnR>
                     <a:lnT w="12700" cap="flat" cmpd="sng" algn="ctr">
                       <a:solidFill>
-                        <a:schemeClr val="tx1"/>
+                        <a:schemeClr val="bg1">
+                          <a:lumMod val="75000"/>
+                        </a:schemeClr>
                       </a:solidFill>
                       <a:prstDash val="solid"/>
                       <a:round/>
@@ -9955,7 +10618,9 @@
                     </a:lnT>
                     <a:lnB w="12700" cap="flat" cmpd="sng" algn="ctr">
                       <a:solidFill>
-                        <a:schemeClr val="tx1"/>
+                        <a:schemeClr val="bg1">
+                          <a:lumMod val="75000"/>
+                        </a:schemeClr>
                       </a:solidFill>
                       <a:prstDash val="solid"/>
                       <a:round/>
@@ -9976,7 +10641,9 @@
                   <a:tcPr anchor="ctr">
                     <a:lnL w="12700" cap="flat" cmpd="sng" algn="ctr">
                       <a:solidFill>
-                        <a:schemeClr val="tx1"/>
+                        <a:schemeClr val="bg1">
+                          <a:lumMod val="75000"/>
+                        </a:schemeClr>
                       </a:solidFill>
                       <a:prstDash val="solid"/>
                       <a:round/>
@@ -9985,7 +10652,9 @@
                     </a:lnL>
                     <a:lnR w="12700" cap="flat" cmpd="sng" algn="ctr">
                       <a:solidFill>
-                        <a:schemeClr val="tx1"/>
+                        <a:schemeClr val="bg1">
+                          <a:lumMod val="75000"/>
+                        </a:schemeClr>
                       </a:solidFill>
                       <a:prstDash val="solid"/>
                       <a:round/>
@@ -9994,7 +10663,9 @@
                     </a:lnR>
                     <a:lnT w="12700" cap="flat" cmpd="sng" algn="ctr">
                       <a:solidFill>
-                        <a:schemeClr val="tx1"/>
+                        <a:schemeClr val="bg1">
+                          <a:lumMod val="75000"/>
+                        </a:schemeClr>
                       </a:solidFill>
                       <a:prstDash val="solid"/>
                       <a:round/>
@@ -10003,7 +10674,9 @@
                     </a:lnT>
                     <a:lnB w="12700" cap="flat" cmpd="sng" algn="ctr">
                       <a:solidFill>
-                        <a:schemeClr val="tx1"/>
+                        <a:schemeClr val="bg1">
+                          <a:lumMod val="75000"/>
+                        </a:schemeClr>
                       </a:solidFill>
                       <a:prstDash val="solid"/>
                       <a:round/>
@@ -10031,7 +10704,9 @@
                   <a:tcPr anchor="ctr">
                     <a:lnL w="12700" cap="flat" cmpd="sng" algn="ctr">
                       <a:solidFill>
-                        <a:schemeClr val="tx1"/>
+                        <a:schemeClr val="bg1">
+                          <a:lumMod val="75000"/>
+                        </a:schemeClr>
                       </a:solidFill>
                       <a:prstDash val="solid"/>
                       <a:round/>
@@ -10040,7 +10715,9 @@
                     </a:lnL>
                     <a:lnR w="12700" cap="flat" cmpd="sng" algn="ctr">
                       <a:solidFill>
-                        <a:schemeClr val="tx1"/>
+                        <a:schemeClr val="bg1">
+                          <a:lumMod val="75000"/>
+                        </a:schemeClr>
                       </a:solidFill>
                       <a:prstDash val="solid"/>
                       <a:round/>
@@ -10049,7 +10726,9 @@
                     </a:lnR>
                     <a:lnT w="12700" cap="flat" cmpd="sng" algn="ctr">
                       <a:solidFill>
-                        <a:schemeClr val="tx1"/>
+                        <a:schemeClr val="bg1">
+                          <a:lumMod val="75000"/>
+                        </a:schemeClr>
                       </a:solidFill>
                       <a:prstDash val="solid"/>
                       <a:round/>
@@ -10058,7 +10737,9 @@
                     </a:lnT>
                     <a:lnB w="12700" cap="flat" cmpd="sng" algn="ctr">
                       <a:solidFill>
-                        <a:schemeClr val="tx1"/>
+                        <a:schemeClr val="bg1">
+                          <a:lumMod val="75000"/>
+                        </a:schemeClr>
                       </a:solidFill>
                       <a:prstDash val="solid"/>
                       <a:round/>
@@ -10086,7 +10767,9 @@
                   <a:tcPr anchor="ctr">
                     <a:lnL w="12700" cap="flat" cmpd="sng" algn="ctr">
                       <a:solidFill>
-                        <a:schemeClr val="tx1"/>
+                        <a:schemeClr val="bg1">
+                          <a:lumMod val="75000"/>
+                        </a:schemeClr>
                       </a:solidFill>
                       <a:prstDash val="solid"/>
                       <a:round/>
@@ -10095,7 +10778,9 @@
                     </a:lnL>
                     <a:lnR w="12700" cap="flat" cmpd="sng" algn="ctr">
                       <a:solidFill>
-                        <a:schemeClr val="tx1"/>
+                        <a:schemeClr val="bg1">
+                          <a:lumMod val="75000"/>
+                        </a:schemeClr>
                       </a:solidFill>
                       <a:prstDash val="solid"/>
                       <a:round/>
@@ -10104,7 +10789,9 @@
                     </a:lnR>
                     <a:lnT w="12700" cap="flat" cmpd="sng" algn="ctr">
                       <a:solidFill>
-                        <a:schemeClr val="tx1"/>
+                        <a:schemeClr val="bg1">
+                          <a:lumMod val="75000"/>
+                        </a:schemeClr>
                       </a:solidFill>
                       <a:prstDash val="solid"/>
                       <a:round/>
@@ -10113,7 +10800,9 @@
                     </a:lnT>
                     <a:lnB w="12700" cap="flat" cmpd="sng" algn="ctr">
                       <a:solidFill>
-                        <a:schemeClr val="tx1"/>
+                        <a:schemeClr val="bg1">
+                          <a:lumMod val="75000"/>
+                        </a:schemeClr>
                       </a:solidFill>
                       <a:prstDash val="solid"/>
                       <a:round/>
@@ -10142,7 +10831,9 @@
                   <a:tcPr anchor="ctr">
                     <a:lnL w="12700" cap="flat" cmpd="sng" algn="ctr">
                       <a:solidFill>
-                        <a:schemeClr val="tx1"/>
+                        <a:schemeClr val="bg1">
+                          <a:lumMod val="75000"/>
+                        </a:schemeClr>
                       </a:solidFill>
                       <a:prstDash val="solid"/>
                       <a:round/>
@@ -10151,7 +10842,9 @@
                     </a:lnL>
                     <a:lnR w="12700" cap="flat" cmpd="sng" algn="ctr">
                       <a:solidFill>
-                        <a:schemeClr val="tx1"/>
+                        <a:schemeClr val="bg1">
+                          <a:lumMod val="75000"/>
+                        </a:schemeClr>
                       </a:solidFill>
                       <a:prstDash val="solid"/>
                       <a:round/>
@@ -10160,7 +10853,9 @@
                     </a:lnR>
                     <a:lnT w="12700" cap="flat" cmpd="sng" algn="ctr">
                       <a:solidFill>
-                        <a:schemeClr val="tx1"/>
+                        <a:schemeClr val="bg1">
+                          <a:lumMod val="75000"/>
+                        </a:schemeClr>
                       </a:solidFill>
                       <a:prstDash val="solid"/>
                       <a:round/>
@@ -10169,7 +10864,9 @@
                     </a:lnT>
                     <a:lnB w="12700" cap="flat" cmpd="sng" algn="ctr">
                       <a:solidFill>
-                        <a:schemeClr val="tx1"/>
+                        <a:schemeClr val="bg1">
+                          <a:lumMod val="75000"/>
+                        </a:schemeClr>
                       </a:solidFill>
                       <a:prstDash val="solid"/>
                       <a:round/>
@@ -10198,7 +10895,9 @@
                   <a:tcPr anchor="ctr">
                     <a:lnL w="12700" cap="flat" cmpd="sng" algn="ctr">
                       <a:solidFill>
-                        <a:schemeClr val="tx1"/>
+                        <a:schemeClr val="bg1">
+                          <a:lumMod val="75000"/>
+                        </a:schemeClr>
                       </a:solidFill>
                       <a:prstDash val="solid"/>
                       <a:round/>
@@ -10207,7 +10906,9 @@
                     </a:lnL>
                     <a:lnR w="12700" cap="flat" cmpd="sng" algn="ctr">
                       <a:solidFill>
-                        <a:schemeClr val="tx1"/>
+                        <a:schemeClr val="bg1">
+                          <a:lumMod val="75000"/>
+                        </a:schemeClr>
                       </a:solidFill>
                       <a:prstDash val="solid"/>
                       <a:round/>
@@ -10216,7 +10917,9 @@
                     </a:lnR>
                     <a:lnT w="12700" cap="flat" cmpd="sng" algn="ctr">
                       <a:solidFill>
-                        <a:schemeClr val="tx1"/>
+                        <a:schemeClr val="bg1">
+                          <a:lumMod val="75000"/>
+                        </a:schemeClr>
                       </a:solidFill>
                       <a:prstDash val="solid"/>
                       <a:round/>
@@ -10225,7 +10928,9 @@
                     </a:lnT>
                     <a:lnB w="12700" cap="flat" cmpd="sng" algn="ctr">
                       <a:solidFill>
-                        <a:schemeClr val="tx1"/>
+                        <a:schemeClr val="bg1">
+                          <a:lumMod val="75000"/>
+                        </a:schemeClr>
                       </a:solidFill>
                       <a:prstDash val="solid"/>
                       <a:round/>
@@ -10246,7 +10951,9 @@
                   <a:tcPr anchor="ctr">
                     <a:lnL w="12700" cap="flat" cmpd="sng" algn="ctr">
                       <a:solidFill>
-                        <a:schemeClr val="tx1"/>
+                        <a:schemeClr val="bg1">
+                          <a:lumMod val="75000"/>
+                        </a:schemeClr>
                       </a:solidFill>
                       <a:prstDash val="solid"/>
                       <a:round/>
@@ -10255,7 +10962,9 @@
                     </a:lnL>
                     <a:lnR w="12700" cap="flat" cmpd="sng" algn="ctr">
                       <a:solidFill>
-                        <a:schemeClr val="tx1"/>
+                        <a:schemeClr val="bg1">
+                          <a:lumMod val="75000"/>
+                        </a:schemeClr>
                       </a:solidFill>
                       <a:prstDash val="solid"/>
                       <a:round/>
@@ -10264,7 +10973,9 @@
                     </a:lnR>
                     <a:lnT w="12700" cap="flat" cmpd="sng" algn="ctr">
                       <a:solidFill>
-                        <a:schemeClr val="tx1"/>
+                        <a:schemeClr val="bg1">
+                          <a:lumMod val="75000"/>
+                        </a:schemeClr>
                       </a:solidFill>
                       <a:prstDash val="solid"/>
                       <a:round/>
@@ -10273,7 +10984,9 @@
                     </a:lnT>
                     <a:lnB w="12700" cap="flat" cmpd="sng" algn="ctr">
                       <a:solidFill>
-                        <a:schemeClr val="tx1"/>
+                        <a:schemeClr val="bg1">
+                          <a:lumMod val="75000"/>
+                        </a:schemeClr>
                       </a:solidFill>
                       <a:prstDash val="solid"/>
                       <a:round/>
@@ -10301,7 +11014,9 @@
                   <a:tcPr anchor="ctr">
                     <a:lnL w="12700" cap="flat" cmpd="sng" algn="ctr">
                       <a:solidFill>
-                        <a:schemeClr val="tx1"/>
+                        <a:schemeClr val="bg1">
+                          <a:lumMod val="75000"/>
+                        </a:schemeClr>
                       </a:solidFill>
                       <a:prstDash val="solid"/>
                       <a:round/>
@@ -10310,7 +11025,9 @@
                     </a:lnL>
                     <a:lnR w="12700" cap="flat" cmpd="sng" algn="ctr">
                       <a:solidFill>
-                        <a:schemeClr val="tx1"/>
+                        <a:schemeClr val="bg1">
+                          <a:lumMod val="75000"/>
+                        </a:schemeClr>
                       </a:solidFill>
                       <a:prstDash val="solid"/>
                       <a:round/>
@@ -10319,7 +11036,9 @@
                     </a:lnR>
                     <a:lnT w="12700" cap="flat" cmpd="sng" algn="ctr">
                       <a:solidFill>
-                        <a:schemeClr val="tx1"/>
+                        <a:schemeClr val="bg1">
+                          <a:lumMod val="75000"/>
+                        </a:schemeClr>
                       </a:solidFill>
                       <a:prstDash val="solid"/>
                       <a:round/>
@@ -10328,7 +11047,9 @@
                     </a:lnT>
                     <a:lnB w="12700" cap="flat" cmpd="sng" algn="ctr">
                       <a:solidFill>
-                        <a:schemeClr val="tx1"/>
+                        <a:schemeClr val="bg1">
+                          <a:lumMod val="75000"/>
+                        </a:schemeClr>
                       </a:solidFill>
                       <a:prstDash val="solid"/>
                       <a:round/>
@@ -10356,7 +11077,9 @@
                   <a:tcPr anchor="ctr">
                     <a:lnL w="12700" cap="flat" cmpd="sng" algn="ctr">
                       <a:solidFill>
-                        <a:schemeClr val="tx1"/>
+                        <a:schemeClr val="bg1">
+                          <a:lumMod val="75000"/>
+                        </a:schemeClr>
                       </a:solidFill>
                       <a:prstDash val="solid"/>
                       <a:round/>
@@ -10365,7 +11088,9 @@
                     </a:lnL>
                     <a:lnR w="12700" cap="flat" cmpd="sng" algn="ctr">
                       <a:solidFill>
-                        <a:schemeClr val="tx1"/>
+                        <a:schemeClr val="bg1">
+                          <a:lumMod val="75000"/>
+                        </a:schemeClr>
                       </a:solidFill>
                       <a:prstDash val="solid"/>
                       <a:round/>
@@ -10374,7 +11099,9 @@
                     </a:lnR>
                     <a:lnT w="12700" cap="flat" cmpd="sng" algn="ctr">
                       <a:solidFill>
-                        <a:schemeClr val="tx1"/>
+                        <a:schemeClr val="bg1">
+                          <a:lumMod val="75000"/>
+                        </a:schemeClr>
                       </a:solidFill>
                       <a:prstDash val="solid"/>
                       <a:round/>
@@ -10383,7 +11110,9 @@
                     </a:lnT>
                     <a:lnB w="12700" cap="flat" cmpd="sng" algn="ctr">
                       <a:solidFill>
-                        <a:schemeClr val="tx1"/>
+                        <a:schemeClr val="bg1">
+                          <a:lumMod val="75000"/>
+                        </a:schemeClr>
                       </a:solidFill>
                       <a:prstDash val="solid"/>
                       <a:round/>
@@ -10412,7 +11141,9 @@
                   <a:tcPr anchor="ctr">
                     <a:lnL w="12700" cap="flat" cmpd="sng" algn="ctr">
                       <a:solidFill>
-                        <a:schemeClr val="tx1"/>
+                        <a:schemeClr val="bg1">
+                          <a:lumMod val="75000"/>
+                        </a:schemeClr>
                       </a:solidFill>
                       <a:prstDash val="solid"/>
                       <a:round/>
@@ -10421,7 +11152,9 @@
                     </a:lnL>
                     <a:lnR w="12700" cap="flat" cmpd="sng" algn="ctr">
                       <a:solidFill>
-                        <a:schemeClr val="tx1"/>
+                        <a:schemeClr val="bg1">
+                          <a:lumMod val="75000"/>
+                        </a:schemeClr>
                       </a:solidFill>
                       <a:prstDash val="solid"/>
                       <a:round/>
@@ -10430,7 +11163,9 @@
                     </a:lnR>
                     <a:lnT w="12700" cap="flat" cmpd="sng" algn="ctr">
                       <a:solidFill>
-                        <a:schemeClr val="tx1"/>
+                        <a:schemeClr val="bg1">
+                          <a:lumMod val="75000"/>
+                        </a:schemeClr>
                       </a:solidFill>
                       <a:prstDash val="solid"/>
                       <a:round/>
@@ -10439,7 +11174,9 @@
                     </a:lnT>
                     <a:lnB w="12700" cap="flat" cmpd="sng" algn="ctr">
                       <a:solidFill>
-                        <a:schemeClr val="tx1"/>
+                        <a:schemeClr val="bg1">
+                          <a:lumMod val="75000"/>
+                        </a:schemeClr>
                       </a:solidFill>
                       <a:prstDash val="solid"/>
                       <a:round/>
@@ -10468,7 +11205,9 @@
                   <a:tcPr anchor="ctr">
                     <a:lnL w="12700" cap="flat" cmpd="sng" algn="ctr">
                       <a:solidFill>
-                        <a:schemeClr val="tx1"/>
+                        <a:schemeClr val="bg1">
+                          <a:lumMod val="75000"/>
+                        </a:schemeClr>
                       </a:solidFill>
                       <a:prstDash val="solid"/>
                       <a:round/>
@@ -10477,7 +11216,9 @@
                     </a:lnL>
                     <a:lnR w="12700" cap="flat" cmpd="sng" algn="ctr">
                       <a:solidFill>
-                        <a:schemeClr val="tx1"/>
+                        <a:schemeClr val="bg1">
+                          <a:lumMod val="75000"/>
+                        </a:schemeClr>
                       </a:solidFill>
                       <a:prstDash val="solid"/>
                       <a:round/>
@@ -10486,7 +11227,9 @@
                     </a:lnR>
                     <a:lnT w="12700" cap="flat" cmpd="sng" algn="ctr">
                       <a:solidFill>
-                        <a:schemeClr val="tx1"/>
+                        <a:schemeClr val="bg1">
+                          <a:lumMod val="75000"/>
+                        </a:schemeClr>
                       </a:solidFill>
                       <a:prstDash val="solid"/>
                       <a:round/>
@@ -10495,7 +11238,9 @@
                     </a:lnT>
                     <a:lnB w="12700" cap="flat" cmpd="sng" algn="ctr">
                       <a:solidFill>
-                        <a:schemeClr val="tx1"/>
+                        <a:schemeClr val="bg1">
+                          <a:lumMod val="75000"/>
+                        </a:schemeClr>
                       </a:solidFill>
                       <a:prstDash val="solid"/>
                       <a:round/>
@@ -10515,7 +11260,9 @@
                       <a:r>
                         <a:rPr sz="1600" b="1">
                           <a:solidFill>
-                            <a:schemeClr val="tx1"/>
+                            <a:schemeClr val="accent1">
+                              <a:lumMod val="50000"/>
+                            </a:schemeClr>
                           </a:solidFill>
                         </a:rPr>
                         <a:t>Economic</a:t>
@@ -10523,7 +11270,7 @@
                     </a:p>
                     <a:p>
                       <a:r>
-                        <a:rPr sz="1400" b="0">
+                        <a:rPr sz="1400">
                           <a:solidFill>
                             <a:schemeClr val="tx1"/>
                           </a:solidFill>
@@ -10535,7 +11282,9 @@
                   <a:tcPr anchor="ctr">
                     <a:lnL w="12700" cap="flat" cmpd="sng" algn="ctr">
                       <a:solidFill>
-                        <a:schemeClr val="tx1"/>
+                        <a:schemeClr val="bg1">
+                          <a:lumMod val="75000"/>
+                        </a:schemeClr>
                       </a:solidFill>
                       <a:prstDash val="solid"/>
                       <a:round/>
@@ -10544,7 +11293,9 @@
                     </a:lnL>
                     <a:lnR w="12700" cap="flat" cmpd="sng" algn="ctr">
                       <a:solidFill>
-                        <a:schemeClr val="tx1"/>
+                        <a:schemeClr val="bg1">
+                          <a:lumMod val="75000"/>
+                        </a:schemeClr>
                       </a:solidFill>
                       <a:prstDash val="solid"/>
                       <a:round/>
@@ -10553,7 +11304,9 @@
                     </a:lnR>
                     <a:lnT w="12700" cap="flat" cmpd="sng" algn="ctr">
                       <a:solidFill>
-                        <a:schemeClr val="tx1"/>
+                        <a:schemeClr val="bg1">
+                          <a:lumMod val="75000"/>
+                        </a:schemeClr>
                       </a:solidFill>
                       <a:prstDash val="solid"/>
                       <a:round/>
@@ -10562,7 +11315,9 @@
                     </a:lnT>
                     <a:lnB w="12700" cap="flat" cmpd="sng" algn="ctr">
                       <a:solidFill>
-                        <a:schemeClr val="tx1"/>
+                        <a:schemeClr val="bg1">
+                          <a:lumMod val="75000"/>
+                        </a:schemeClr>
                       </a:solidFill>
                       <a:prstDash val="solid"/>
                       <a:round/>
@@ -10590,7 +11345,9 @@
                   <a:tcPr anchor="ctr">
                     <a:lnL w="12700" cap="flat" cmpd="sng" algn="ctr">
                       <a:solidFill>
-                        <a:schemeClr val="tx1"/>
+                        <a:schemeClr val="bg1">
+                          <a:lumMod val="75000"/>
+                        </a:schemeClr>
                       </a:solidFill>
                       <a:prstDash val="solid"/>
                       <a:round/>
@@ -10599,7 +11356,9 @@
                     </a:lnL>
                     <a:lnR w="12700" cap="flat" cmpd="sng" algn="ctr">
                       <a:solidFill>
-                        <a:schemeClr val="tx1"/>
+                        <a:schemeClr val="bg1">
+                          <a:lumMod val="75000"/>
+                        </a:schemeClr>
                       </a:solidFill>
                       <a:prstDash val="solid"/>
                       <a:round/>
@@ -10608,7 +11367,9 @@
                     </a:lnR>
                     <a:lnT w="12700" cap="flat" cmpd="sng" algn="ctr">
                       <a:solidFill>
-                        <a:schemeClr val="tx1"/>
+                        <a:schemeClr val="bg1">
+                          <a:lumMod val="75000"/>
+                        </a:schemeClr>
                       </a:solidFill>
                       <a:prstDash val="solid"/>
                       <a:round/>
@@ -10617,7 +11378,9 @@
                     </a:lnT>
                     <a:lnB w="12700" cap="flat" cmpd="sng" algn="ctr">
                       <a:solidFill>
-                        <a:schemeClr val="tx1"/>
+                        <a:schemeClr val="bg1">
+                          <a:lumMod val="75000"/>
+                        </a:schemeClr>
                       </a:solidFill>
                       <a:prstDash val="solid"/>
                       <a:round/>
@@ -10645,7 +11408,9 @@
                   <a:tcPr anchor="ctr">
                     <a:lnL w="12700" cap="flat" cmpd="sng" algn="ctr">
                       <a:solidFill>
-                        <a:schemeClr val="tx1"/>
+                        <a:schemeClr val="bg1">
+                          <a:lumMod val="75000"/>
+                        </a:schemeClr>
                       </a:solidFill>
                       <a:prstDash val="solid"/>
                       <a:round/>
@@ -10654,7 +11419,9 @@
                     </a:lnL>
                     <a:lnR w="12700" cap="flat" cmpd="sng" algn="ctr">
                       <a:solidFill>
-                        <a:schemeClr val="tx1"/>
+                        <a:schemeClr val="bg1">
+                          <a:lumMod val="75000"/>
+                        </a:schemeClr>
                       </a:solidFill>
                       <a:prstDash val="solid"/>
                       <a:round/>
@@ -10663,7 +11430,9 @@
                     </a:lnR>
                     <a:lnT w="12700" cap="flat" cmpd="sng" algn="ctr">
                       <a:solidFill>
-                        <a:schemeClr val="tx1"/>
+                        <a:schemeClr val="bg1">
+                          <a:lumMod val="75000"/>
+                        </a:schemeClr>
                       </a:solidFill>
                       <a:prstDash val="solid"/>
                       <a:round/>
@@ -10672,7 +11441,9 @@
                     </a:lnT>
                     <a:lnB w="12700" cap="flat" cmpd="sng" algn="ctr">
                       <a:solidFill>
-                        <a:schemeClr val="tx1"/>
+                        <a:schemeClr val="bg1">
+                          <a:lumMod val="75000"/>
+                        </a:schemeClr>
                       </a:solidFill>
                       <a:prstDash val="solid"/>
                       <a:round/>
@@ -10701,7 +11472,9 @@
                   <a:tcPr anchor="ctr">
                     <a:lnL w="12700" cap="flat" cmpd="sng" algn="ctr">
                       <a:solidFill>
-                        <a:schemeClr val="tx1"/>
+                        <a:schemeClr val="bg1">
+                          <a:lumMod val="75000"/>
+                        </a:schemeClr>
                       </a:solidFill>
                       <a:prstDash val="solid"/>
                       <a:round/>
@@ -10710,7 +11483,9 @@
                     </a:lnL>
                     <a:lnR w="12700" cap="flat" cmpd="sng" algn="ctr">
                       <a:solidFill>
-                        <a:schemeClr val="tx1"/>
+                        <a:schemeClr val="bg1">
+                          <a:lumMod val="75000"/>
+                        </a:schemeClr>
                       </a:solidFill>
                       <a:prstDash val="solid"/>
                       <a:round/>
@@ -10719,7 +11494,9 @@
                     </a:lnR>
                     <a:lnT w="12700" cap="flat" cmpd="sng" algn="ctr">
                       <a:solidFill>
-                        <a:schemeClr val="tx1"/>
+                        <a:schemeClr val="bg1">
+                          <a:lumMod val="75000"/>
+                        </a:schemeClr>
                       </a:solidFill>
                       <a:prstDash val="solid"/>
                       <a:round/>
@@ -10728,7 +11505,9 @@
                     </a:lnT>
                     <a:lnB w="12700" cap="flat" cmpd="sng" algn="ctr">
                       <a:solidFill>
-                        <a:schemeClr val="tx1"/>
+                        <a:schemeClr val="bg1">
+                          <a:lumMod val="75000"/>
+                        </a:schemeClr>
                       </a:solidFill>
                       <a:prstDash val="solid"/>
                       <a:round/>
@@ -10745,9 +11524,11 @@
                     <a:p>
                       <a:pPr algn="ctr"/>
                       <a:r>
-                        <a:rPr sz="1600" b="0">
+                        <a:rPr sz="1600" b="1">
                           <a:solidFill>
-                            <a:schemeClr val="tx1"/>
+                            <a:schemeClr val="accent2">
+                              <a:lumMod val="75000"/>
+                            </a:schemeClr>
                           </a:solidFill>
                         </a:rPr>
                         <a:t>High</a:t>
@@ -10757,7 +11538,9 @@
                   <a:tcPr anchor="ctr">
                     <a:lnL w="12700" cap="flat" cmpd="sng" algn="ctr">
                       <a:solidFill>
-                        <a:schemeClr val="tx1"/>
+                        <a:schemeClr val="bg1">
+                          <a:lumMod val="75000"/>
+                        </a:schemeClr>
                       </a:solidFill>
                       <a:prstDash val="solid"/>
                       <a:round/>
@@ -10766,7 +11549,9 @@
                     </a:lnL>
                     <a:lnR w="12700" cap="flat" cmpd="sng" algn="ctr">
                       <a:solidFill>
-                        <a:schemeClr val="tx1"/>
+                        <a:schemeClr val="bg1">
+                          <a:lumMod val="75000"/>
+                        </a:schemeClr>
                       </a:solidFill>
                       <a:prstDash val="solid"/>
                       <a:round/>
@@ -10775,7 +11560,9 @@
                     </a:lnR>
                     <a:lnT w="12700" cap="flat" cmpd="sng" algn="ctr">
                       <a:solidFill>
-                        <a:schemeClr val="tx1"/>
+                        <a:schemeClr val="bg1">
+                          <a:lumMod val="75000"/>
+                        </a:schemeClr>
                       </a:solidFill>
                       <a:prstDash val="solid"/>
                       <a:round/>
@@ -10784,7 +11571,9 @@
                     </a:lnT>
                     <a:lnB w="12700" cap="flat" cmpd="sng" algn="ctr">
                       <a:solidFill>
-                        <a:schemeClr val="tx1"/>
+                        <a:schemeClr val="bg1">
+                          <a:lumMod val="75000"/>
+                        </a:schemeClr>
                       </a:solidFill>
                       <a:prstDash val="solid"/>
                       <a:round/>
@@ -10805,7 +11594,9 @@
                   <a:tcPr anchor="ctr">
                     <a:lnL w="12700" cap="flat" cmpd="sng" algn="ctr">
                       <a:solidFill>
-                        <a:schemeClr val="tx1"/>
+                        <a:schemeClr val="bg1">
+                          <a:lumMod val="75000"/>
+                        </a:schemeClr>
                       </a:solidFill>
                       <a:prstDash val="solid"/>
                       <a:round/>
@@ -10814,7 +11605,9 @@
                     </a:lnL>
                     <a:lnR w="12700" cap="flat" cmpd="sng" algn="ctr">
                       <a:solidFill>
-                        <a:schemeClr val="tx1"/>
+                        <a:schemeClr val="bg1">
+                          <a:lumMod val="75000"/>
+                        </a:schemeClr>
                       </a:solidFill>
                       <a:prstDash val="solid"/>
                       <a:round/>
@@ -10823,7 +11616,9 @@
                     </a:lnR>
                     <a:lnT w="12700" cap="flat" cmpd="sng" algn="ctr">
                       <a:solidFill>
-                        <a:schemeClr val="tx1"/>
+                        <a:schemeClr val="bg1">
+                          <a:lumMod val="75000"/>
+                        </a:schemeClr>
                       </a:solidFill>
                       <a:prstDash val="solid"/>
                       <a:round/>
@@ -10832,7 +11627,9 @@
                     </a:lnT>
                     <a:lnB w="12700" cap="flat" cmpd="sng" algn="ctr">
                       <a:solidFill>
-                        <a:schemeClr val="tx1"/>
+                        <a:schemeClr val="bg1">
+                          <a:lumMod val="75000"/>
+                        </a:schemeClr>
                       </a:solidFill>
                       <a:prstDash val="solid"/>
                       <a:round/>
@@ -10860,7 +11657,9 @@
                   <a:tcPr anchor="ctr">
                     <a:lnL w="12700" cap="flat" cmpd="sng" algn="ctr">
                       <a:solidFill>
-                        <a:schemeClr val="tx1"/>
+                        <a:schemeClr val="bg1">
+                          <a:lumMod val="75000"/>
+                        </a:schemeClr>
                       </a:solidFill>
                       <a:prstDash val="solid"/>
                       <a:round/>
@@ -10869,7 +11668,9 @@
                     </a:lnL>
                     <a:lnR w="12700" cap="flat" cmpd="sng" algn="ctr">
                       <a:solidFill>
-                        <a:schemeClr val="tx1"/>
+                        <a:schemeClr val="bg1">
+                          <a:lumMod val="75000"/>
+                        </a:schemeClr>
                       </a:solidFill>
                       <a:prstDash val="solid"/>
                       <a:round/>
@@ -10878,7 +11679,9 @@
                     </a:lnR>
                     <a:lnT w="12700" cap="flat" cmpd="sng" algn="ctr">
                       <a:solidFill>
-                        <a:schemeClr val="tx1"/>
+                        <a:schemeClr val="bg1">
+                          <a:lumMod val="75000"/>
+                        </a:schemeClr>
                       </a:solidFill>
                       <a:prstDash val="solid"/>
                       <a:round/>
@@ -10887,7 +11690,9 @@
                     </a:lnT>
                     <a:lnB w="12700" cap="flat" cmpd="sng" algn="ctr">
                       <a:solidFill>
-                        <a:schemeClr val="tx1"/>
+                        <a:schemeClr val="bg1">
+                          <a:lumMod val="75000"/>
+                        </a:schemeClr>
                       </a:solidFill>
                       <a:prstDash val="solid"/>
                       <a:round/>
@@ -10915,7 +11720,9 @@
                   <a:tcPr anchor="ctr">
                     <a:lnL w="12700" cap="flat" cmpd="sng" algn="ctr">
                       <a:solidFill>
-                        <a:schemeClr val="tx1"/>
+                        <a:schemeClr val="bg1">
+                          <a:lumMod val="75000"/>
+                        </a:schemeClr>
                       </a:solidFill>
                       <a:prstDash val="solid"/>
                       <a:round/>
@@ -10924,7 +11731,9 @@
                     </a:lnL>
                     <a:lnR w="12700" cap="flat" cmpd="sng" algn="ctr">
                       <a:solidFill>
-                        <a:schemeClr val="tx1"/>
+                        <a:schemeClr val="bg1">
+                          <a:lumMod val="75000"/>
+                        </a:schemeClr>
                       </a:solidFill>
                       <a:prstDash val="solid"/>
                       <a:round/>
@@ -10933,7 +11742,9 @@
                     </a:lnR>
                     <a:lnT w="12700" cap="flat" cmpd="sng" algn="ctr">
                       <a:solidFill>
-                        <a:schemeClr val="tx1"/>
+                        <a:schemeClr val="bg1">
+                          <a:lumMod val="75000"/>
+                        </a:schemeClr>
                       </a:solidFill>
                       <a:prstDash val="solid"/>
                       <a:round/>
@@ -10942,7 +11753,9 @@
                     </a:lnT>
                     <a:lnB w="12700" cap="flat" cmpd="sng" algn="ctr">
                       <a:solidFill>
-                        <a:schemeClr val="tx1"/>
+                        <a:schemeClr val="bg1">
+                          <a:lumMod val="75000"/>
+                        </a:schemeClr>
                       </a:solidFill>
                       <a:prstDash val="solid"/>
                       <a:round/>
@@ -10971,7 +11784,9 @@
                   <a:tcPr anchor="ctr">
                     <a:lnL w="12700" cap="flat" cmpd="sng" algn="ctr">
                       <a:solidFill>
-                        <a:schemeClr val="tx1"/>
+                        <a:schemeClr val="bg1">
+                          <a:lumMod val="75000"/>
+                        </a:schemeClr>
                       </a:solidFill>
                       <a:prstDash val="solid"/>
                       <a:round/>
@@ -10980,7 +11795,9 @@
                     </a:lnL>
                     <a:lnR w="12700" cap="flat" cmpd="sng" algn="ctr">
                       <a:solidFill>
-                        <a:schemeClr val="tx1"/>
+                        <a:schemeClr val="bg1">
+                          <a:lumMod val="75000"/>
+                        </a:schemeClr>
                       </a:solidFill>
                       <a:prstDash val="solid"/>
                       <a:round/>
@@ -10989,7 +11806,9 @@
                     </a:lnR>
                     <a:lnT w="12700" cap="flat" cmpd="sng" algn="ctr">
                       <a:solidFill>
-                        <a:schemeClr val="tx1"/>
+                        <a:schemeClr val="bg1">
+                          <a:lumMod val="75000"/>
+                        </a:schemeClr>
                       </a:solidFill>
                       <a:prstDash val="solid"/>
                       <a:round/>
@@ -10998,7 +11817,9 @@
                     </a:lnT>
                     <a:lnB w="12700" cap="flat" cmpd="sng" algn="ctr">
                       <a:solidFill>
-                        <a:schemeClr val="tx1"/>
+                        <a:schemeClr val="bg1">
+                          <a:lumMod val="75000"/>
+                        </a:schemeClr>
                       </a:solidFill>
                       <a:prstDash val="solid"/>
                       <a:round/>
@@ -11015,9 +11836,11 @@
                     <a:p>
                       <a:pPr algn="ctr"/>
                       <a:r>
-                        <a:rPr sz="1600" b="0">
+                        <a:rPr sz="1600" b="1">
                           <a:solidFill>
-                            <a:schemeClr val="tx1"/>
+                            <a:schemeClr val="accent2">
+                              <a:lumMod val="75000"/>
+                            </a:schemeClr>
                           </a:solidFill>
                         </a:rPr>
                         <a:t>High</a:t>
@@ -11027,7 +11850,9 @@
                   <a:tcPr anchor="ctr">
                     <a:lnL w="12700" cap="flat" cmpd="sng" algn="ctr">
                       <a:solidFill>
-                        <a:schemeClr val="tx1"/>
+                        <a:schemeClr val="bg1">
+                          <a:lumMod val="75000"/>
+                        </a:schemeClr>
                       </a:solidFill>
                       <a:prstDash val="solid"/>
                       <a:round/>
@@ -11036,7 +11861,9 @@
                     </a:lnL>
                     <a:lnR w="12700" cap="flat" cmpd="sng" algn="ctr">
                       <a:solidFill>
-                        <a:schemeClr val="tx1"/>
+                        <a:schemeClr val="bg1">
+                          <a:lumMod val="75000"/>
+                        </a:schemeClr>
                       </a:solidFill>
                       <a:prstDash val="solid"/>
                       <a:round/>
@@ -11045,7 +11872,9 @@
                     </a:lnR>
                     <a:lnT w="12700" cap="flat" cmpd="sng" algn="ctr">
                       <a:solidFill>
-                        <a:schemeClr val="tx1"/>
+                        <a:schemeClr val="bg1">
+                          <a:lumMod val="75000"/>
+                        </a:schemeClr>
                       </a:solidFill>
                       <a:prstDash val="solid"/>
                       <a:round/>
@@ -11054,7 +11883,9 @@
                     </a:lnT>
                     <a:lnB w="12700" cap="flat" cmpd="sng" algn="ctr">
                       <a:solidFill>
-                        <a:schemeClr val="tx1"/>
+                        <a:schemeClr val="bg1">
+                          <a:lumMod val="75000"/>
+                        </a:schemeClr>
                       </a:solidFill>
                       <a:prstDash val="solid"/>
                       <a:round/>
@@ -11075,7 +11906,9 @@
                   <a:tcPr anchor="ctr">
                     <a:lnL w="12700" cap="flat" cmpd="sng" algn="ctr">
                       <a:solidFill>
-                        <a:schemeClr val="tx1"/>
+                        <a:schemeClr val="bg1">
+                          <a:lumMod val="75000"/>
+                        </a:schemeClr>
                       </a:solidFill>
                       <a:prstDash val="solid"/>
                       <a:round/>
@@ -11084,7 +11917,9 @@
                     </a:lnL>
                     <a:lnR w="12700" cap="flat" cmpd="sng" algn="ctr">
                       <a:solidFill>
-                        <a:schemeClr val="tx1"/>
+                        <a:schemeClr val="bg1">
+                          <a:lumMod val="75000"/>
+                        </a:schemeClr>
                       </a:solidFill>
                       <a:prstDash val="solid"/>
                       <a:round/>
@@ -11093,7 +11928,9 @@
                     </a:lnR>
                     <a:lnT w="12700" cap="flat" cmpd="sng" algn="ctr">
                       <a:solidFill>
-                        <a:schemeClr val="tx1"/>
+                        <a:schemeClr val="bg1">
+                          <a:lumMod val="75000"/>
+                        </a:schemeClr>
                       </a:solidFill>
                       <a:prstDash val="solid"/>
                       <a:round/>
@@ -11102,7 +11939,9 @@
                     </a:lnT>
                     <a:lnB w="12700" cap="flat" cmpd="sng" algn="ctr">
                       <a:solidFill>
-                        <a:schemeClr val="tx1"/>
+                        <a:schemeClr val="bg1">
+                          <a:lumMod val="75000"/>
+                        </a:schemeClr>
                       </a:solidFill>
                       <a:prstDash val="solid"/>
                       <a:round/>
@@ -11130,7 +11969,9 @@
                   <a:tcPr anchor="ctr">
                     <a:lnL w="12700" cap="flat" cmpd="sng" algn="ctr">
                       <a:solidFill>
-                        <a:schemeClr val="tx1"/>
+                        <a:schemeClr val="bg1">
+                          <a:lumMod val="75000"/>
+                        </a:schemeClr>
                       </a:solidFill>
                       <a:prstDash val="solid"/>
                       <a:round/>
@@ -11139,7 +11980,9 @@
                     </a:lnL>
                     <a:lnR w="12700" cap="flat" cmpd="sng" algn="ctr">
                       <a:solidFill>
-                        <a:schemeClr val="tx1"/>
+                        <a:schemeClr val="bg1">
+                          <a:lumMod val="75000"/>
+                        </a:schemeClr>
                       </a:solidFill>
                       <a:prstDash val="solid"/>
                       <a:round/>
@@ -11148,7 +11991,9 @@
                     </a:lnR>
                     <a:lnT w="12700" cap="flat" cmpd="sng" algn="ctr">
                       <a:solidFill>
-                        <a:schemeClr val="tx1"/>
+                        <a:schemeClr val="bg1">
+                          <a:lumMod val="75000"/>
+                        </a:schemeClr>
                       </a:solidFill>
                       <a:prstDash val="solid"/>
                       <a:round/>
@@ -11157,7 +12002,9 @@
                     </a:lnT>
                     <a:lnB w="12700" cap="flat" cmpd="sng" algn="ctr">
                       <a:solidFill>
-                        <a:schemeClr val="tx1"/>
+                        <a:schemeClr val="bg1">
+                          <a:lumMod val="75000"/>
+                        </a:schemeClr>
                       </a:solidFill>
                       <a:prstDash val="solid"/>
                       <a:round/>
@@ -11185,7 +12032,9 @@
                   <a:tcPr anchor="ctr">
                     <a:lnL w="12700" cap="flat" cmpd="sng" algn="ctr">
                       <a:solidFill>
-                        <a:schemeClr val="tx1"/>
+                        <a:schemeClr val="bg1">
+                          <a:lumMod val="75000"/>
+                        </a:schemeClr>
                       </a:solidFill>
                       <a:prstDash val="solid"/>
                       <a:round/>
@@ -11194,7 +12043,9 @@
                     </a:lnL>
                     <a:lnR w="12700" cap="flat" cmpd="sng" algn="ctr">
                       <a:solidFill>
-                        <a:schemeClr val="tx1"/>
+                        <a:schemeClr val="bg1">
+                          <a:lumMod val="75000"/>
+                        </a:schemeClr>
                       </a:solidFill>
                       <a:prstDash val="solid"/>
                       <a:round/>
@@ -11203,7 +12054,9 @@
                     </a:lnR>
                     <a:lnT w="12700" cap="flat" cmpd="sng" algn="ctr">
                       <a:solidFill>
-                        <a:schemeClr val="tx1"/>
+                        <a:schemeClr val="bg1">
+                          <a:lumMod val="75000"/>
+                        </a:schemeClr>
                       </a:solidFill>
                       <a:prstDash val="solid"/>
                       <a:round/>
@@ -11212,7 +12065,9 @@
                     </a:lnT>
                     <a:lnB w="12700" cap="flat" cmpd="sng" algn="ctr">
                       <a:solidFill>
-                        <a:schemeClr val="tx1"/>
+                        <a:schemeClr val="bg1">
+                          <a:lumMod val="75000"/>
+                        </a:schemeClr>
                       </a:solidFill>
                       <a:prstDash val="solid"/>
                       <a:round/>
@@ -11241,7 +12096,9 @@
                   <a:tcPr anchor="ctr">
                     <a:lnL w="12700" cap="flat" cmpd="sng" algn="ctr">
                       <a:solidFill>
-                        <a:schemeClr val="tx1"/>
+                        <a:schemeClr val="bg1">
+                          <a:lumMod val="75000"/>
+                        </a:schemeClr>
                       </a:solidFill>
                       <a:prstDash val="solid"/>
                       <a:round/>
@@ -11250,7 +12107,9 @@
                     </a:lnL>
                     <a:lnR w="12700" cap="flat" cmpd="sng" algn="ctr">
                       <a:solidFill>
-                        <a:schemeClr val="tx1"/>
+                        <a:schemeClr val="bg1">
+                          <a:lumMod val="75000"/>
+                        </a:schemeClr>
                       </a:solidFill>
                       <a:prstDash val="solid"/>
                       <a:round/>
@@ -11259,7 +12118,9 @@
                     </a:lnR>
                     <a:lnT w="12700" cap="flat" cmpd="sng" algn="ctr">
                       <a:solidFill>
-                        <a:schemeClr val="tx1"/>
+                        <a:schemeClr val="bg1">
+                          <a:lumMod val="75000"/>
+                        </a:schemeClr>
                       </a:solidFill>
                       <a:prstDash val="solid"/>
                       <a:round/>
@@ -11268,7 +12129,9 @@
                     </a:lnT>
                     <a:lnB w="12700" cap="flat" cmpd="sng" algn="ctr">
                       <a:solidFill>
-                        <a:schemeClr val="tx1"/>
+                        <a:schemeClr val="bg1">
+                          <a:lumMod val="75000"/>
+                        </a:schemeClr>
                       </a:solidFill>
                       <a:prstDash val="solid"/>
                       <a:round/>
@@ -11297,7 +12160,9 @@
                   <a:tcPr anchor="ctr">
                     <a:lnL w="12700" cap="flat" cmpd="sng" algn="ctr">
                       <a:solidFill>
-                        <a:schemeClr val="tx1"/>
+                        <a:schemeClr val="bg1">
+                          <a:lumMod val="75000"/>
+                        </a:schemeClr>
                       </a:solidFill>
                       <a:prstDash val="solid"/>
                       <a:round/>
@@ -11306,7 +12171,9 @@
                     </a:lnL>
                     <a:lnR w="12700" cap="flat" cmpd="sng" algn="ctr">
                       <a:solidFill>
-                        <a:schemeClr val="tx1"/>
+                        <a:schemeClr val="bg1">
+                          <a:lumMod val="75000"/>
+                        </a:schemeClr>
                       </a:solidFill>
                       <a:prstDash val="solid"/>
                       <a:round/>
@@ -11315,7 +12182,9 @@
                     </a:lnR>
                     <a:lnT w="12700" cap="flat" cmpd="sng" algn="ctr">
                       <a:solidFill>
-                        <a:schemeClr val="tx1"/>
+                        <a:schemeClr val="bg1">
+                          <a:lumMod val="75000"/>
+                        </a:schemeClr>
                       </a:solidFill>
                       <a:prstDash val="solid"/>
                       <a:round/>
@@ -11324,7 +12193,9 @@
                     </a:lnT>
                     <a:lnB w="12700" cap="flat" cmpd="sng" algn="ctr">
                       <a:solidFill>
-                        <a:schemeClr val="tx1"/>
+                        <a:schemeClr val="bg1">
+                          <a:lumMod val="75000"/>
+                        </a:schemeClr>
                       </a:solidFill>
                       <a:prstDash val="solid"/>
                       <a:round/>
@@ -11550,7 +12421,7 @@
                       <a:r>
                         <a:rPr sz="1600" b="1">
                           <a:solidFill>
-                            <a:schemeClr val="tx1"/>
+                            <a:schemeClr val="bg1"/>
                           </a:solidFill>
                         </a:rPr>
                         <a:t>Factor</a:t>
@@ -11560,7 +12431,9 @@
                   <a:tcPr anchor="ctr">
                     <a:lnL w="12700" cap="flat" cmpd="sng" algn="ctr">
                       <a:solidFill>
-                        <a:schemeClr val="tx1"/>
+                        <a:schemeClr val="bg1">
+                          <a:lumMod val="75000"/>
+                        </a:schemeClr>
                       </a:solidFill>
                       <a:prstDash val="solid"/>
                       <a:round/>
@@ -11569,7 +12442,9 @@
                     </a:lnL>
                     <a:lnR w="12700" cap="flat" cmpd="sng" algn="ctr">
                       <a:solidFill>
-                        <a:schemeClr val="tx1"/>
+                        <a:schemeClr val="bg1">
+                          <a:lumMod val="75000"/>
+                        </a:schemeClr>
                       </a:solidFill>
                       <a:prstDash val="solid"/>
                       <a:round/>
@@ -11578,7 +12453,9 @@
                     </a:lnR>
                     <a:lnT w="12700" cap="flat" cmpd="sng" algn="ctr">
                       <a:solidFill>
-                        <a:schemeClr val="tx1"/>
+                        <a:schemeClr val="bg1">
+                          <a:lumMod val="75000"/>
+                        </a:schemeClr>
                       </a:solidFill>
                       <a:prstDash val="solid"/>
                       <a:round/>
@@ -11587,7 +12464,9 @@
                     </a:lnT>
                     <a:lnB w="12700" cap="flat" cmpd="sng" algn="ctr">
                       <a:solidFill>
-                        <a:schemeClr val="tx1"/>
+                        <a:schemeClr val="bg1">
+                          <a:lumMod val="75000"/>
+                        </a:schemeClr>
                       </a:solidFill>
                       <a:prstDash val="solid"/>
                       <a:round/>
@@ -11595,8 +12474,8 @@
                       <a:tailEnd type="none" w="med" len="med"/>
                     </a:lnB>
                     <a:solidFill>
-                      <a:schemeClr val="bg1">
-                        <a:lumMod val="85000"/>
+                      <a:schemeClr val="accent1">
+                        <a:lumMod val="50000"/>
                       </a:schemeClr>
                     </a:solidFill>
                   </a:tcPr>
@@ -11609,7 +12488,7 @@
                       <a:r>
                         <a:rPr sz="1600" b="1">
                           <a:solidFill>
-                            <a:schemeClr val="tx1"/>
+                            <a:schemeClr val="bg1"/>
                           </a:solidFill>
                         </a:rPr>
                         <a:t>Issue</a:t>
@@ -11619,7 +12498,9 @@
                   <a:tcPr anchor="ctr">
                     <a:lnL w="12700" cap="flat" cmpd="sng" algn="ctr">
                       <a:solidFill>
-                        <a:schemeClr val="tx1"/>
+                        <a:schemeClr val="bg1">
+                          <a:lumMod val="75000"/>
+                        </a:schemeClr>
                       </a:solidFill>
                       <a:prstDash val="solid"/>
                       <a:round/>
@@ -11628,7 +12509,9 @@
                     </a:lnL>
                     <a:lnR w="12700" cap="flat" cmpd="sng" algn="ctr">
                       <a:solidFill>
-                        <a:schemeClr val="tx1"/>
+                        <a:schemeClr val="bg1">
+                          <a:lumMod val="75000"/>
+                        </a:schemeClr>
                       </a:solidFill>
                       <a:prstDash val="solid"/>
                       <a:round/>
@@ -11637,7 +12520,9 @@
                     </a:lnR>
                     <a:lnT w="12700" cap="flat" cmpd="sng" algn="ctr">
                       <a:solidFill>
-                        <a:schemeClr val="tx1"/>
+                        <a:schemeClr val="bg1">
+                          <a:lumMod val="75000"/>
+                        </a:schemeClr>
                       </a:solidFill>
                       <a:prstDash val="solid"/>
                       <a:round/>
@@ -11646,7 +12531,9 @@
                     </a:lnT>
                     <a:lnB w="12700" cap="flat" cmpd="sng" algn="ctr">
                       <a:solidFill>
-                        <a:schemeClr val="tx1"/>
+                        <a:schemeClr val="bg1">
+                          <a:lumMod val="75000"/>
+                        </a:schemeClr>
                       </a:solidFill>
                       <a:prstDash val="solid"/>
                       <a:round/>
@@ -11654,8 +12541,8 @@
                       <a:tailEnd type="none" w="med" len="med"/>
                     </a:lnB>
                     <a:solidFill>
-                      <a:schemeClr val="bg1">
-                        <a:lumMod val="85000"/>
+                      <a:schemeClr val="accent1">
+                        <a:lumMod val="50000"/>
                       </a:schemeClr>
                     </a:solidFill>
                   </a:tcPr>
@@ -11668,7 +12555,7 @@
                       <a:r>
                         <a:rPr sz="1600" b="1">
                           <a:solidFill>
-                            <a:schemeClr val="tx1"/>
+                            <a:schemeClr val="bg1"/>
                           </a:solidFill>
                         </a:rPr>
                         <a:t>Effect on PZ Nigeria</a:t>
@@ -11678,7 +12565,9 @@
                   <a:tcPr anchor="ctr">
                     <a:lnL w="12700" cap="flat" cmpd="sng" algn="ctr">
                       <a:solidFill>
-                        <a:schemeClr val="tx1"/>
+                        <a:schemeClr val="bg1">
+                          <a:lumMod val="75000"/>
+                        </a:schemeClr>
                       </a:solidFill>
                       <a:prstDash val="solid"/>
                       <a:round/>
@@ -11687,7 +12576,9 @@
                     </a:lnL>
                     <a:lnR w="12700" cap="flat" cmpd="sng" algn="ctr">
                       <a:solidFill>
-                        <a:schemeClr val="tx1"/>
+                        <a:schemeClr val="bg1">
+                          <a:lumMod val="75000"/>
+                        </a:schemeClr>
                       </a:solidFill>
                       <a:prstDash val="solid"/>
                       <a:round/>
@@ -11696,7 +12587,9 @@
                     </a:lnR>
                     <a:lnT w="12700" cap="flat" cmpd="sng" algn="ctr">
                       <a:solidFill>
-                        <a:schemeClr val="tx1"/>
+                        <a:schemeClr val="bg1">
+                          <a:lumMod val="75000"/>
+                        </a:schemeClr>
                       </a:solidFill>
                       <a:prstDash val="solid"/>
                       <a:round/>
@@ -11705,7 +12598,9 @@
                     </a:lnT>
                     <a:lnB w="12700" cap="flat" cmpd="sng" algn="ctr">
                       <a:solidFill>
-                        <a:schemeClr val="tx1"/>
+                        <a:schemeClr val="bg1">
+                          <a:lumMod val="75000"/>
+                        </a:schemeClr>
                       </a:solidFill>
                       <a:prstDash val="solid"/>
                       <a:round/>
@@ -11713,8 +12608,8 @@
                       <a:tailEnd type="none" w="med" len="med"/>
                     </a:lnB>
                     <a:solidFill>
-                      <a:schemeClr val="bg1">
-                        <a:lumMod val="85000"/>
+                      <a:schemeClr val="accent1">
+                        <a:lumMod val="50000"/>
                       </a:schemeClr>
                     </a:solidFill>
                   </a:tcPr>
@@ -11728,7 +12623,7 @@
                       <a:r>
                         <a:rPr sz="1600" b="1">
                           <a:solidFill>
-                            <a:schemeClr val="tx1"/>
+                            <a:schemeClr val="bg1"/>
                           </a:solidFill>
                         </a:rPr>
                         <a:t>Score (of 25)</a:t>
@@ -11738,7 +12633,9 @@
                   <a:tcPr anchor="ctr">
                     <a:lnL w="12700" cap="flat" cmpd="sng" algn="ctr">
                       <a:solidFill>
-                        <a:schemeClr val="tx1"/>
+                        <a:schemeClr val="bg1">
+                          <a:lumMod val="75000"/>
+                        </a:schemeClr>
                       </a:solidFill>
                       <a:prstDash val="solid"/>
                       <a:round/>
@@ -11747,7 +12644,9 @@
                     </a:lnL>
                     <a:lnR w="12700" cap="flat" cmpd="sng" algn="ctr">
                       <a:solidFill>
-                        <a:schemeClr val="tx1"/>
+                        <a:schemeClr val="bg1">
+                          <a:lumMod val="75000"/>
+                        </a:schemeClr>
                       </a:solidFill>
                       <a:prstDash val="solid"/>
                       <a:round/>
@@ -11756,7 +12655,9 @@
                     </a:lnR>
                     <a:lnT w="12700" cap="flat" cmpd="sng" algn="ctr">
                       <a:solidFill>
-                        <a:schemeClr val="tx1"/>
+                        <a:schemeClr val="bg1">
+                          <a:lumMod val="75000"/>
+                        </a:schemeClr>
                       </a:solidFill>
                       <a:prstDash val="solid"/>
                       <a:round/>
@@ -11765,7 +12666,9 @@
                     </a:lnT>
                     <a:lnB w="12700" cap="flat" cmpd="sng" algn="ctr">
                       <a:solidFill>
-                        <a:schemeClr val="tx1"/>
+                        <a:schemeClr val="bg1">
+                          <a:lumMod val="75000"/>
+                        </a:schemeClr>
                       </a:solidFill>
                       <a:prstDash val="solid"/>
                       <a:round/>
@@ -11773,8 +12676,8 @@
                       <a:tailEnd type="none" w="med" len="med"/>
                     </a:lnB>
                     <a:solidFill>
-                      <a:schemeClr val="bg1">
-                        <a:lumMod val="85000"/>
+                      <a:schemeClr val="accent1">
+                        <a:lumMod val="50000"/>
                       </a:schemeClr>
                     </a:solidFill>
                   </a:tcPr>
@@ -11788,7 +12691,7 @@
                       <a:r>
                         <a:rPr sz="1600" b="1">
                           <a:solidFill>
-                            <a:schemeClr val="tx1"/>
+                            <a:schemeClr val="bg1"/>
                           </a:solidFill>
                         </a:rPr>
                         <a:t>Priority</a:t>
@@ -11798,7 +12701,9 @@
                   <a:tcPr anchor="ctr">
                     <a:lnL w="12700" cap="flat" cmpd="sng" algn="ctr">
                       <a:solidFill>
-                        <a:schemeClr val="tx1"/>
+                        <a:schemeClr val="bg1">
+                          <a:lumMod val="75000"/>
+                        </a:schemeClr>
                       </a:solidFill>
                       <a:prstDash val="solid"/>
                       <a:round/>
@@ -11807,7 +12712,9 @@
                     </a:lnL>
                     <a:lnR w="12700" cap="flat" cmpd="sng" algn="ctr">
                       <a:solidFill>
-                        <a:schemeClr val="tx1"/>
+                        <a:schemeClr val="bg1">
+                          <a:lumMod val="75000"/>
+                        </a:schemeClr>
                       </a:solidFill>
                       <a:prstDash val="solid"/>
                       <a:round/>
@@ -11816,7 +12723,9 @@
                     </a:lnR>
                     <a:lnT w="12700" cap="flat" cmpd="sng" algn="ctr">
                       <a:solidFill>
-                        <a:schemeClr val="tx1"/>
+                        <a:schemeClr val="bg1">
+                          <a:lumMod val="75000"/>
+                        </a:schemeClr>
                       </a:solidFill>
                       <a:prstDash val="solid"/>
                       <a:round/>
@@ -11825,7 +12734,9 @@
                     </a:lnT>
                     <a:lnB w="12700" cap="flat" cmpd="sng" algn="ctr">
                       <a:solidFill>
-                        <a:schemeClr val="tx1"/>
+                        <a:schemeClr val="bg1">
+                          <a:lumMod val="75000"/>
+                        </a:schemeClr>
                       </a:solidFill>
                       <a:prstDash val="solid"/>
                       <a:round/>
@@ -11833,8 +12744,8 @@
                       <a:tailEnd type="none" w="med" len="med"/>
                     </a:lnB>
                     <a:solidFill>
-                      <a:schemeClr val="bg1">
-                        <a:lumMod val="85000"/>
+                      <a:schemeClr val="accent1">
+                        <a:lumMod val="50000"/>
                       </a:schemeClr>
                     </a:solidFill>
                   </a:tcPr>
@@ -11849,7 +12760,9 @@
                       <a:r>
                         <a:rPr sz="1600" b="1">
                           <a:solidFill>
-                            <a:schemeClr val="tx1"/>
+                            <a:schemeClr val="accent1">
+                              <a:lumMod val="50000"/>
+                            </a:schemeClr>
                           </a:solidFill>
                         </a:rPr>
                         <a:t>Social</a:t>
@@ -11857,7 +12770,7 @@
                     </a:p>
                     <a:p>
                       <a:r>
-                        <a:rPr sz="1400" b="0">
+                        <a:rPr sz="1400">
                           <a:solidFill>
                             <a:schemeClr val="tx1"/>
                           </a:solidFill>
@@ -11869,7 +12782,9 @@
                   <a:tcPr anchor="ctr">
                     <a:lnL w="12700" cap="flat" cmpd="sng" algn="ctr">
                       <a:solidFill>
-                        <a:schemeClr val="tx1"/>
+                        <a:schemeClr val="bg1">
+                          <a:lumMod val="75000"/>
+                        </a:schemeClr>
                       </a:solidFill>
                       <a:prstDash val="solid"/>
                       <a:round/>
@@ -11878,7 +12793,9 @@
                     </a:lnL>
                     <a:lnR w="12700" cap="flat" cmpd="sng" algn="ctr">
                       <a:solidFill>
-                        <a:schemeClr val="tx1"/>
+                        <a:schemeClr val="bg1">
+                          <a:lumMod val="75000"/>
+                        </a:schemeClr>
                       </a:solidFill>
                       <a:prstDash val="solid"/>
                       <a:round/>
@@ -11887,7 +12804,9 @@
                     </a:lnR>
                     <a:lnT w="12700" cap="flat" cmpd="sng" algn="ctr">
                       <a:solidFill>
-                        <a:schemeClr val="tx1"/>
+                        <a:schemeClr val="bg1">
+                          <a:lumMod val="75000"/>
+                        </a:schemeClr>
                       </a:solidFill>
                       <a:prstDash val="solid"/>
                       <a:round/>
@@ -11896,7 +12815,9 @@
                     </a:lnT>
                     <a:lnB w="12700" cap="flat" cmpd="sng" algn="ctr">
                       <a:solidFill>
-                        <a:schemeClr val="tx1"/>
+                        <a:schemeClr val="bg1">
+                          <a:lumMod val="75000"/>
+                        </a:schemeClr>
                       </a:solidFill>
                       <a:prstDash val="solid"/>
                       <a:round/>
@@ -11924,7 +12845,9 @@
                   <a:tcPr anchor="ctr">
                     <a:lnL w="12700" cap="flat" cmpd="sng" algn="ctr">
                       <a:solidFill>
-                        <a:schemeClr val="tx1"/>
+                        <a:schemeClr val="bg1">
+                          <a:lumMod val="75000"/>
+                        </a:schemeClr>
                       </a:solidFill>
                       <a:prstDash val="solid"/>
                       <a:round/>
@@ -11933,7 +12856,9 @@
                     </a:lnL>
                     <a:lnR w="12700" cap="flat" cmpd="sng" algn="ctr">
                       <a:solidFill>
-                        <a:schemeClr val="tx1"/>
+                        <a:schemeClr val="bg1">
+                          <a:lumMod val="75000"/>
+                        </a:schemeClr>
                       </a:solidFill>
                       <a:prstDash val="solid"/>
                       <a:round/>
@@ -11942,7 +12867,9 @@
                     </a:lnR>
                     <a:lnT w="12700" cap="flat" cmpd="sng" algn="ctr">
                       <a:solidFill>
-                        <a:schemeClr val="tx1"/>
+                        <a:schemeClr val="bg1">
+                          <a:lumMod val="75000"/>
+                        </a:schemeClr>
                       </a:solidFill>
                       <a:prstDash val="solid"/>
                       <a:round/>
@@ -11951,7 +12878,9 @@
                     </a:lnT>
                     <a:lnB w="12700" cap="flat" cmpd="sng" algn="ctr">
                       <a:solidFill>
-                        <a:schemeClr val="tx1"/>
+                        <a:schemeClr val="bg1">
+                          <a:lumMod val="75000"/>
+                        </a:schemeClr>
                       </a:solidFill>
                       <a:prstDash val="solid"/>
                       <a:round/>
@@ -11979,7 +12908,9 @@
                   <a:tcPr anchor="ctr">
                     <a:lnL w="12700" cap="flat" cmpd="sng" algn="ctr">
                       <a:solidFill>
-                        <a:schemeClr val="tx1"/>
+                        <a:schemeClr val="bg1">
+                          <a:lumMod val="75000"/>
+                        </a:schemeClr>
                       </a:solidFill>
                       <a:prstDash val="solid"/>
                       <a:round/>
@@ -11988,7 +12919,9 @@
                     </a:lnL>
                     <a:lnR w="12700" cap="flat" cmpd="sng" algn="ctr">
                       <a:solidFill>
-                        <a:schemeClr val="tx1"/>
+                        <a:schemeClr val="bg1">
+                          <a:lumMod val="75000"/>
+                        </a:schemeClr>
                       </a:solidFill>
                       <a:prstDash val="solid"/>
                       <a:round/>
@@ -11997,7 +12930,9 @@
                     </a:lnR>
                     <a:lnT w="12700" cap="flat" cmpd="sng" algn="ctr">
                       <a:solidFill>
-                        <a:schemeClr val="tx1"/>
+                        <a:schemeClr val="bg1">
+                          <a:lumMod val="75000"/>
+                        </a:schemeClr>
                       </a:solidFill>
                       <a:prstDash val="solid"/>
                       <a:round/>
@@ -12006,7 +12941,9 @@
                     </a:lnT>
                     <a:lnB w="12700" cap="flat" cmpd="sng" algn="ctr">
                       <a:solidFill>
-                        <a:schemeClr val="tx1"/>
+                        <a:schemeClr val="bg1">
+                          <a:lumMod val="75000"/>
+                        </a:schemeClr>
                       </a:solidFill>
                       <a:prstDash val="solid"/>
                       <a:round/>
@@ -12035,7 +12972,9 @@
                   <a:tcPr anchor="ctr">
                     <a:lnL w="12700" cap="flat" cmpd="sng" algn="ctr">
                       <a:solidFill>
-                        <a:schemeClr val="tx1"/>
+                        <a:schemeClr val="bg1">
+                          <a:lumMod val="75000"/>
+                        </a:schemeClr>
                       </a:solidFill>
                       <a:prstDash val="solid"/>
                       <a:round/>
@@ -12044,7 +12983,9 @@
                     </a:lnL>
                     <a:lnR w="12700" cap="flat" cmpd="sng" algn="ctr">
                       <a:solidFill>
-                        <a:schemeClr val="tx1"/>
+                        <a:schemeClr val="bg1">
+                          <a:lumMod val="75000"/>
+                        </a:schemeClr>
                       </a:solidFill>
                       <a:prstDash val="solid"/>
                       <a:round/>
@@ -12053,7 +12994,9 @@
                     </a:lnR>
                     <a:lnT w="12700" cap="flat" cmpd="sng" algn="ctr">
                       <a:solidFill>
-                        <a:schemeClr val="tx1"/>
+                        <a:schemeClr val="bg1">
+                          <a:lumMod val="75000"/>
+                        </a:schemeClr>
                       </a:solidFill>
                       <a:prstDash val="solid"/>
                       <a:round/>
@@ -12062,7 +13005,9 @@
                     </a:lnT>
                     <a:lnB w="12700" cap="flat" cmpd="sng" algn="ctr">
                       <a:solidFill>
-                        <a:schemeClr val="tx1"/>
+                        <a:schemeClr val="bg1">
+                          <a:lumMod val="75000"/>
+                        </a:schemeClr>
                       </a:solidFill>
                       <a:prstDash val="solid"/>
                       <a:round/>
@@ -12079,9 +13024,11 @@
                     <a:p>
                       <a:pPr algn="ctr"/>
                       <a:r>
-                        <a:rPr sz="1600" b="0">
+                        <a:rPr sz="1600" b="1">
                           <a:solidFill>
-                            <a:schemeClr val="tx1"/>
+                            <a:schemeClr val="accent2">
+                              <a:lumMod val="75000"/>
+                            </a:schemeClr>
                           </a:solidFill>
                         </a:rPr>
                         <a:t>High</a:t>
@@ -12091,7 +13038,9 @@
                   <a:tcPr anchor="ctr">
                     <a:lnL w="12700" cap="flat" cmpd="sng" algn="ctr">
                       <a:solidFill>
-                        <a:schemeClr val="tx1"/>
+                        <a:schemeClr val="bg1">
+                          <a:lumMod val="75000"/>
+                        </a:schemeClr>
                       </a:solidFill>
                       <a:prstDash val="solid"/>
                       <a:round/>
@@ -12100,7 +13049,9 @@
                     </a:lnL>
                     <a:lnR w="12700" cap="flat" cmpd="sng" algn="ctr">
                       <a:solidFill>
-                        <a:schemeClr val="tx1"/>
+                        <a:schemeClr val="bg1">
+                          <a:lumMod val="75000"/>
+                        </a:schemeClr>
                       </a:solidFill>
                       <a:prstDash val="solid"/>
                       <a:round/>
@@ -12109,7 +13060,9 @@
                     </a:lnR>
                     <a:lnT w="12700" cap="flat" cmpd="sng" algn="ctr">
                       <a:solidFill>
-                        <a:schemeClr val="tx1"/>
+                        <a:schemeClr val="bg1">
+                          <a:lumMod val="75000"/>
+                        </a:schemeClr>
                       </a:solidFill>
                       <a:prstDash val="solid"/>
                       <a:round/>
@@ -12118,7 +13071,9 @@
                     </a:lnT>
                     <a:lnB w="12700" cap="flat" cmpd="sng" algn="ctr">
                       <a:solidFill>
-                        <a:schemeClr val="tx1"/>
+                        <a:schemeClr val="bg1">
+                          <a:lumMod val="75000"/>
+                        </a:schemeClr>
                       </a:solidFill>
                       <a:prstDash val="solid"/>
                       <a:round/>
@@ -12139,7 +13094,9 @@
                   <a:tcPr anchor="ctr">
                     <a:lnL w="12700" cap="flat" cmpd="sng" algn="ctr">
                       <a:solidFill>
-                        <a:schemeClr val="tx1"/>
+                        <a:schemeClr val="bg1">
+                          <a:lumMod val="75000"/>
+                        </a:schemeClr>
                       </a:solidFill>
                       <a:prstDash val="solid"/>
                       <a:round/>
@@ -12148,7 +13105,9 @@
                     </a:lnL>
                     <a:lnR w="12700" cap="flat" cmpd="sng" algn="ctr">
                       <a:solidFill>
-                        <a:schemeClr val="tx1"/>
+                        <a:schemeClr val="bg1">
+                          <a:lumMod val="75000"/>
+                        </a:schemeClr>
                       </a:solidFill>
                       <a:prstDash val="solid"/>
                       <a:round/>
@@ -12157,7 +13116,9 @@
                     </a:lnR>
                     <a:lnT w="12700" cap="flat" cmpd="sng" algn="ctr">
                       <a:solidFill>
-                        <a:schemeClr val="tx1"/>
+                        <a:schemeClr val="bg1">
+                          <a:lumMod val="75000"/>
+                        </a:schemeClr>
                       </a:solidFill>
                       <a:prstDash val="solid"/>
                       <a:round/>
@@ -12166,7 +13127,9 @@
                     </a:lnT>
                     <a:lnB w="12700" cap="flat" cmpd="sng" algn="ctr">
                       <a:solidFill>
-                        <a:schemeClr val="tx1"/>
+                        <a:schemeClr val="bg1">
+                          <a:lumMod val="75000"/>
+                        </a:schemeClr>
                       </a:solidFill>
                       <a:prstDash val="solid"/>
                       <a:round/>
@@ -12194,7 +13157,9 @@
                   <a:tcPr anchor="ctr">
                     <a:lnL w="12700" cap="flat" cmpd="sng" algn="ctr">
                       <a:solidFill>
-                        <a:schemeClr val="tx1"/>
+                        <a:schemeClr val="bg1">
+                          <a:lumMod val="75000"/>
+                        </a:schemeClr>
                       </a:solidFill>
                       <a:prstDash val="solid"/>
                       <a:round/>
@@ -12203,7 +13168,9 @@
                     </a:lnL>
                     <a:lnR w="12700" cap="flat" cmpd="sng" algn="ctr">
                       <a:solidFill>
-                        <a:schemeClr val="tx1"/>
+                        <a:schemeClr val="bg1">
+                          <a:lumMod val="75000"/>
+                        </a:schemeClr>
                       </a:solidFill>
                       <a:prstDash val="solid"/>
                       <a:round/>
@@ -12212,7 +13179,9 @@
                     </a:lnR>
                     <a:lnT w="12700" cap="flat" cmpd="sng" algn="ctr">
                       <a:solidFill>
-                        <a:schemeClr val="tx1"/>
+                        <a:schemeClr val="bg1">
+                          <a:lumMod val="75000"/>
+                        </a:schemeClr>
                       </a:solidFill>
                       <a:prstDash val="solid"/>
                       <a:round/>
@@ -12221,7 +13190,9 @@
                     </a:lnT>
                     <a:lnB w="12700" cap="flat" cmpd="sng" algn="ctr">
                       <a:solidFill>
-                        <a:schemeClr val="tx1"/>
+                        <a:schemeClr val="bg1">
+                          <a:lumMod val="75000"/>
+                        </a:schemeClr>
                       </a:solidFill>
                       <a:prstDash val="solid"/>
                       <a:round/>
@@ -12249,7 +13220,9 @@
                   <a:tcPr anchor="ctr">
                     <a:lnL w="12700" cap="flat" cmpd="sng" algn="ctr">
                       <a:solidFill>
-                        <a:schemeClr val="tx1"/>
+                        <a:schemeClr val="bg1">
+                          <a:lumMod val="75000"/>
+                        </a:schemeClr>
                       </a:solidFill>
                       <a:prstDash val="solid"/>
                       <a:round/>
@@ -12258,7 +13231,9 @@
                     </a:lnL>
                     <a:lnR w="12700" cap="flat" cmpd="sng" algn="ctr">
                       <a:solidFill>
-                        <a:schemeClr val="tx1"/>
+                        <a:schemeClr val="bg1">
+                          <a:lumMod val="75000"/>
+                        </a:schemeClr>
                       </a:solidFill>
                       <a:prstDash val="solid"/>
                       <a:round/>
@@ -12267,7 +13242,9 @@
                     </a:lnR>
                     <a:lnT w="12700" cap="flat" cmpd="sng" algn="ctr">
                       <a:solidFill>
-                        <a:schemeClr val="tx1"/>
+                        <a:schemeClr val="bg1">
+                          <a:lumMod val="75000"/>
+                        </a:schemeClr>
                       </a:solidFill>
                       <a:prstDash val="solid"/>
                       <a:round/>
@@ -12276,7 +13253,9 @@
                     </a:lnT>
                     <a:lnB w="12700" cap="flat" cmpd="sng" algn="ctr">
                       <a:solidFill>
-                        <a:schemeClr val="tx1"/>
+                        <a:schemeClr val="bg1">
+                          <a:lumMod val="75000"/>
+                        </a:schemeClr>
                       </a:solidFill>
                       <a:prstDash val="solid"/>
                       <a:round/>
@@ -12305,7 +13284,9 @@
                   <a:tcPr anchor="ctr">
                     <a:lnL w="12700" cap="flat" cmpd="sng" algn="ctr">
                       <a:solidFill>
-                        <a:schemeClr val="tx1"/>
+                        <a:schemeClr val="bg1">
+                          <a:lumMod val="75000"/>
+                        </a:schemeClr>
                       </a:solidFill>
                       <a:prstDash val="solid"/>
                       <a:round/>
@@ -12314,7 +13295,9 @@
                     </a:lnL>
                     <a:lnR w="12700" cap="flat" cmpd="sng" algn="ctr">
                       <a:solidFill>
-                        <a:schemeClr val="tx1"/>
+                        <a:schemeClr val="bg1">
+                          <a:lumMod val="75000"/>
+                        </a:schemeClr>
                       </a:solidFill>
                       <a:prstDash val="solid"/>
                       <a:round/>
@@ -12323,7 +13306,9 @@
                     </a:lnR>
                     <a:lnT w="12700" cap="flat" cmpd="sng" algn="ctr">
                       <a:solidFill>
-                        <a:schemeClr val="tx1"/>
+                        <a:schemeClr val="bg1">
+                          <a:lumMod val="75000"/>
+                        </a:schemeClr>
                       </a:solidFill>
                       <a:prstDash val="solid"/>
                       <a:round/>
@@ -12332,7 +13317,9 @@
                     </a:lnT>
                     <a:lnB w="12700" cap="flat" cmpd="sng" algn="ctr">
                       <a:solidFill>
-                        <a:schemeClr val="tx1"/>
+                        <a:schemeClr val="bg1">
+                          <a:lumMod val="75000"/>
+                        </a:schemeClr>
                       </a:solidFill>
                       <a:prstDash val="solid"/>
                       <a:round/>
@@ -12349,9 +13336,11 @@
                     <a:p>
                       <a:pPr algn="ctr"/>
                       <a:r>
-                        <a:rPr sz="1600" b="0">
+                        <a:rPr sz="1600" b="1">
                           <a:solidFill>
-                            <a:schemeClr val="tx1"/>
+                            <a:schemeClr val="accent2">
+                              <a:lumMod val="75000"/>
+                            </a:schemeClr>
                           </a:solidFill>
                         </a:rPr>
                         <a:t>High</a:t>
@@ -12361,7 +13350,9 @@
                   <a:tcPr anchor="ctr">
                     <a:lnL w="12700" cap="flat" cmpd="sng" algn="ctr">
                       <a:solidFill>
-                        <a:schemeClr val="tx1"/>
+                        <a:schemeClr val="bg1">
+                          <a:lumMod val="75000"/>
+                        </a:schemeClr>
                       </a:solidFill>
                       <a:prstDash val="solid"/>
                       <a:round/>
@@ -12370,7 +13361,9 @@
                     </a:lnL>
                     <a:lnR w="12700" cap="flat" cmpd="sng" algn="ctr">
                       <a:solidFill>
-                        <a:schemeClr val="tx1"/>
+                        <a:schemeClr val="bg1">
+                          <a:lumMod val="75000"/>
+                        </a:schemeClr>
                       </a:solidFill>
                       <a:prstDash val="solid"/>
                       <a:round/>
@@ -12379,7 +13372,9 @@
                     </a:lnR>
                     <a:lnT w="12700" cap="flat" cmpd="sng" algn="ctr">
                       <a:solidFill>
-                        <a:schemeClr val="tx1"/>
+                        <a:schemeClr val="bg1">
+                          <a:lumMod val="75000"/>
+                        </a:schemeClr>
                       </a:solidFill>
                       <a:prstDash val="solid"/>
                       <a:round/>
@@ -12388,7 +13383,9 @@
                     </a:lnT>
                     <a:lnB w="12700" cap="flat" cmpd="sng" algn="ctr">
                       <a:solidFill>
-                        <a:schemeClr val="tx1"/>
+                        <a:schemeClr val="bg1">
+                          <a:lumMod val="75000"/>
+                        </a:schemeClr>
                       </a:solidFill>
                       <a:prstDash val="solid"/>
                       <a:round/>
@@ -12409,7 +13406,9 @@
                   <a:tcPr anchor="ctr">
                     <a:lnL w="12700" cap="flat" cmpd="sng" algn="ctr">
                       <a:solidFill>
-                        <a:schemeClr val="tx1"/>
+                        <a:schemeClr val="bg1">
+                          <a:lumMod val="75000"/>
+                        </a:schemeClr>
                       </a:solidFill>
                       <a:prstDash val="solid"/>
                       <a:round/>
@@ -12418,7 +13417,9 @@
                     </a:lnL>
                     <a:lnR w="12700" cap="flat" cmpd="sng" algn="ctr">
                       <a:solidFill>
-                        <a:schemeClr val="tx1"/>
+                        <a:schemeClr val="bg1">
+                          <a:lumMod val="75000"/>
+                        </a:schemeClr>
                       </a:solidFill>
                       <a:prstDash val="solid"/>
                       <a:round/>
@@ -12427,7 +13428,9 @@
                     </a:lnR>
                     <a:lnT w="12700" cap="flat" cmpd="sng" algn="ctr">
                       <a:solidFill>
-                        <a:schemeClr val="tx1"/>
+                        <a:schemeClr val="bg1">
+                          <a:lumMod val="75000"/>
+                        </a:schemeClr>
                       </a:solidFill>
                       <a:prstDash val="solid"/>
                       <a:round/>
@@ -12436,7 +13439,9 @@
                     </a:lnT>
                     <a:lnB w="12700" cap="flat" cmpd="sng" algn="ctr">
                       <a:solidFill>
-                        <a:schemeClr val="tx1"/>
+                        <a:schemeClr val="bg1">
+                          <a:lumMod val="75000"/>
+                        </a:schemeClr>
                       </a:solidFill>
                       <a:prstDash val="solid"/>
                       <a:round/>
@@ -12464,7 +13469,9 @@
                   <a:tcPr anchor="ctr">
                     <a:lnL w="12700" cap="flat" cmpd="sng" algn="ctr">
                       <a:solidFill>
-                        <a:schemeClr val="tx1"/>
+                        <a:schemeClr val="bg1">
+                          <a:lumMod val="75000"/>
+                        </a:schemeClr>
                       </a:solidFill>
                       <a:prstDash val="solid"/>
                       <a:round/>
@@ -12473,7 +13480,9 @@
                     </a:lnL>
                     <a:lnR w="12700" cap="flat" cmpd="sng" algn="ctr">
                       <a:solidFill>
-                        <a:schemeClr val="tx1"/>
+                        <a:schemeClr val="bg1">
+                          <a:lumMod val="75000"/>
+                        </a:schemeClr>
                       </a:solidFill>
                       <a:prstDash val="solid"/>
                       <a:round/>
@@ -12482,7 +13491,9 @@
                     </a:lnR>
                     <a:lnT w="12700" cap="flat" cmpd="sng" algn="ctr">
                       <a:solidFill>
-                        <a:schemeClr val="tx1"/>
+                        <a:schemeClr val="bg1">
+                          <a:lumMod val="75000"/>
+                        </a:schemeClr>
                       </a:solidFill>
                       <a:prstDash val="solid"/>
                       <a:round/>
@@ -12491,7 +13502,9 @@
                     </a:lnT>
                     <a:lnB w="12700" cap="flat" cmpd="sng" algn="ctr">
                       <a:solidFill>
-                        <a:schemeClr val="tx1"/>
+                        <a:schemeClr val="bg1">
+                          <a:lumMod val="75000"/>
+                        </a:schemeClr>
                       </a:solidFill>
                       <a:prstDash val="solid"/>
                       <a:round/>
@@ -12519,7 +13532,9 @@
                   <a:tcPr anchor="ctr">
                     <a:lnL w="12700" cap="flat" cmpd="sng" algn="ctr">
                       <a:solidFill>
-                        <a:schemeClr val="tx1"/>
+                        <a:schemeClr val="bg1">
+                          <a:lumMod val="75000"/>
+                        </a:schemeClr>
                       </a:solidFill>
                       <a:prstDash val="solid"/>
                       <a:round/>
@@ -12528,7 +13543,9 @@
                     </a:lnL>
                     <a:lnR w="12700" cap="flat" cmpd="sng" algn="ctr">
                       <a:solidFill>
-                        <a:schemeClr val="tx1"/>
+                        <a:schemeClr val="bg1">
+                          <a:lumMod val="75000"/>
+                        </a:schemeClr>
                       </a:solidFill>
                       <a:prstDash val="solid"/>
                       <a:round/>
@@ -12537,7 +13554,9 @@
                     </a:lnR>
                     <a:lnT w="12700" cap="flat" cmpd="sng" algn="ctr">
                       <a:solidFill>
-                        <a:schemeClr val="tx1"/>
+                        <a:schemeClr val="bg1">
+                          <a:lumMod val="75000"/>
+                        </a:schemeClr>
                       </a:solidFill>
                       <a:prstDash val="solid"/>
                       <a:round/>
@@ -12546,7 +13565,9 @@
                     </a:lnT>
                     <a:lnB w="12700" cap="flat" cmpd="sng" algn="ctr">
                       <a:solidFill>
-                        <a:schemeClr val="tx1"/>
+                        <a:schemeClr val="bg1">
+                          <a:lumMod val="75000"/>
+                        </a:schemeClr>
                       </a:solidFill>
                       <a:prstDash val="solid"/>
                       <a:round/>
@@ -12575,7 +13596,9 @@
                   <a:tcPr anchor="ctr">
                     <a:lnL w="12700" cap="flat" cmpd="sng" algn="ctr">
                       <a:solidFill>
-                        <a:schemeClr val="tx1"/>
+                        <a:schemeClr val="bg1">
+                          <a:lumMod val="75000"/>
+                        </a:schemeClr>
                       </a:solidFill>
                       <a:prstDash val="solid"/>
                       <a:round/>
@@ -12584,7 +13607,9 @@
                     </a:lnL>
                     <a:lnR w="12700" cap="flat" cmpd="sng" algn="ctr">
                       <a:solidFill>
-                        <a:schemeClr val="tx1"/>
+                        <a:schemeClr val="bg1">
+                          <a:lumMod val="75000"/>
+                        </a:schemeClr>
                       </a:solidFill>
                       <a:prstDash val="solid"/>
                       <a:round/>
@@ -12593,7 +13618,9 @@
                     </a:lnR>
                     <a:lnT w="12700" cap="flat" cmpd="sng" algn="ctr">
                       <a:solidFill>
-                        <a:schemeClr val="tx1"/>
+                        <a:schemeClr val="bg1">
+                          <a:lumMod val="75000"/>
+                        </a:schemeClr>
                       </a:solidFill>
                       <a:prstDash val="solid"/>
                       <a:round/>
@@ -12602,7 +13629,9 @@
                     </a:lnT>
                     <a:lnB w="12700" cap="flat" cmpd="sng" algn="ctr">
                       <a:solidFill>
-                        <a:schemeClr val="tx1"/>
+                        <a:schemeClr val="bg1">
+                          <a:lumMod val="75000"/>
+                        </a:schemeClr>
                       </a:solidFill>
                       <a:prstDash val="solid"/>
                       <a:round/>
@@ -12631,7 +13660,9 @@
                   <a:tcPr anchor="ctr">
                     <a:lnL w="12700" cap="flat" cmpd="sng" algn="ctr">
                       <a:solidFill>
-                        <a:schemeClr val="tx1"/>
+                        <a:schemeClr val="bg1">
+                          <a:lumMod val="75000"/>
+                        </a:schemeClr>
                       </a:solidFill>
                       <a:prstDash val="solid"/>
                       <a:round/>
@@ -12640,7 +13671,9 @@
                     </a:lnL>
                     <a:lnR w="12700" cap="flat" cmpd="sng" algn="ctr">
                       <a:solidFill>
-                        <a:schemeClr val="tx1"/>
+                        <a:schemeClr val="bg1">
+                          <a:lumMod val="75000"/>
+                        </a:schemeClr>
                       </a:solidFill>
                       <a:prstDash val="solid"/>
                       <a:round/>
@@ -12649,7 +13682,9 @@
                     </a:lnR>
                     <a:lnT w="12700" cap="flat" cmpd="sng" algn="ctr">
                       <a:solidFill>
-                        <a:schemeClr val="tx1"/>
+                        <a:schemeClr val="bg1">
+                          <a:lumMod val="75000"/>
+                        </a:schemeClr>
                       </a:solidFill>
                       <a:prstDash val="solid"/>
                       <a:round/>
@@ -12658,7 +13693,9 @@
                     </a:lnT>
                     <a:lnB w="12700" cap="flat" cmpd="sng" algn="ctr">
                       <a:solidFill>
-                        <a:schemeClr val="tx1"/>
+                        <a:schemeClr val="bg1">
+                          <a:lumMod val="75000"/>
+                        </a:schemeClr>
                       </a:solidFill>
                       <a:prstDash val="solid"/>
                       <a:round/>
@@ -12678,7 +13715,9 @@
                       <a:r>
                         <a:rPr sz="1600" b="1">
                           <a:solidFill>
-                            <a:schemeClr val="tx1"/>
+                            <a:schemeClr val="accent1">
+                              <a:lumMod val="50000"/>
+                            </a:schemeClr>
                           </a:solidFill>
                         </a:rPr>
                         <a:t>Technological</a:t>
@@ -12686,7 +13725,7 @@
                     </a:p>
                     <a:p>
                       <a:r>
-                        <a:rPr sz="1400" b="0">
+                        <a:rPr sz="1400">
                           <a:solidFill>
                             <a:schemeClr val="tx1"/>
                           </a:solidFill>
@@ -12698,7 +13737,9 @@
                   <a:tcPr anchor="ctr">
                     <a:lnL w="12700" cap="flat" cmpd="sng" algn="ctr">
                       <a:solidFill>
-                        <a:schemeClr val="tx1"/>
+                        <a:schemeClr val="bg1">
+                          <a:lumMod val="75000"/>
+                        </a:schemeClr>
                       </a:solidFill>
                       <a:prstDash val="solid"/>
                       <a:round/>
@@ -12707,7 +13748,9 @@
                     </a:lnL>
                     <a:lnR w="12700" cap="flat" cmpd="sng" algn="ctr">
                       <a:solidFill>
-                        <a:schemeClr val="tx1"/>
+                        <a:schemeClr val="bg1">
+                          <a:lumMod val="75000"/>
+                        </a:schemeClr>
                       </a:solidFill>
                       <a:prstDash val="solid"/>
                       <a:round/>
@@ -12716,7 +13759,9 @@
                     </a:lnR>
                     <a:lnT w="12700" cap="flat" cmpd="sng" algn="ctr">
                       <a:solidFill>
-                        <a:schemeClr val="tx1"/>
+                        <a:schemeClr val="bg1">
+                          <a:lumMod val="75000"/>
+                        </a:schemeClr>
                       </a:solidFill>
                       <a:prstDash val="solid"/>
                       <a:round/>
@@ -12725,7 +13770,9 @@
                     </a:lnT>
                     <a:lnB w="12700" cap="flat" cmpd="sng" algn="ctr">
                       <a:solidFill>
-                        <a:schemeClr val="tx1"/>
+                        <a:schemeClr val="bg1">
+                          <a:lumMod val="75000"/>
+                        </a:schemeClr>
                       </a:solidFill>
                       <a:prstDash val="solid"/>
                       <a:round/>
@@ -12753,7 +13800,9 @@
                   <a:tcPr anchor="ctr">
                     <a:lnL w="12700" cap="flat" cmpd="sng" algn="ctr">
                       <a:solidFill>
-                        <a:schemeClr val="tx1"/>
+                        <a:schemeClr val="bg1">
+                          <a:lumMod val="75000"/>
+                        </a:schemeClr>
                       </a:solidFill>
                       <a:prstDash val="solid"/>
                       <a:round/>
@@ -12762,7 +13811,9 @@
                     </a:lnL>
                     <a:lnR w="12700" cap="flat" cmpd="sng" algn="ctr">
                       <a:solidFill>
-                        <a:schemeClr val="tx1"/>
+                        <a:schemeClr val="bg1">
+                          <a:lumMod val="75000"/>
+                        </a:schemeClr>
                       </a:solidFill>
                       <a:prstDash val="solid"/>
                       <a:round/>
@@ -12771,7 +13822,9 @@
                     </a:lnR>
                     <a:lnT w="12700" cap="flat" cmpd="sng" algn="ctr">
                       <a:solidFill>
-                        <a:schemeClr val="tx1"/>
+                        <a:schemeClr val="bg1">
+                          <a:lumMod val="75000"/>
+                        </a:schemeClr>
                       </a:solidFill>
                       <a:prstDash val="solid"/>
                       <a:round/>
@@ -12780,7 +13833,9 @@
                     </a:lnT>
                     <a:lnB w="12700" cap="flat" cmpd="sng" algn="ctr">
                       <a:solidFill>
-                        <a:schemeClr val="tx1"/>
+                        <a:schemeClr val="bg1">
+                          <a:lumMod val="75000"/>
+                        </a:schemeClr>
                       </a:solidFill>
                       <a:prstDash val="solid"/>
                       <a:round/>
@@ -12808,7 +13863,9 @@
                   <a:tcPr anchor="ctr">
                     <a:lnL w="12700" cap="flat" cmpd="sng" algn="ctr">
                       <a:solidFill>
-                        <a:schemeClr val="tx1"/>
+                        <a:schemeClr val="bg1">
+                          <a:lumMod val="75000"/>
+                        </a:schemeClr>
                       </a:solidFill>
                       <a:prstDash val="solid"/>
                       <a:round/>
@@ -12817,7 +13874,9 @@
                     </a:lnL>
                     <a:lnR w="12700" cap="flat" cmpd="sng" algn="ctr">
                       <a:solidFill>
-                        <a:schemeClr val="tx1"/>
+                        <a:schemeClr val="bg1">
+                          <a:lumMod val="75000"/>
+                        </a:schemeClr>
                       </a:solidFill>
                       <a:prstDash val="solid"/>
                       <a:round/>
@@ -12826,7 +13885,9 @@
                     </a:lnR>
                     <a:lnT w="12700" cap="flat" cmpd="sng" algn="ctr">
                       <a:solidFill>
-                        <a:schemeClr val="tx1"/>
+                        <a:schemeClr val="bg1">
+                          <a:lumMod val="75000"/>
+                        </a:schemeClr>
                       </a:solidFill>
                       <a:prstDash val="solid"/>
                       <a:round/>
@@ -12835,7 +13896,9 @@
                     </a:lnT>
                     <a:lnB w="12700" cap="flat" cmpd="sng" algn="ctr">
                       <a:solidFill>
-                        <a:schemeClr val="tx1"/>
+                        <a:schemeClr val="bg1">
+                          <a:lumMod val="75000"/>
+                        </a:schemeClr>
                       </a:solidFill>
                       <a:prstDash val="solid"/>
                       <a:round/>
@@ -12864,7 +13927,9 @@
                   <a:tcPr anchor="ctr">
                     <a:lnL w="12700" cap="flat" cmpd="sng" algn="ctr">
                       <a:solidFill>
-                        <a:schemeClr val="tx1"/>
+                        <a:schemeClr val="bg1">
+                          <a:lumMod val="75000"/>
+                        </a:schemeClr>
                       </a:solidFill>
                       <a:prstDash val="solid"/>
                       <a:round/>
@@ -12873,7 +13938,9 @@
                     </a:lnL>
                     <a:lnR w="12700" cap="flat" cmpd="sng" algn="ctr">
                       <a:solidFill>
-                        <a:schemeClr val="tx1"/>
+                        <a:schemeClr val="bg1">
+                          <a:lumMod val="75000"/>
+                        </a:schemeClr>
                       </a:solidFill>
                       <a:prstDash val="solid"/>
                       <a:round/>
@@ -12882,7 +13949,9 @@
                     </a:lnR>
                     <a:lnT w="12700" cap="flat" cmpd="sng" algn="ctr">
                       <a:solidFill>
-                        <a:schemeClr val="tx1"/>
+                        <a:schemeClr val="bg1">
+                          <a:lumMod val="75000"/>
+                        </a:schemeClr>
                       </a:solidFill>
                       <a:prstDash val="solid"/>
                       <a:round/>
@@ -12891,7 +13960,9 @@
                     </a:lnT>
                     <a:lnB w="12700" cap="flat" cmpd="sng" algn="ctr">
                       <a:solidFill>
-                        <a:schemeClr val="tx1"/>
+                        <a:schemeClr val="bg1">
+                          <a:lumMod val="75000"/>
+                        </a:schemeClr>
                       </a:solidFill>
                       <a:prstDash val="solid"/>
                       <a:round/>
@@ -12920,7 +13991,9 @@
                   <a:tcPr anchor="ctr">
                     <a:lnL w="12700" cap="flat" cmpd="sng" algn="ctr">
                       <a:solidFill>
-                        <a:schemeClr val="tx1"/>
+                        <a:schemeClr val="bg1">
+                          <a:lumMod val="75000"/>
+                        </a:schemeClr>
                       </a:solidFill>
                       <a:prstDash val="solid"/>
                       <a:round/>
@@ -12929,7 +14002,9 @@
                     </a:lnL>
                     <a:lnR w="12700" cap="flat" cmpd="sng" algn="ctr">
                       <a:solidFill>
-                        <a:schemeClr val="tx1"/>
+                        <a:schemeClr val="bg1">
+                          <a:lumMod val="75000"/>
+                        </a:schemeClr>
                       </a:solidFill>
                       <a:prstDash val="solid"/>
                       <a:round/>
@@ -12938,7 +14013,9 @@
                     </a:lnR>
                     <a:lnT w="12700" cap="flat" cmpd="sng" algn="ctr">
                       <a:solidFill>
-                        <a:schemeClr val="tx1"/>
+                        <a:schemeClr val="bg1">
+                          <a:lumMod val="75000"/>
+                        </a:schemeClr>
                       </a:solidFill>
                       <a:prstDash val="solid"/>
                       <a:round/>
@@ -12947,7 +14024,9 @@
                     </a:lnT>
                     <a:lnB w="12700" cap="flat" cmpd="sng" algn="ctr">
                       <a:solidFill>
-                        <a:schemeClr val="tx1"/>
+                        <a:schemeClr val="bg1">
+                          <a:lumMod val="75000"/>
+                        </a:schemeClr>
                       </a:solidFill>
                       <a:prstDash val="solid"/>
                       <a:round/>
@@ -12968,7 +14047,9 @@
                   <a:tcPr anchor="ctr">
                     <a:lnL w="12700" cap="flat" cmpd="sng" algn="ctr">
                       <a:solidFill>
-                        <a:schemeClr val="tx1"/>
+                        <a:schemeClr val="bg1">
+                          <a:lumMod val="75000"/>
+                        </a:schemeClr>
                       </a:solidFill>
                       <a:prstDash val="solid"/>
                       <a:round/>
@@ -12977,7 +14058,9 @@
                     </a:lnL>
                     <a:lnR w="12700" cap="flat" cmpd="sng" algn="ctr">
                       <a:solidFill>
-                        <a:schemeClr val="tx1"/>
+                        <a:schemeClr val="bg1">
+                          <a:lumMod val="75000"/>
+                        </a:schemeClr>
                       </a:solidFill>
                       <a:prstDash val="solid"/>
                       <a:round/>
@@ -12986,7 +14069,9 @@
                     </a:lnR>
                     <a:lnT w="12700" cap="flat" cmpd="sng" algn="ctr">
                       <a:solidFill>
-                        <a:schemeClr val="tx1"/>
+                        <a:schemeClr val="bg1">
+                          <a:lumMod val="75000"/>
+                        </a:schemeClr>
                       </a:solidFill>
                       <a:prstDash val="solid"/>
                       <a:round/>
@@ -12995,7 +14080,9 @@
                     </a:lnT>
                     <a:lnB w="12700" cap="flat" cmpd="sng" algn="ctr">
                       <a:solidFill>
-                        <a:schemeClr val="tx1"/>
+                        <a:schemeClr val="bg1">
+                          <a:lumMod val="75000"/>
+                        </a:schemeClr>
                       </a:solidFill>
                       <a:prstDash val="solid"/>
                       <a:round/>
@@ -13023,7 +14110,9 @@
                   <a:tcPr anchor="ctr">
                     <a:lnL w="12700" cap="flat" cmpd="sng" algn="ctr">
                       <a:solidFill>
-                        <a:schemeClr val="tx1"/>
+                        <a:schemeClr val="bg1">
+                          <a:lumMod val="75000"/>
+                        </a:schemeClr>
                       </a:solidFill>
                       <a:prstDash val="solid"/>
                       <a:round/>
@@ -13032,7 +14121,9 @@
                     </a:lnL>
                     <a:lnR w="12700" cap="flat" cmpd="sng" algn="ctr">
                       <a:solidFill>
-                        <a:schemeClr val="tx1"/>
+                        <a:schemeClr val="bg1">
+                          <a:lumMod val="75000"/>
+                        </a:schemeClr>
                       </a:solidFill>
                       <a:prstDash val="solid"/>
                       <a:round/>
@@ -13041,7 +14132,9 @@
                     </a:lnR>
                     <a:lnT w="12700" cap="flat" cmpd="sng" algn="ctr">
                       <a:solidFill>
-                        <a:schemeClr val="tx1"/>
+                        <a:schemeClr val="bg1">
+                          <a:lumMod val="75000"/>
+                        </a:schemeClr>
                       </a:solidFill>
                       <a:prstDash val="solid"/>
                       <a:round/>
@@ -13050,7 +14143,9 @@
                     </a:lnT>
                     <a:lnB w="12700" cap="flat" cmpd="sng" algn="ctr">
                       <a:solidFill>
-                        <a:schemeClr val="tx1"/>
+                        <a:schemeClr val="bg1">
+                          <a:lumMod val="75000"/>
+                        </a:schemeClr>
                       </a:solidFill>
                       <a:prstDash val="solid"/>
                       <a:round/>
@@ -13078,7 +14173,9 @@
                   <a:tcPr anchor="ctr">
                     <a:lnL w="12700" cap="flat" cmpd="sng" algn="ctr">
                       <a:solidFill>
-                        <a:schemeClr val="tx1"/>
+                        <a:schemeClr val="bg1">
+                          <a:lumMod val="75000"/>
+                        </a:schemeClr>
                       </a:solidFill>
                       <a:prstDash val="solid"/>
                       <a:round/>
@@ -13087,7 +14184,9 @@
                     </a:lnL>
                     <a:lnR w="12700" cap="flat" cmpd="sng" algn="ctr">
                       <a:solidFill>
-                        <a:schemeClr val="tx1"/>
+                        <a:schemeClr val="bg1">
+                          <a:lumMod val="75000"/>
+                        </a:schemeClr>
                       </a:solidFill>
                       <a:prstDash val="solid"/>
                       <a:round/>
@@ -13096,7 +14195,9 @@
                     </a:lnR>
                     <a:lnT w="12700" cap="flat" cmpd="sng" algn="ctr">
                       <a:solidFill>
-                        <a:schemeClr val="tx1"/>
+                        <a:schemeClr val="bg1">
+                          <a:lumMod val="75000"/>
+                        </a:schemeClr>
                       </a:solidFill>
                       <a:prstDash val="solid"/>
                       <a:round/>
@@ -13105,7 +14206,9 @@
                     </a:lnT>
                     <a:lnB w="12700" cap="flat" cmpd="sng" algn="ctr">
                       <a:solidFill>
-                        <a:schemeClr val="tx1"/>
+                        <a:schemeClr val="bg1">
+                          <a:lumMod val="75000"/>
+                        </a:schemeClr>
                       </a:solidFill>
                       <a:prstDash val="solid"/>
                       <a:round/>
@@ -13134,7 +14237,9 @@
                   <a:tcPr anchor="ctr">
                     <a:lnL w="12700" cap="flat" cmpd="sng" algn="ctr">
                       <a:solidFill>
-                        <a:schemeClr val="tx1"/>
+                        <a:schemeClr val="bg1">
+                          <a:lumMod val="75000"/>
+                        </a:schemeClr>
                       </a:solidFill>
                       <a:prstDash val="solid"/>
                       <a:round/>
@@ -13143,7 +14248,9 @@
                     </a:lnL>
                     <a:lnR w="12700" cap="flat" cmpd="sng" algn="ctr">
                       <a:solidFill>
-                        <a:schemeClr val="tx1"/>
+                        <a:schemeClr val="bg1">
+                          <a:lumMod val="75000"/>
+                        </a:schemeClr>
                       </a:solidFill>
                       <a:prstDash val="solid"/>
                       <a:round/>
@@ -13152,7 +14259,9 @@
                     </a:lnR>
                     <a:lnT w="12700" cap="flat" cmpd="sng" algn="ctr">
                       <a:solidFill>
-                        <a:schemeClr val="tx1"/>
+                        <a:schemeClr val="bg1">
+                          <a:lumMod val="75000"/>
+                        </a:schemeClr>
                       </a:solidFill>
                       <a:prstDash val="solid"/>
                       <a:round/>
@@ -13161,7 +14270,9 @@
                     </a:lnT>
                     <a:lnB w="12700" cap="flat" cmpd="sng" algn="ctr">
                       <a:solidFill>
-                        <a:schemeClr val="tx1"/>
+                        <a:schemeClr val="bg1">
+                          <a:lumMod val="75000"/>
+                        </a:schemeClr>
                       </a:solidFill>
                       <a:prstDash val="solid"/>
                       <a:round/>
@@ -13190,7 +14301,9 @@
                   <a:tcPr anchor="ctr">
                     <a:lnL w="12700" cap="flat" cmpd="sng" algn="ctr">
                       <a:solidFill>
-                        <a:schemeClr val="tx1"/>
+                        <a:schemeClr val="bg1">
+                          <a:lumMod val="75000"/>
+                        </a:schemeClr>
                       </a:solidFill>
                       <a:prstDash val="solid"/>
                       <a:round/>
@@ -13199,7 +14312,9 @@
                     </a:lnL>
                     <a:lnR w="12700" cap="flat" cmpd="sng" algn="ctr">
                       <a:solidFill>
-                        <a:schemeClr val="tx1"/>
+                        <a:schemeClr val="bg1">
+                          <a:lumMod val="75000"/>
+                        </a:schemeClr>
                       </a:solidFill>
                       <a:prstDash val="solid"/>
                       <a:round/>
@@ -13208,7 +14323,9 @@
                     </a:lnR>
                     <a:lnT w="12700" cap="flat" cmpd="sng" algn="ctr">
                       <a:solidFill>
-                        <a:schemeClr val="tx1"/>
+                        <a:schemeClr val="bg1">
+                          <a:lumMod val="75000"/>
+                        </a:schemeClr>
                       </a:solidFill>
                       <a:prstDash val="solid"/>
                       <a:round/>
@@ -13217,7 +14334,9 @@
                     </a:lnT>
                     <a:lnB w="12700" cap="flat" cmpd="sng" algn="ctr">
                       <a:solidFill>
-                        <a:schemeClr val="tx1"/>
+                        <a:schemeClr val="bg1">
+                          <a:lumMod val="75000"/>
+                        </a:schemeClr>
                       </a:solidFill>
                       <a:prstDash val="solid"/>
                       <a:round/>
@@ -13238,7 +14357,9 @@
                   <a:tcPr anchor="ctr">
                     <a:lnL w="12700" cap="flat" cmpd="sng" algn="ctr">
                       <a:solidFill>
-                        <a:schemeClr val="tx1"/>
+                        <a:schemeClr val="bg1">
+                          <a:lumMod val="75000"/>
+                        </a:schemeClr>
                       </a:solidFill>
                       <a:prstDash val="solid"/>
                       <a:round/>
@@ -13247,7 +14368,9 @@
                     </a:lnL>
                     <a:lnR w="12700" cap="flat" cmpd="sng" algn="ctr">
                       <a:solidFill>
-                        <a:schemeClr val="tx1"/>
+                        <a:schemeClr val="bg1">
+                          <a:lumMod val="75000"/>
+                        </a:schemeClr>
                       </a:solidFill>
                       <a:prstDash val="solid"/>
                       <a:round/>
@@ -13256,7 +14379,9 @@
                     </a:lnR>
                     <a:lnT w="12700" cap="flat" cmpd="sng" algn="ctr">
                       <a:solidFill>
-                        <a:schemeClr val="tx1"/>
+                        <a:schemeClr val="bg1">
+                          <a:lumMod val="75000"/>
+                        </a:schemeClr>
                       </a:solidFill>
                       <a:prstDash val="solid"/>
                       <a:round/>
@@ -13265,7 +14390,9 @@
                     </a:lnT>
                     <a:lnB w="12700" cap="flat" cmpd="sng" algn="ctr">
                       <a:solidFill>
-                        <a:schemeClr val="tx1"/>
+                        <a:schemeClr val="bg1">
+                          <a:lumMod val="75000"/>
+                        </a:schemeClr>
                       </a:solidFill>
                       <a:prstDash val="solid"/>
                       <a:round/>
@@ -13293,7 +14420,9 @@
                   <a:tcPr anchor="ctr">
                     <a:lnL w="12700" cap="flat" cmpd="sng" algn="ctr">
                       <a:solidFill>
-                        <a:schemeClr val="tx1"/>
+                        <a:schemeClr val="bg1">
+                          <a:lumMod val="75000"/>
+                        </a:schemeClr>
                       </a:solidFill>
                       <a:prstDash val="solid"/>
                       <a:round/>
@@ -13302,7 +14431,9 @@
                     </a:lnL>
                     <a:lnR w="12700" cap="flat" cmpd="sng" algn="ctr">
                       <a:solidFill>
-                        <a:schemeClr val="tx1"/>
+                        <a:schemeClr val="bg1">
+                          <a:lumMod val="75000"/>
+                        </a:schemeClr>
                       </a:solidFill>
                       <a:prstDash val="solid"/>
                       <a:round/>
@@ -13311,7 +14442,9 @@
                     </a:lnR>
                     <a:lnT w="12700" cap="flat" cmpd="sng" algn="ctr">
                       <a:solidFill>
-                        <a:schemeClr val="tx1"/>
+                        <a:schemeClr val="bg1">
+                          <a:lumMod val="75000"/>
+                        </a:schemeClr>
                       </a:solidFill>
                       <a:prstDash val="solid"/>
                       <a:round/>
@@ -13320,7 +14453,9 @@
                     </a:lnT>
                     <a:lnB w="12700" cap="flat" cmpd="sng" algn="ctr">
                       <a:solidFill>
-                        <a:schemeClr val="tx1"/>
+                        <a:schemeClr val="bg1">
+                          <a:lumMod val="75000"/>
+                        </a:schemeClr>
                       </a:solidFill>
                       <a:prstDash val="solid"/>
                       <a:round/>
@@ -13348,7 +14483,9 @@
                   <a:tcPr anchor="ctr">
                     <a:lnL w="12700" cap="flat" cmpd="sng" algn="ctr">
                       <a:solidFill>
-                        <a:schemeClr val="tx1"/>
+                        <a:schemeClr val="bg1">
+                          <a:lumMod val="75000"/>
+                        </a:schemeClr>
                       </a:solidFill>
                       <a:prstDash val="solid"/>
                       <a:round/>
@@ -13357,7 +14494,9 @@
                     </a:lnL>
                     <a:lnR w="12700" cap="flat" cmpd="sng" algn="ctr">
                       <a:solidFill>
-                        <a:schemeClr val="tx1"/>
+                        <a:schemeClr val="bg1">
+                          <a:lumMod val="75000"/>
+                        </a:schemeClr>
                       </a:solidFill>
                       <a:prstDash val="solid"/>
                       <a:round/>
@@ -13366,7 +14505,9 @@
                     </a:lnR>
                     <a:lnT w="12700" cap="flat" cmpd="sng" algn="ctr">
                       <a:solidFill>
-                        <a:schemeClr val="tx1"/>
+                        <a:schemeClr val="bg1">
+                          <a:lumMod val="75000"/>
+                        </a:schemeClr>
                       </a:solidFill>
                       <a:prstDash val="solid"/>
                       <a:round/>
@@ -13375,7 +14516,9 @@
                     </a:lnT>
                     <a:lnB w="12700" cap="flat" cmpd="sng" algn="ctr">
                       <a:solidFill>
-                        <a:schemeClr val="tx1"/>
+                        <a:schemeClr val="bg1">
+                          <a:lumMod val="75000"/>
+                        </a:schemeClr>
                       </a:solidFill>
                       <a:prstDash val="solid"/>
                       <a:round/>
@@ -13404,7 +14547,9 @@
                   <a:tcPr anchor="ctr">
                     <a:lnL w="12700" cap="flat" cmpd="sng" algn="ctr">
                       <a:solidFill>
-                        <a:schemeClr val="tx1"/>
+                        <a:schemeClr val="bg1">
+                          <a:lumMod val="75000"/>
+                        </a:schemeClr>
                       </a:solidFill>
                       <a:prstDash val="solid"/>
                       <a:round/>
@@ -13413,7 +14558,9 @@
                     </a:lnL>
                     <a:lnR w="12700" cap="flat" cmpd="sng" algn="ctr">
                       <a:solidFill>
-                        <a:schemeClr val="tx1"/>
+                        <a:schemeClr val="bg1">
+                          <a:lumMod val="75000"/>
+                        </a:schemeClr>
                       </a:solidFill>
                       <a:prstDash val="solid"/>
                       <a:round/>
@@ -13422,7 +14569,9 @@
                     </a:lnR>
                     <a:lnT w="12700" cap="flat" cmpd="sng" algn="ctr">
                       <a:solidFill>
-                        <a:schemeClr val="tx1"/>
+                        <a:schemeClr val="bg1">
+                          <a:lumMod val="75000"/>
+                        </a:schemeClr>
                       </a:solidFill>
                       <a:prstDash val="solid"/>
                       <a:round/>
@@ -13431,7 +14580,9 @@
                     </a:lnT>
                     <a:lnB w="12700" cap="flat" cmpd="sng" algn="ctr">
                       <a:solidFill>
-                        <a:schemeClr val="tx1"/>
+                        <a:schemeClr val="bg1">
+                          <a:lumMod val="75000"/>
+                        </a:schemeClr>
                       </a:solidFill>
                       <a:prstDash val="solid"/>
                       <a:round/>
@@ -13448,9 +14599,11 @@
                     <a:p>
                       <a:pPr algn="ctr"/>
                       <a:r>
-                        <a:rPr sz="1600" b="0">
+                        <a:rPr sz="1600" b="1">
                           <a:solidFill>
-                            <a:schemeClr val="tx1"/>
+                            <a:schemeClr val="accent2">
+                              <a:lumMod val="75000"/>
+                            </a:schemeClr>
                           </a:solidFill>
                         </a:rPr>
                         <a:t>High</a:t>
@@ -13460,7 +14613,9 @@
                   <a:tcPr anchor="ctr">
                     <a:lnL w="12700" cap="flat" cmpd="sng" algn="ctr">
                       <a:solidFill>
-                        <a:schemeClr val="tx1"/>
+                        <a:schemeClr val="bg1">
+                          <a:lumMod val="75000"/>
+                        </a:schemeClr>
                       </a:solidFill>
                       <a:prstDash val="solid"/>
                       <a:round/>
@@ -13469,7 +14624,9 @@
                     </a:lnL>
                     <a:lnR w="12700" cap="flat" cmpd="sng" algn="ctr">
                       <a:solidFill>
-                        <a:schemeClr val="tx1"/>
+                        <a:schemeClr val="bg1">
+                          <a:lumMod val="75000"/>
+                        </a:schemeClr>
                       </a:solidFill>
                       <a:prstDash val="solid"/>
                       <a:round/>
@@ -13478,7 +14635,9 @@
                     </a:lnR>
                     <a:lnT w="12700" cap="flat" cmpd="sng" algn="ctr">
                       <a:solidFill>
-                        <a:schemeClr val="tx1"/>
+                        <a:schemeClr val="bg1">
+                          <a:lumMod val="75000"/>
+                        </a:schemeClr>
                       </a:solidFill>
                       <a:prstDash val="solid"/>
                       <a:round/>
@@ -13487,7 +14646,9 @@
                     </a:lnT>
                     <a:lnB w="12700" cap="flat" cmpd="sng" algn="ctr">
                       <a:solidFill>
-                        <a:schemeClr val="tx1"/>
+                        <a:schemeClr val="bg1">
+                          <a:lumMod val="75000"/>
+                        </a:schemeClr>
                       </a:solidFill>
                       <a:prstDash val="solid"/>
                       <a:round/>
@@ -13713,7 +14874,7 @@
                       <a:r>
                         <a:rPr sz="1600" b="1">
                           <a:solidFill>
-                            <a:schemeClr val="tx1"/>
+                            <a:schemeClr val="bg1"/>
                           </a:solidFill>
                         </a:rPr>
                         <a:t>Factor</a:t>
@@ -13723,7 +14884,9 @@
                   <a:tcPr anchor="ctr">
                     <a:lnL w="12700" cap="flat" cmpd="sng" algn="ctr">
                       <a:solidFill>
-                        <a:schemeClr val="tx1"/>
+                        <a:schemeClr val="bg1">
+                          <a:lumMod val="75000"/>
+                        </a:schemeClr>
                       </a:solidFill>
                       <a:prstDash val="solid"/>
                       <a:round/>
@@ -13732,7 +14895,9 @@
                     </a:lnL>
                     <a:lnR w="12700" cap="flat" cmpd="sng" algn="ctr">
                       <a:solidFill>
-                        <a:schemeClr val="tx1"/>
+                        <a:schemeClr val="bg1">
+                          <a:lumMod val="75000"/>
+                        </a:schemeClr>
                       </a:solidFill>
                       <a:prstDash val="solid"/>
                       <a:round/>
@@ -13741,7 +14906,9 @@
                     </a:lnR>
                     <a:lnT w="12700" cap="flat" cmpd="sng" algn="ctr">
                       <a:solidFill>
-                        <a:schemeClr val="tx1"/>
+                        <a:schemeClr val="bg1">
+                          <a:lumMod val="75000"/>
+                        </a:schemeClr>
                       </a:solidFill>
                       <a:prstDash val="solid"/>
                       <a:round/>
@@ -13750,7 +14917,9 @@
                     </a:lnT>
                     <a:lnB w="12700" cap="flat" cmpd="sng" algn="ctr">
                       <a:solidFill>
-                        <a:schemeClr val="tx1"/>
+                        <a:schemeClr val="bg1">
+                          <a:lumMod val="75000"/>
+                        </a:schemeClr>
                       </a:solidFill>
                       <a:prstDash val="solid"/>
                       <a:round/>
@@ -13758,8 +14927,8 @@
                       <a:tailEnd type="none" w="med" len="med"/>
                     </a:lnB>
                     <a:solidFill>
-                      <a:schemeClr val="bg1">
-                        <a:lumMod val="85000"/>
+                      <a:schemeClr val="accent1">
+                        <a:lumMod val="50000"/>
                       </a:schemeClr>
                     </a:solidFill>
                   </a:tcPr>
@@ -13772,7 +14941,7 @@
                       <a:r>
                         <a:rPr sz="1600" b="1">
                           <a:solidFill>
-                            <a:schemeClr val="tx1"/>
+                            <a:schemeClr val="bg1"/>
                           </a:solidFill>
                         </a:rPr>
                         <a:t>Issue</a:t>
@@ -13782,7 +14951,9 @@
                   <a:tcPr anchor="ctr">
                     <a:lnL w="12700" cap="flat" cmpd="sng" algn="ctr">
                       <a:solidFill>
-                        <a:schemeClr val="tx1"/>
+                        <a:schemeClr val="bg1">
+                          <a:lumMod val="75000"/>
+                        </a:schemeClr>
                       </a:solidFill>
                       <a:prstDash val="solid"/>
                       <a:round/>
@@ -13791,7 +14962,9 @@
                     </a:lnL>
                     <a:lnR w="12700" cap="flat" cmpd="sng" algn="ctr">
                       <a:solidFill>
-                        <a:schemeClr val="tx1"/>
+                        <a:schemeClr val="bg1">
+                          <a:lumMod val="75000"/>
+                        </a:schemeClr>
                       </a:solidFill>
                       <a:prstDash val="solid"/>
                       <a:round/>
@@ -13800,7 +14973,9 @@
                     </a:lnR>
                     <a:lnT w="12700" cap="flat" cmpd="sng" algn="ctr">
                       <a:solidFill>
-                        <a:schemeClr val="tx1"/>
+                        <a:schemeClr val="bg1">
+                          <a:lumMod val="75000"/>
+                        </a:schemeClr>
                       </a:solidFill>
                       <a:prstDash val="solid"/>
                       <a:round/>
@@ -13809,7 +14984,9 @@
                     </a:lnT>
                     <a:lnB w="12700" cap="flat" cmpd="sng" algn="ctr">
                       <a:solidFill>
-                        <a:schemeClr val="tx1"/>
+                        <a:schemeClr val="bg1">
+                          <a:lumMod val="75000"/>
+                        </a:schemeClr>
                       </a:solidFill>
                       <a:prstDash val="solid"/>
                       <a:round/>
@@ -13817,8 +14994,8 @@
                       <a:tailEnd type="none" w="med" len="med"/>
                     </a:lnB>
                     <a:solidFill>
-                      <a:schemeClr val="bg1">
-                        <a:lumMod val="85000"/>
+                      <a:schemeClr val="accent1">
+                        <a:lumMod val="50000"/>
                       </a:schemeClr>
                     </a:solidFill>
                   </a:tcPr>
@@ -13831,7 +15008,7 @@
                       <a:r>
                         <a:rPr sz="1600" b="1">
                           <a:solidFill>
-                            <a:schemeClr val="tx1"/>
+                            <a:schemeClr val="bg1"/>
                           </a:solidFill>
                         </a:rPr>
                         <a:t>Effect on PZ Nigeria</a:t>
@@ -13841,7 +15018,9 @@
                   <a:tcPr anchor="ctr">
                     <a:lnL w="12700" cap="flat" cmpd="sng" algn="ctr">
                       <a:solidFill>
-                        <a:schemeClr val="tx1"/>
+                        <a:schemeClr val="bg1">
+                          <a:lumMod val="75000"/>
+                        </a:schemeClr>
                       </a:solidFill>
                       <a:prstDash val="solid"/>
                       <a:round/>
@@ -13850,7 +15029,9 @@
                     </a:lnL>
                     <a:lnR w="12700" cap="flat" cmpd="sng" algn="ctr">
                       <a:solidFill>
-                        <a:schemeClr val="tx1"/>
+                        <a:schemeClr val="bg1">
+                          <a:lumMod val="75000"/>
+                        </a:schemeClr>
                       </a:solidFill>
                       <a:prstDash val="solid"/>
                       <a:round/>
@@ -13859,7 +15040,9 @@
                     </a:lnR>
                     <a:lnT w="12700" cap="flat" cmpd="sng" algn="ctr">
                       <a:solidFill>
-                        <a:schemeClr val="tx1"/>
+                        <a:schemeClr val="bg1">
+                          <a:lumMod val="75000"/>
+                        </a:schemeClr>
                       </a:solidFill>
                       <a:prstDash val="solid"/>
                       <a:round/>
@@ -13868,7 +15051,9 @@
                     </a:lnT>
                     <a:lnB w="12700" cap="flat" cmpd="sng" algn="ctr">
                       <a:solidFill>
-                        <a:schemeClr val="tx1"/>
+                        <a:schemeClr val="bg1">
+                          <a:lumMod val="75000"/>
+                        </a:schemeClr>
                       </a:solidFill>
                       <a:prstDash val="solid"/>
                       <a:round/>
@@ -13876,8 +15061,8 @@
                       <a:tailEnd type="none" w="med" len="med"/>
                     </a:lnB>
                     <a:solidFill>
-                      <a:schemeClr val="bg1">
-                        <a:lumMod val="85000"/>
+                      <a:schemeClr val="accent1">
+                        <a:lumMod val="50000"/>
                       </a:schemeClr>
                     </a:solidFill>
                   </a:tcPr>
@@ -13891,7 +15076,7 @@
                       <a:r>
                         <a:rPr sz="1600" b="1">
                           <a:solidFill>
-                            <a:schemeClr val="tx1"/>
+                            <a:schemeClr val="bg1"/>
                           </a:solidFill>
                         </a:rPr>
                         <a:t>Score (of 25)</a:t>
@@ -13901,7 +15086,9 @@
                   <a:tcPr anchor="ctr">
                     <a:lnL w="12700" cap="flat" cmpd="sng" algn="ctr">
                       <a:solidFill>
-                        <a:schemeClr val="tx1"/>
+                        <a:schemeClr val="bg1">
+                          <a:lumMod val="75000"/>
+                        </a:schemeClr>
                       </a:solidFill>
                       <a:prstDash val="solid"/>
                       <a:round/>
@@ -13910,7 +15097,9 @@
                     </a:lnL>
                     <a:lnR w="12700" cap="flat" cmpd="sng" algn="ctr">
                       <a:solidFill>
-                        <a:schemeClr val="tx1"/>
+                        <a:schemeClr val="bg1">
+                          <a:lumMod val="75000"/>
+                        </a:schemeClr>
                       </a:solidFill>
                       <a:prstDash val="solid"/>
                       <a:round/>
@@ -13919,7 +15108,9 @@
                     </a:lnR>
                     <a:lnT w="12700" cap="flat" cmpd="sng" algn="ctr">
                       <a:solidFill>
-                        <a:schemeClr val="tx1"/>
+                        <a:schemeClr val="bg1">
+                          <a:lumMod val="75000"/>
+                        </a:schemeClr>
                       </a:solidFill>
                       <a:prstDash val="solid"/>
                       <a:round/>
@@ -13928,7 +15119,9 @@
                     </a:lnT>
                     <a:lnB w="12700" cap="flat" cmpd="sng" algn="ctr">
                       <a:solidFill>
-                        <a:schemeClr val="tx1"/>
+                        <a:schemeClr val="bg1">
+                          <a:lumMod val="75000"/>
+                        </a:schemeClr>
                       </a:solidFill>
                       <a:prstDash val="solid"/>
                       <a:round/>
@@ -13936,8 +15129,8 @@
                       <a:tailEnd type="none" w="med" len="med"/>
                     </a:lnB>
                     <a:solidFill>
-                      <a:schemeClr val="bg1">
-                        <a:lumMod val="85000"/>
+                      <a:schemeClr val="accent1">
+                        <a:lumMod val="50000"/>
                       </a:schemeClr>
                     </a:solidFill>
                   </a:tcPr>
@@ -13951,7 +15144,7 @@
                       <a:r>
                         <a:rPr sz="1600" b="1">
                           <a:solidFill>
-                            <a:schemeClr val="tx1"/>
+                            <a:schemeClr val="bg1"/>
                           </a:solidFill>
                         </a:rPr>
                         <a:t>Priority</a:t>
@@ -13961,7 +15154,9 @@
                   <a:tcPr anchor="ctr">
                     <a:lnL w="12700" cap="flat" cmpd="sng" algn="ctr">
                       <a:solidFill>
-                        <a:schemeClr val="tx1"/>
+                        <a:schemeClr val="bg1">
+                          <a:lumMod val="75000"/>
+                        </a:schemeClr>
                       </a:solidFill>
                       <a:prstDash val="solid"/>
                       <a:round/>
@@ -13970,7 +15165,9 @@
                     </a:lnL>
                     <a:lnR w="12700" cap="flat" cmpd="sng" algn="ctr">
                       <a:solidFill>
-                        <a:schemeClr val="tx1"/>
+                        <a:schemeClr val="bg1">
+                          <a:lumMod val="75000"/>
+                        </a:schemeClr>
                       </a:solidFill>
                       <a:prstDash val="solid"/>
                       <a:round/>
@@ -13979,7 +15176,9 @@
                     </a:lnR>
                     <a:lnT w="12700" cap="flat" cmpd="sng" algn="ctr">
                       <a:solidFill>
-                        <a:schemeClr val="tx1"/>
+                        <a:schemeClr val="bg1">
+                          <a:lumMod val="75000"/>
+                        </a:schemeClr>
                       </a:solidFill>
                       <a:prstDash val="solid"/>
                       <a:round/>
@@ -13988,7 +15187,9 @@
                     </a:lnT>
                     <a:lnB w="12700" cap="flat" cmpd="sng" algn="ctr">
                       <a:solidFill>
-                        <a:schemeClr val="tx1"/>
+                        <a:schemeClr val="bg1">
+                          <a:lumMod val="75000"/>
+                        </a:schemeClr>
                       </a:solidFill>
                       <a:prstDash val="solid"/>
                       <a:round/>
@@ -13996,8 +15197,8 @@
                       <a:tailEnd type="none" w="med" len="med"/>
                     </a:lnB>
                     <a:solidFill>
-                      <a:schemeClr val="bg1">
-                        <a:lumMod val="85000"/>
+                      <a:schemeClr val="accent1">
+                        <a:lumMod val="50000"/>
                       </a:schemeClr>
                     </a:solidFill>
                   </a:tcPr>
@@ -14012,7 +15213,9 @@
                       <a:r>
                         <a:rPr sz="1600" b="1">
                           <a:solidFill>
-                            <a:schemeClr val="tx1"/>
+                            <a:schemeClr val="accent1">
+                              <a:lumMod val="50000"/>
+                            </a:schemeClr>
                           </a:solidFill>
                         </a:rPr>
                         <a:t>Legal</a:t>
@@ -14020,7 +15223,7 @@
                     </a:p>
                     <a:p>
                       <a:r>
-                        <a:rPr sz="1400" b="0">
+                        <a:rPr sz="1400">
                           <a:solidFill>
                             <a:schemeClr val="tx1"/>
                           </a:solidFill>
@@ -14032,7 +15235,9 @@
                   <a:tcPr anchor="ctr">
                     <a:lnL w="12700" cap="flat" cmpd="sng" algn="ctr">
                       <a:solidFill>
-                        <a:schemeClr val="tx1"/>
+                        <a:schemeClr val="bg1">
+                          <a:lumMod val="75000"/>
+                        </a:schemeClr>
                       </a:solidFill>
                       <a:prstDash val="solid"/>
                       <a:round/>
@@ -14041,7 +15246,9 @@
                     </a:lnL>
                     <a:lnR w="12700" cap="flat" cmpd="sng" algn="ctr">
                       <a:solidFill>
-                        <a:schemeClr val="tx1"/>
+                        <a:schemeClr val="bg1">
+                          <a:lumMod val="75000"/>
+                        </a:schemeClr>
                       </a:solidFill>
                       <a:prstDash val="solid"/>
                       <a:round/>
@@ -14050,7 +15257,9 @@
                     </a:lnR>
                     <a:lnT w="12700" cap="flat" cmpd="sng" algn="ctr">
                       <a:solidFill>
-                        <a:schemeClr val="tx1"/>
+                        <a:schemeClr val="bg1">
+                          <a:lumMod val="75000"/>
+                        </a:schemeClr>
                       </a:solidFill>
                       <a:prstDash val="solid"/>
                       <a:round/>
@@ -14059,7 +15268,9 @@
                     </a:lnT>
                     <a:lnB w="12700" cap="flat" cmpd="sng" algn="ctr">
                       <a:solidFill>
-                        <a:schemeClr val="tx1"/>
+                        <a:schemeClr val="bg1">
+                          <a:lumMod val="75000"/>
+                        </a:schemeClr>
                       </a:solidFill>
                       <a:prstDash val="solid"/>
                       <a:round/>
@@ -14087,7 +15298,9 @@
                   <a:tcPr anchor="ctr">
                     <a:lnL w="12700" cap="flat" cmpd="sng" algn="ctr">
                       <a:solidFill>
-                        <a:schemeClr val="tx1"/>
+                        <a:schemeClr val="bg1">
+                          <a:lumMod val="75000"/>
+                        </a:schemeClr>
                       </a:solidFill>
                       <a:prstDash val="solid"/>
                       <a:round/>
@@ -14096,7 +15309,9 @@
                     </a:lnL>
                     <a:lnR w="12700" cap="flat" cmpd="sng" algn="ctr">
                       <a:solidFill>
-                        <a:schemeClr val="tx1"/>
+                        <a:schemeClr val="bg1">
+                          <a:lumMod val="75000"/>
+                        </a:schemeClr>
                       </a:solidFill>
                       <a:prstDash val="solid"/>
                       <a:round/>
@@ -14105,7 +15320,9 @@
                     </a:lnR>
                     <a:lnT w="12700" cap="flat" cmpd="sng" algn="ctr">
                       <a:solidFill>
-                        <a:schemeClr val="tx1"/>
+                        <a:schemeClr val="bg1">
+                          <a:lumMod val="75000"/>
+                        </a:schemeClr>
                       </a:solidFill>
                       <a:prstDash val="solid"/>
                       <a:round/>
@@ -14114,7 +15331,9 @@
                     </a:lnT>
                     <a:lnB w="12700" cap="flat" cmpd="sng" algn="ctr">
                       <a:solidFill>
-                        <a:schemeClr val="tx1"/>
+                        <a:schemeClr val="bg1">
+                          <a:lumMod val="75000"/>
+                        </a:schemeClr>
                       </a:solidFill>
                       <a:prstDash val="solid"/>
                       <a:round/>
@@ -14142,7 +15361,9 @@
                   <a:tcPr anchor="ctr">
                     <a:lnL w="12700" cap="flat" cmpd="sng" algn="ctr">
                       <a:solidFill>
-                        <a:schemeClr val="tx1"/>
+                        <a:schemeClr val="bg1">
+                          <a:lumMod val="75000"/>
+                        </a:schemeClr>
                       </a:solidFill>
                       <a:prstDash val="solid"/>
                       <a:round/>
@@ -14151,7 +15372,9 @@
                     </a:lnL>
                     <a:lnR w="12700" cap="flat" cmpd="sng" algn="ctr">
                       <a:solidFill>
-                        <a:schemeClr val="tx1"/>
+                        <a:schemeClr val="bg1">
+                          <a:lumMod val="75000"/>
+                        </a:schemeClr>
                       </a:solidFill>
                       <a:prstDash val="solid"/>
                       <a:round/>
@@ -14160,7 +15383,9 @@
                     </a:lnR>
                     <a:lnT w="12700" cap="flat" cmpd="sng" algn="ctr">
                       <a:solidFill>
-                        <a:schemeClr val="tx1"/>
+                        <a:schemeClr val="bg1">
+                          <a:lumMod val="75000"/>
+                        </a:schemeClr>
                       </a:solidFill>
                       <a:prstDash val="solid"/>
                       <a:round/>
@@ -14169,7 +15394,9 @@
                     </a:lnT>
                     <a:lnB w="12700" cap="flat" cmpd="sng" algn="ctr">
                       <a:solidFill>
-                        <a:schemeClr val="tx1"/>
+                        <a:schemeClr val="bg1">
+                          <a:lumMod val="75000"/>
+                        </a:schemeClr>
                       </a:solidFill>
                       <a:prstDash val="solid"/>
                       <a:round/>
@@ -14198,7 +15425,9 @@
                   <a:tcPr anchor="ctr">
                     <a:lnL w="12700" cap="flat" cmpd="sng" algn="ctr">
                       <a:solidFill>
-                        <a:schemeClr val="tx1"/>
+                        <a:schemeClr val="bg1">
+                          <a:lumMod val="75000"/>
+                        </a:schemeClr>
                       </a:solidFill>
                       <a:prstDash val="solid"/>
                       <a:round/>
@@ -14207,7 +15436,9 @@
                     </a:lnL>
                     <a:lnR w="12700" cap="flat" cmpd="sng" algn="ctr">
                       <a:solidFill>
-                        <a:schemeClr val="tx1"/>
+                        <a:schemeClr val="bg1">
+                          <a:lumMod val="75000"/>
+                        </a:schemeClr>
                       </a:solidFill>
                       <a:prstDash val="solid"/>
                       <a:round/>
@@ -14216,7 +15447,9 @@
                     </a:lnR>
                     <a:lnT w="12700" cap="flat" cmpd="sng" algn="ctr">
                       <a:solidFill>
-                        <a:schemeClr val="tx1"/>
+                        <a:schemeClr val="bg1">
+                          <a:lumMod val="75000"/>
+                        </a:schemeClr>
                       </a:solidFill>
                       <a:prstDash val="solid"/>
                       <a:round/>
@@ -14225,7 +15458,9 @@
                     </a:lnT>
                     <a:lnB w="12700" cap="flat" cmpd="sng" algn="ctr">
                       <a:solidFill>
-                        <a:schemeClr val="tx1"/>
+                        <a:schemeClr val="bg1">
+                          <a:lumMod val="75000"/>
+                        </a:schemeClr>
                       </a:solidFill>
                       <a:prstDash val="solid"/>
                       <a:round/>
@@ -14254,7 +15489,9 @@
                   <a:tcPr anchor="ctr">
                     <a:lnL w="12700" cap="flat" cmpd="sng" algn="ctr">
                       <a:solidFill>
-                        <a:schemeClr val="tx1"/>
+                        <a:schemeClr val="bg1">
+                          <a:lumMod val="75000"/>
+                        </a:schemeClr>
                       </a:solidFill>
                       <a:prstDash val="solid"/>
                       <a:round/>
@@ -14263,7 +15500,9 @@
                     </a:lnL>
                     <a:lnR w="12700" cap="flat" cmpd="sng" algn="ctr">
                       <a:solidFill>
-                        <a:schemeClr val="tx1"/>
+                        <a:schemeClr val="bg1">
+                          <a:lumMod val="75000"/>
+                        </a:schemeClr>
                       </a:solidFill>
                       <a:prstDash val="solid"/>
                       <a:round/>
@@ -14272,7 +15511,9 @@
                     </a:lnR>
                     <a:lnT w="12700" cap="flat" cmpd="sng" algn="ctr">
                       <a:solidFill>
-                        <a:schemeClr val="tx1"/>
+                        <a:schemeClr val="bg1">
+                          <a:lumMod val="75000"/>
+                        </a:schemeClr>
                       </a:solidFill>
                       <a:prstDash val="solid"/>
                       <a:round/>
@@ -14281,7 +15522,9 @@
                     </a:lnT>
                     <a:lnB w="12700" cap="flat" cmpd="sng" algn="ctr">
                       <a:solidFill>
-                        <a:schemeClr val="tx1"/>
+                        <a:schemeClr val="bg1">
+                          <a:lumMod val="75000"/>
+                        </a:schemeClr>
                       </a:solidFill>
                       <a:prstDash val="solid"/>
                       <a:round/>
@@ -14302,7 +15545,9 @@
                   <a:tcPr anchor="ctr">
                     <a:lnL w="12700" cap="flat" cmpd="sng" algn="ctr">
                       <a:solidFill>
-                        <a:schemeClr val="tx1"/>
+                        <a:schemeClr val="bg1">
+                          <a:lumMod val="75000"/>
+                        </a:schemeClr>
                       </a:solidFill>
                       <a:prstDash val="solid"/>
                       <a:round/>
@@ -14311,7 +15556,9 @@
                     </a:lnL>
                     <a:lnR w="12700" cap="flat" cmpd="sng" algn="ctr">
                       <a:solidFill>
-                        <a:schemeClr val="tx1"/>
+                        <a:schemeClr val="bg1">
+                          <a:lumMod val="75000"/>
+                        </a:schemeClr>
                       </a:solidFill>
                       <a:prstDash val="solid"/>
                       <a:round/>
@@ -14320,7 +15567,9 @@
                     </a:lnR>
                     <a:lnT w="12700" cap="flat" cmpd="sng" algn="ctr">
                       <a:solidFill>
-                        <a:schemeClr val="tx1"/>
+                        <a:schemeClr val="bg1">
+                          <a:lumMod val="75000"/>
+                        </a:schemeClr>
                       </a:solidFill>
                       <a:prstDash val="solid"/>
                       <a:round/>
@@ -14329,7 +15578,9 @@
                     </a:lnT>
                     <a:lnB w="12700" cap="flat" cmpd="sng" algn="ctr">
                       <a:solidFill>
-                        <a:schemeClr val="tx1"/>
+                        <a:schemeClr val="bg1">
+                          <a:lumMod val="75000"/>
+                        </a:schemeClr>
                       </a:solidFill>
                       <a:prstDash val="solid"/>
                       <a:round/>
@@ -14357,7 +15608,9 @@
                   <a:tcPr anchor="ctr">
                     <a:lnL w="12700" cap="flat" cmpd="sng" algn="ctr">
                       <a:solidFill>
-                        <a:schemeClr val="tx1"/>
+                        <a:schemeClr val="bg1">
+                          <a:lumMod val="75000"/>
+                        </a:schemeClr>
                       </a:solidFill>
                       <a:prstDash val="solid"/>
                       <a:round/>
@@ -14366,7 +15619,9 @@
                     </a:lnL>
                     <a:lnR w="12700" cap="flat" cmpd="sng" algn="ctr">
                       <a:solidFill>
-                        <a:schemeClr val="tx1"/>
+                        <a:schemeClr val="bg1">
+                          <a:lumMod val="75000"/>
+                        </a:schemeClr>
                       </a:solidFill>
                       <a:prstDash val="solid"/>
                       <a:round/>
@@ -14375,7 +15630,9 @@
                     </a:lnR>
                     <a:lnT w="12700" cap="flat" cmpd="sng" algn="ctr">
                       <a:solidFill>
-                        <a:schemeClr val="tx1"/>
+                        <a:schemeClr val="bg1">
+                          <a:lumMod val="75000"/>
+                        </a:schemeClr>
                       </a:solidFill>
                       <a:prstDash val="solid"/>
                       <a:round/>
@@ -14384,7 +15641,9 @@
                     </a:lnT>
                     <a:lnB w="12700" cap="flat" cmpd="sng" algn="ctr">
                       <a:solidFill>
-                        <a:schemeClr val="tx1"/>
+                        <a:schemeClr val="bg1">
+                          <a:lumMod val="75000"/>
+                        </a:schemeClr>
                       </a:solidFill>
                       <a:prstDash val="solid"/>
                       <a:round/>
@@ -14412,7 +15671,9 @@
                   <a:tcPr anchor="ctr">
                     <a:lnL w="12700" cap="flat" cmpd="sng" algn="ctr">
                       <a:solidFill>
-                        <a:schemeClr val="tx1"/>
+                        <a:schemeClr val="bg1">
+                          <a:lumMod val="75000"/>
+                        </a:schemeClr>
                       </a:solidFill>
                       <a:prstDash val="solid"/>
                       <a:round/>
@@ -14421,7 +15682,9 @@
                     </a:lnL>
                     <a:lnR w="12700" cap="flat" cmpd="sng" algn="ctr">
                       <a:solidFill>
-                        <a:schemeClr val="tx1"/>
+                        <a:schemeClr val="bg1">
+                          <a:lumMod val="75000"/>
+                        </a:schemeClr>
                       </a:solidFill>
                       <a:prstDash val="solid"/>
                       <a:round/>
@@ -14430,7 +15693,9 @@
                     </a:lnR>
                     <a:lnT w="12700" cap="flat" cmpd="sng" algn="ctr">
                       <a:solidFill>
-                        <a:schemeClr val="tx1"/>
+                        <a:schemeClr val="bg1">
+                          <a:lumMod val="75000"/>
+                        </a:schemeClr>
                       </a:solidFill>
                       <a:prstDash val="solid"/>
                       <a:round/>
@@ -14439,7 +15704,9 @@
                     </a:lnT>
                     <a:lnB w="12700" cap="flat" cmpd="sng" algn="ctr">
                       <a:solidFill>
-                        <a:schemeClr val="tx1"/>
+                        <a:schemeClr val="bg1">
+                          <a:lumMod val="75000"/>
+                        </a:schemeClr>
                       </a:solidFill>
                       <a:prstDash val="solid"/>
                       <a:round/>
@@ -14468,7 +15735,9 @@
                   <a:tcPr anchor="ctr">
                     <a:lnL w="12700" cap="flat" cmpd="sng" algn="ctr">
                       <a:solidFill>
-                        <a:schemeClr val="tx1"/>
+                        <a:schemeClr val="bg1">
+                          <a:lumMod val="75000"/>
+                        </a:schemeClr>
                       </a:solidFill>
                       <a:prstDash val="solid"/>
                       <a:round/>
@@ -14477,7 +15746,9 @@
                     </a:lnL>
                     <a:lnR w="12700" cap="flat" cmpd="sng" algn="ctr">
                       <a:solidFill>
-                        <a:schemeClr val="tx1"/>
+                        <a:schemeClr val="bg1">
+                          <a:lumMod val="75000"/>
+                        </a:schemeClr>
                       </a:solidFill>
                       <a:prstDash val="solid"/>
                       <a:round/>
@@ -14486,7 +15757,9 @@
                     </a:lnR>
                     <a:lnT w="12700" cap="flat" cmpd="sng" algn="ctr">
                       <a:solidFill>
-                        <a:schemeClr val="tx1"/>
+                        <a:schemeClr val="bg1">
+                          <a:lumMod val="75000"/>
+                        </a:schemeClr>
                       </a:solidFill>
                       <a:prstDash val="solid"/>
                       <a:round/>
@@ -14495,7 +15768,9 @@
                     </a:lnT>
                     <a:lnB w="12700" cap="flat" cmpd="sng" algn="ctr">
                       <a:solidFill>
-                        <a:schemeClr val="tx1"/>
+                        <a:schemeClr val="bg1">
+                          <a:lumMod val="75000"/>
+                        </a:schemeClr>
                       </a:solidFill>
                       <a:prstDash val="solid"/>
                       <a:round/>
@@ -14524,7 +15799,9 @@
                   <a:tcPr anchor="ctr">
                     <a:lnL w="12700" cap="flat" cmpd="sng" algn="ctr">
                       <a:solidFill>
-                        <a:schemeClr val="tx1"/>
+                        <a:schemeClr val="bg1">
+                          <a:lumMod val="75000"/>
+                        </a:schemeClr>
                       </a:solidFill>
                       <a:prstDash val="solid"/>
                       <a:round/>
@@ -14533,7 +15810,9 @@
                     </a:lnL>
                     <a:lnR w="12700" cap="flat" cmpd="sng" algn="ctr">
                       <a:solidFill>
-                        <a:schemeClr val="tx1"/>
+                        <a:schemeClr val="bg1">
+                          <a:lumMod val="75000"/>
+                        </a:schemeClr>
                       </a:solidFill>
                       <a:prstDash val="solid"/>
                       <a:round/>
@@ -14542,7 +15821,9 @@
                     </a:lnR>
                     <a:lnT w="12700" cap="flat" cmpd="sng" algn="ctr">
                       <a:solidFill>
-                        <a:schemeClr val="tx1"/>
+                        <a:schemeClr val="bg1">
+                          <a:lumMod val="75000"/>
+                        </a:schemeClr>
                       </a:solidFill>
                       <a:prstDash val="solid"/>
                       <a:round/>
@@ -14551,7 +15832,9 @@
                     </a:lnT>
                     <a:lnB w="12700" cap="flat" cmpd="sng" algn="ctr">
                       <a:solidFill>
-                        <a:schemeClr val="tx1"/>
+                        <a:schemeClr val="bg1">
+                          <a:lumMod val="75000"/>
+                        </a:schemeClr>
                       </a:solidFill>
                       <a:prstDash val="solid"/>
                       <a:round/>
@@ -14572,7 +15855,9 @@
                   <a:tcPr anchor="ctr">
                     <a:lnL w="12700" cap="flat" cmpd="sng" algn="ctr">
                       <a:solidFill>
-                        <a:schemeClr val="tx1"/>
+                        <a:schemeClr val="bg1">
+                          <a:lumMod val="75000"/>
+                        </a:schemeClr>
                       </a:solidFill>
                       <a:prstDash val="solid"/>
                       <a:round/>
@@ -14581,7 +15866,9 @@
                     </a:lnL>
                     <a:lnR w="12700" cap="flat" cmpd="sng" algn="ctr">
                       <a:solidFill>
-                        <a:schemeClr val="tx1"/>
+                        <a:schemeClr val="bg1">
+                          <a:lumMod val="75000"/>
+                        </a:schemeClr>
                       </a:solidFill>
                       <a:prstDash val="solid"/>
                       <a:round/>
@@ -14590,7 +15877,9 @@
                     </a:lnR>
                     <a:lnT w="12700" cap="flat" cmpd="sng" algn="ctr">
                       <a:solidFill>
-                        <a:schemeClr val="tx1"/>
+                        <a:schemeClr val="bg1">
+                          <a:lumMod val="75000"/>
+                        </a:schemeClr>
                       </a:solidFill>
                       <a:prstDash val="solid"/>
                       <a:round/>
@@ -14599,7 +15888,9 @@
                     </a:lnT>
                     <a:lnB w="12700" cap="flat" cmpd="sng" algn="ctr">
                       <a:solidFill>
-                        <a:schemeClr val="tx1"/>
+                        <a:schemeClr val="bg1">
+                          <a:lumMod val="75000"/>
+                        </a:schemeClr>
                       </a:solidFill>
                       <a:prstDash val="solid"/>
                       <a:round/>
@@ -14627,7 +15918,9 @@
                   <a:tcPr anchor="ctr">
                     <a:lnL w="12700" cap="flat" cmpd="sng" algn="ctr">
                       <a:solidFill>
-                        <a:schemeClr val="tx1"/>
+                        <a:schemeClr val="bg1">
+                          <a:lumMod val="75000"/>
+                        </a:schemeClr>
                       </a:solidFill>
                       <a:prstDash val="solid"/>
                       <a:round/>
@@ -14636,7 +15929,9 @@
                     </a:lnL>
                     <a:lnR w="12700" cap="flat" cmpd="sng" algn="ctr">
                       <a:solidFill>
-                        <a:schemeClr val="tx1"/>
+                        <a:schemeClr val="bg1">
+                          <a:lumMod val="75000"/>
+                        </a:schemeClr>
                       </a:solidFill>
                       <a:prstDash val="solid"/>
                       <a:round/>
@@ -14645,7 +15940,9 @@
                     </a:lnR>
                     <a:lnT w="12700" cap="flat" cmpd="sng" algn="ctr">
                       <a:solidFill>
-                        <a:schemeClr val="tx1"/>
+                        <a:schemeClr val="bg1">
+                          <a:lumMod val="75000"/>
+                        </a:schemeClr>
                       </a:solidFill>
                       <a:prstDash val="solid"/>
                       <a:round/>
@@ -14654,7 +15951,9 @@
                     </a:lnT>
                     <a:lnB w="12700" cap="flat" cmpd="sng" algn="ctr">
                       <a:solidFill>
-                        <a:schemeClr val="tx1"/>
+                        <a:schemeClr val="bg1">
+                          <a:lumMod val="75000"/>
+                        </a:schemeClr>
                       </a:solidFill>
                       <a:prstDash val="solid"/>
                       <a:round/>
@@ -14682,7 +15981,9 @@
                   <a:tcPr anchor="ctr">
                     <a:lnL w="12700" cap="flat" cmpd="sng" algn="ctr">
                       <a:solidFill>
-                        <a:schemeClr val="tx1"/>
+                        <a:schemeClr val="bg1">
+                          <a:lumMod val="75000"/>
+                        </a:schemeClr>
                       </a:solidFill>
                       <a:prstDash val="solid"/>
                       <a:round/>
@@ -14691,7 +15992,9 @@
                     </a:lnL>
                     <a:lnR w="12700" cap="flat" cmpd="sng" algn="ctr">
                       <a:solidFill>
-                        <a:schemeClr val="tx1"/>
+                        <a:schemeClr val="bg1">
+                          <a:lumMod val="75000"/>
+                        </a:schemeClr>
                       </a:solidFill>
                       <a:prstDash val="solid"/>
                       <a:round/>
@@ -14700,7 +16003,9 @@
                     </a:lnR>
                     <a:lnT w="12700" cap="flat" cmpd="sng" algn="ctr">
                       <a:solidFill>
-                        <a:schemeClr val="tx1"/>
+                        <a:schemeClr val="bg1">
+                          <a:lumMod val="75000"/>
+                        </a:schemeClr>
                       </a:solidFill>
                       <a:prstDash val="solid"/>
                       <a:round/>
@@ -14709,7 +16014,9 @@
                     </a:lnT>
                     <a:lnB w="12700" cap="flat" cmpd="sng" algn="ctr">
                       <a:solidFill>
-                        <a:schemeClr val="tx1"/>
+                        <a:schemeClr val="bg1">
+                          <a:lumMod val="75000"/>
+                        </a:schemeClr>
                       </a:solidFill>
                       <a:prstDash val="solid"/>
                       <a:round/>
@@ -14738,7 +16045,9 @@
                   <a:tcPr anchor="ctr">
                     <a:lnL w="12700" cap="flat" cmpd="sng" algn="ctr">
                       <a:solidFill>
-                        <a:schemeClr val="tx1"/>
+                        <a:schemeClr val="bg1">
+                          <a:lumMod val="75000"/>
+                        </a:schemeClr>
                       </a:solidFill>
                       <a:prstDash val="solid"/>
                       <a:round/>
@@ -14747,7 +16056,9 @@
                     </a:lnL>
                     <a:lnR w="12700" cap="flat" cmpd="sng" algn="ctr">
                       <a:solidFill>
-                        <a:schemeClr val="tx1"/>
+                        <a:schemeClr val="bg1">
+                          <a:lumMod val="75000"/>
+                        </a:schemeClr>
                       </a:solidFill>
                       <a:prstDash val="solid"/>
                       <a:round/>
@@ -14756,7 +16067,9 @@
                     </a:lnR>
                     <a:lnT w="12700" cap="flat" cmpd="sng" algn="ctr">
                       <a:solidFill>
-                        <a:schemeClr val="tx1"/>
+                        <a:schemeClr val="bg1">
+                          <a:lumMod val="75000"/>
+                        </a:schemeClr>
                       </a:solidFill>
                       <a:prstDash val="solid"/>
                       <a:round/>
@@ -14765,7 +16078,9 @@
                     </a:lnT>
                     <a:lnB w="12700" cap="flat" cmpd="sng" algn="ctr">
                       <a:solidFill>
-                        <a:schemeClr val="tx1"/>
+                        <a:schemeClr val="bg1">
+                          <a:lumMod val="75000"/>
+                        </a:schemeClr>
                       </a:solidFill>
                       <a:prstDash val="solid"/>
                       <a:round/>
@@ -14794,7 +16109,9 @@
                   <a:tcPr anchor="ctr">
                     <a:lnL w="12700" cap="flat" cmpd="sng" algn="ctr">
                       <a:solidFill>
-                        <a:schemeClr val="tx1"/>
+                        <a:schemeClr val="bg1">
+                          <a:lumMod val="75000"/>
+                        </a:schemeClr>
                       </a:solidFill>
                       <a:prstDash val="solid"/>
                       <a:round/>
@@ -14803,7 +16120,9 @@
                     </a:lnL>
                     <a:lnR w="12700" cap="flat" cmpd="sng" algn="ctr">
                       <a:solidFill>
-                        <a:schemeClr val="tx1"/>
+                        <a:schemeClr val="bg1">
+                          <a:lumMod val="75000"/>
+                        </a:schemeClr>
                       </a:solidFill>
                       <a:prstDash val="solid"/>
                       <a:round/>
@@ -14812,7 +16131,9 @@
                     </a:lnR>
                     <a:lnT w="12700" cap="flat" cmpd="sng" algn="ctr">
                       <a:solidFill>
-                        <a:schemeClr val="tx1"/>
+                        <a:schemeClr val="bg1">
+                          <a:lumMod val="75000"/>
+                        </a:schemeClr>
                       </a:solidFill>
                       <a:prstDash val="solid"/>
                       <a:round/>
@@ -14821,7 +16142,9 @@
                     </a:lnT>
                     <a:lnB w="12700" cap="flat" cmpd="sng" algn="ctr">
                       <a:solidFill>
-                        <a:schemeClr val="tx1"/>
+                        <a:schemeClr val="bg1">
+                          <a:lumMod val="75000"/>
+                        </a:schemeClr>
                       </a:solidFill>
                       <a:prstDash val="solid"/>
                       <a:round/>
@@ -14841,7 +16164,9 @@
                       <a:r>
                         <a:rPr sz="1600" b="1">
                           <a:solidFill>
-                            <a:schemeClr val="tx1"/>
+                            <a:schemeClr val="accent1">
+                              <a:lumMod val="50000"/>
+                            </a:schemeClr>
                           </a:solidFill>
                         </a:rPr>
                         <a:t>Environmental</a:t>
@@ -14849,7 +16174,7 @@
                     </a:p>
                     <a:p>
                       <a:r>
-                        <a:rPr sz="1400" b="0">
+                        <a:rPr sz="1400">
                           <a:solidFill>
                             <a:schemeClr val="tx1"/>
                           </a:solidFill>
@@ -14861,7 +16186,9 @@
                   <a:tcPr anchor="ctr">
                     <a:lnL w="12700" cap="flat" cmpd="sng" algn="ctr">
                       <a:solidFill>
-                        <a:schemeClr val="tx1"/>
+                        <a:schemeClr val="bg1">
+                          <a:lumMod val="75000"/>
+                        </a:schemeClr>
                       </a:solidFill>
                       <a:prstDash val="solid"/>
                       <a:round/>
@@ -14870,7 +16197,9 @@
                     </a:lnL>
                     <a:lnR w="12700" cap="flat" cmpd="sng" algn="ctr">
                       <a:solidFill>
-                        <a:schemeClr val="tx1"/>
+                        <a:schemeClr val="bg1">
+                          <a:lumMod val="75000"/>
+                        </a:schemeClr>
                       </a:solidFill>
                       <a:prstDash val="solid"/>
                       <a:round/>
@@ -14879,7 +16208,9 @@
                     </a:lnR>
                     <a:lnT w="12700" cap="flat" cmpd="sng" algn="ctr">
                       <a:solidFill>
-                        <a:schemeClr val="tx1"/>
+                        <a:schemeClr val="bg1">
+                          <a:lumMod val="75000"/>
+                        </a:schemeClr>
                       </a:solidFill>
                       <a:prstDash val="solid"/>
                       <a:round/>
@@ -14888,7 +16219,9 @@
                     </a:lnT>
                     <a:lnB w="12700" cap="flat" cmpd="sng" algn="ctr">
                       <a:solidFill>
-                        <a:schemeClr val="tx1"/>
+                        <a:schemeClr val="bg1">
+                          <a:lumMod val="75000"/>
+                        </a:schemeClr>
                       </a:solidFill>
                       <a:prstDash val="solid"/>
                       <a:round/>
@@ -14916,7 +16249,9 @@
                   <a:tcPr anchor="ctr">
                     <a:lnL w="12700" cap="flat" cmpd="sng" algn="ctr">
                       <a:solidFill>
-                        <a:schemeClr val="tx1"/>
+                        <a:schemeClr val="bg1">
+                          <a:lumMod val="75000"/>
+                        </a:schemeClr>
                       </a:solidFill>
                       <a:prstDash val="solid"/>
                       <a:round/>
@@ -14925,7 +16260,9 @@
                     </a:lnL>
                     <a:lnR w="12700" cap="flat" cmpd="sng" algn="ctr">
                       <a:solidFill>
-                        <a:schemeClr val="tx1"/>
+                        <a:schemeClr val="bg1">
+                          <a:lumMod val="75000"/>
+                        </a:schemeClr>
                       </a:solidFill>
                       <a:prstDash val="solid"/>
                       <a:round/>
@@ -14934,7 +16271,9 @@
                     </a:lnR>
                     <a:lnT w="12700" cap="flat" cmpd="sng" algn="ctr">
                       <a:solidFill>
-                        <a:schemeClr val="tx1"/>
+                        <a:schemeClr val="bg1">
+                          <a:lumMod val="75000"/>
+                        </a:schemeClr>
                       </a:solidFill>
                       <a:prstDash val="solid"/>
                       <a:round/>
@@ -14943,7 +16282,9 @@
                     </a:lnT>
                     <a:lnB w="12700" cap="flat" cmpd="sng" algn="ctr">
                       <a:solidFill>
-                        <a:schemeClr val="tx1"/>
+                        <a:schemeClr val="bg1">
+                          <a:lumMod val="75000"/>
+                        </a:schemeClr>
                       </a:solidFill>
                       <a:prstDash val="solid"/>
                       <a:round/>
@@ -14971,7 +16312,9 @@
                   <a:tcPr anchor="ctr">
                     <a:lnL w="12700" cap="flat" cmpd="sng" algn="ctr">
                       <a:solidFill>
-                        <a:schemeClr val="tx1"/>
+                        <a:schemeClr val="bg1">
+                          <a:lumMod val="75000"/>
+                        </a:schemeClr>
                       </a:solidFill>
                       <a:prstDash val="solid"/>
                       <a:round/>
@@ -14980,7 +16323,9 @@
                     </a:lnL>
                     <a:lnR w="12700" cap="flat" cmpd="sng" algn="ctr">
                       <a:solidFill>
-                        <a:schemeClr val="tx1"/>
+                        <a:schemeClr val="bg1">
+                          <a:lumMod val="75000"/>
+                        </a:schemeClr>
                       </a:solidFill>
                       <a:prstDash val="solid"/>
                       <a:round/>
@@ -14989,7 +16334,9 @@
                     </a:lnR>
                     <a:lnT w="12700" cap="flat" cmpd="sng" algn="ctr">
                       <a:solidFill>
-                        <a:schemeClr val="tx1"/>
+                        <a:schemeClr val="bg1">
+                          <a:lumMod val="75000"/>
+                        </a:schemeClr>
                       </a:solidFill>
                       <a:prstDash val="solid"/>
                       <a:round/>
@@ -14998,7 +16345,9 @@
                     </a:lnT>
                     <a:lnB w="12700" cap="flat" cmpd="sng" algn="ctr">
                       <a:solidFill>
-                        <a:schemeClr val="tx1"/>
+                        <a:schemeClr val="bg1">
+                          <a:lumMod val="75000"/>
+                        </a:schemeClr>
                       </a:solidFill>
                       <a:prstDash val="solid"/>
                       <a:round/>
@@ -15027,7 +16376,9 @@
                   <a:tcPr anchor="ctr">
                     <a:lnL w="12700" cap="flat" cmpd="sng" algn="ctr">
                       <a:solidFill>
-                        <a:schemeClr val="tx1"/>
+                        <a:schemeClr val="bg1">
+                          <a:lumMod val="75000"/>
+                        </a:schemeClr>
                       </a:solidFill>
                       <a:prstDash val="solid"/>
                       <a:round/>
@@ -15036,7 +16387,9 @@
                     </a:lnL>
                     <a:lnR w="12700" cap="flat" cmpd="sng" algn="ctr">
                       <a:solidFill>
-                        <a:schemeClr val="tx1"/>
+                        <a:schemeClr val="bg1">
+                          <a:lumMod val="75000"/>
+                        </a:schemeClr>
                       </a:solidFill>
                       <a:prstDash val="solid"/>
                       <a:round/>
@@ -15045,7 +16398,9 @@
                     </a:lnR>
                     <a:lnT w="12700" cap="flat" cmpd="sng" algn="ctr">
                       <a:solidFill>
-                        <a:schemeClr val="tx1"/>
+                        <a:schemeClr val="bg1">
+                          <a:lumMod val="75000"/>
+                        </a:schemeClr>
                       </a:solidFill>
                       <a:prstDash val="solid"/>
                       <a:round/>
@@ -15054,7 +16409,9 @@
                     </a:lnT>
                     <a:lnB w="12700" cap="flat" cmpd="sng" algn="ctr">
                       <a:solidFill>
-                        <a:schemeClr val="tx1"/>
+                        <a:schemeClr val="bg1">
+                          <a:lumMod val="75000"/>
+                        </a:schemeClr>
                       </a:solidFill>
                       <a:prstDash val="solid"/>
                       <a:round/>
@@ -15083,7 +16440,9 @@
                   <a:tcPr anchor="ctr">
                     <a:lnL w="12700" cap="flat" cmpd="sng" algn="ctr">
                       <a:solidFill>
-                        <a:schemeClr val="tx1"/>
+                        <a:schemeClr val="bg1">
+                          <a:lumMod val="75000"/>
+                        </a:schemeClr>
                       </a:solidFill>
                       <a:prstDash val="solid"/>
                       <a:round/>
@@ -15092,7 +16451,9 @@
                     </a:lnL>
                     <a:lnR w="12700" cap="flat" cmpd="sng" algn="ctr">
                       <a:solidFill>
-                        <a:schemeClr val="tx1"/>
+                        <a:schemeClr val="bg1">
+                          <a:lumMod val="75000"/>
+                        </a:schemeClr>
                       </a:solidFill>
                       <a:prstDash val="solid"/>
                       <a:round/>
@@ -15101,7 +16462,9 @@
                     </a:lnR>
                     <a:lnT w="12700" cap="flat" cmpd="sng" algn="ctr">
                       <a:solidFill>
-                        <a:schemeClr val="tx1"/>
+                        <a:schemeClr val="bg1">
+                          <a:lumMod val="75000"/>
+                        </a:schemeClr>
                       </a:solidFill>
                       <a:prstDash val="solid"/>
                       <a:round/>
@@ -15110,7 +16473,9 @@
                     </a:lnT>
                     <a:lnB w="12700" cap="flat" cmpd="sng" algn="ctr">
                       <a:solidFill>
-                        <a:schemeClr val="tx1"/>
+                        <a:schemeClr val="bg1">
+                          <a:lumMod val="75000"/>
+                        </a:schemeClr>
                       </a:solidFill>
                       <a:prstDash val="solid"/>
                       <a:round/>
@@ -15131,7 +16496,9 @@
                   <a:tcPr anchor="ctr">
                     <a:lnL w="12700" cap="flat" cmpd="sng" algn="ctr">
                       <a:solidFill>
-                        <a:schemeClr val="tx1"/>
+                        <a:schemeClr val="bg1">
+                          <a:lumMod val="75000"/>
+                        </a:schemeClr>
                       </a:solidFill>
                       <a:prstDash val="solid"/>
                       <a:round/>
@@ -15140,7 +16507,9 @@
                     </a:lnL>
                     <a:lnR w="12700" cap="flat" cmpd="sng" algn="ctr">
                       <a:solidFill>
-                        <a:schemeClr val="tx1"/>
+                        <a:schemeClr val="bg1">
+                          <a:lumMod val="75000"/>
+                        </a:schemeClr>
                       </a:solidFill>
                       <a:prstDash val="solid"/>
                       <a:round/>
@@ -15149,7 +16518,9 @@
                     </a:lnR>
                     <a:lnT w="12700" cap="flat" cmpd="sng" algn="ctr">
                       <a:solidFill>
-                        <a:schemeClr val="tx1"/>
+                        <a:schemeClr val="bg1">
+                          <a:lumMod val="75000"/>
+                        </a:schemeClr>
                       </a:solidFill>
                       <a:prstDash val="solid"/>
                       <a:round/>
@@ -15158,7 +16529,9 @@
                     </a:lnT>
                     <a:lnB w="12700" cap="flat" cmpd="sng" algn="ctr">
                       <a:solidFill>
-                        <a:schemeClr val="tx1"/>
+                        <a:schemeClr val="bg1">
+                          <a:lumMod val="75000"/>
+                        </a:schemeClr>
                       </a:solidFill>
                       <a:prstDash val="solid"/>
                       <a:round/>
@@ -15186,7 +16559,9 @@
                   <a:tcPr anchor="ctr">
                     <a:lnL w="12700" cap="flat" cmpd="sng" algn="ctr">
                       <a:solidFill>
-                        <a:schemeClr val="tx1"/>
+                        <a:schemeClr val="bg1">
+                          <a:lumMod val="75000"/>
+                        </a:schemeClr>
                       </a:solidFill>
                       <a:prstDash val="solid"/>
                       <a:round/>
@@ -15195,7 +16570,9 @@
                     </a:lnL>
                     <a:lnR w="12700" cap="flat" cmpd="sng" algn="ctr">
                       <a:solidFill>
-                        <a:schemeClr val="tx1"/>
+                        <a:schemeClr val="bg1">
+                          <a:lumMod val="75000"/>
+                        </a:schemeClr>
                       </a:solidFill>
                       <a:prstDash val="solid"/>
                       <a:round/>
@@ -15204,7 +16581,9 @@
                     </a:lnR>
                     <a:lnT w="12700" cap="flat" cmpd="sng" algn="ctr">
                       <a:solidFill>
-                        <a:schemeClr val="tx1"/>
+                        <a:schemeClr val="bg1">
+                          <a:lumMod val="75000"/>
+                        </a:schemeClr>
                       </a:solidFill>
                       <a:prstDash val="solid"/>
                       <a:round/>
@@ -15213,7 +16592,9 @@
                     </a:lnT>
                     <a:lnB w="12700" cap="flat" cmpd="sng" algn="ctr">
                       <a:solidFill>
-                        <a:schemeClr val="tx1"/>
+                        <a:schemeClr val="bg1">
+                          <a:lumMod val="75000"/>
+                        </a:schemeClr>
                       </a:solidFill>
                       <a:prstDash val="solid"/>
                       <a:round/>
@@ -15241,7 +16622,9 @@
                   <a:tcPr anchor="ctr">
                     <a:lnL w="12700" cap="flat" cmpd="sng" algn="ctr">
                       <a:solidFill>
-                        <a:schemeClr val="tx1"/>
+                        <a:schemeClr val="bg1">
+                          <a:lumMod val="75000"/>
+                        </a:schemeClr>
                       </a:solidFill>
                       <a:prstDash val="solid"/>
                       <a:round/>
@@ -15250,7 +16633,9 @@
                     </a:lnL>
                     <a:lnR w="12700" cap="flat" cmpd="sng" algn="ctr">
                       <a:solidFill>
-                        <a:schemeClr val="tx1"/>
+                        <a:schemeClr val="bg1">
+                          <a:lumMod val="75000"/>
+                        </a:schemeClr>
                       </a:solidFill>
                       <a:prstDash val="solid"/>
                       <a:round/>
@@ -15259,7 +16644,9 @@
                     </a:lnR>
                     <a:lnT w="12700" cap="flat" cmpd="sng" algn="ctr">
                       <a:solidFill>
-                        <a:schemeClr val="tx1"/>
+                        <a:schemeClr val="bg1">
+                          <a:lumMod val="75000"/>
+                        </a:schemeClr>
                       </a:solidFill>
                       <a:prstDash val="solid"/>
                       <a:round/>
@@ -15268,7 +16655,9 @@
                     </a:lnT>
                     <a:lnB w="12700" cap="flat" cmpd="sng" algn="ctr">
                       <a:solidFill>
-                        <a:schemeClr val="tx1"/>
+                        <a:schemeClr val="bg1">
+                          <a:lumMod val="75000"/>
+                        </a:schemeClr>
                       </a:solidFill>
                       <a:prstDash val="solid"/>
                       <a:round/>
@@ -15297,7 +16686,9 @@
                   <a:tcPr anchor="ctr">
                     <a:lnL w="12700" cap="flat" cmpd="sng" algn="ctr">
                       <a:solidFill>
-                        <a:schemeClr val="tx1"/>
+                        <a:schemeClr val="bg1">
+                          <a:lumMod val="75000"/>
+                        </a:schemeClr>
                       </a:solidFill>
                       <a:prstDash val="solid"/>
                       <a:round/>
@@ -15306,7 +16697,9 @@
                     </a:lnL>
                     <a:lnR w="12700" cap="flat" cmpd="sng" algn="ctr">
                       <a:solidFill>
-                        <a:schemeClr val="tx1"/>
+                        <a:schemeClr val="bg1">
+                          <a:lumMod val="75000"/>
+                        </a:schemeClr>
                       </a:solidFill>
                       <a:prstDash val="solid"/>
                       <a:round/>
@@ -15315,7 +16708,9 @@
                     </a:lnR>
                     <a:lnT w="12700" cap="flat" cmpd="sng" algn="ctr">
                       <a:solidFill>
-                        <a:schemeClr val="tx1"/>
+                        <a:schemeClr val="bg1">
+                          <a:lumMod val="75000"/>
+                        </a:schemeClr>
                       </a:solidFill>
                       <a:prstDash val="solid"/>
                       <a:round/>
@@ -15324,7 +16719,9 @@
                     </a:lnT>
                     <a:lnB w="12700" cap="flat" cmpd="sng" algn="ctr">
                       <a:solidFill>
-                        <a:schemeClr val="tx1"/>
+                        <a:schemeClr val="bg1">
+                          <a:lumMod val="75000"/>
+                        </a:schemeClr>
                       </a:solidFill>
                       <a:prstDash val="solid"/>
                       <a:round/>
@@ -15353,7 +16750,9 @@
                   <a:tcPr anchor="ctr">
                     <a:lnL w="12700" cap="flat" cmpd="sng" algn="ctr">
                       <a:solidFill>
-                        <a:schemeClr val="tx1"/>
+                        <a:schemeClr val="bg1">
+                          <a:lumMod val="75000"/>
+                        </a:schemeClr>
                       </a:solidFill>
                       <a:prstDash val="solid"/>
                       <a:round/>
@@ -15362,7 +16761,9 @@
                     </a:lnL>
                     <a:lnR w="12700" cap="flat" cmpd="sng" algn="ctr">
                       <a:solidFill>
-                        <a:schemeClr val="tx1"/>
+                        <a:schemeClr val="bg1">
+                          <a:lumMod val="75000"/>
+                        </a:schemeClr>
                       </a:solidFill>
                       <a:prstDash val="solid"/>
                       <a:round/>
@@ -15371,7 +16772,9 @@
                     </a:lnR>
                     <a:lnT w="12700" cap="flat" cmpd="sng" algn="ctr">
                       <a:solidFill>
-                        <a:schemeClr val="tx1"/>
+                        <a:schemeClr val="bg1">
+                          <a:lumMod val="75000"/>
+                        </a:schemeClr>
                       </a:solidFill>
                       <a:prstDash val="solid"/>
                       <a:round/>
@@ -15380,7 +16783,9 @@
                     </a:lnT>
                     <a:lnB w="12700" cap="flat" cmpd="sng" algn="ctr">
                       <a:solidFill>
-                        <a:schemeClr val="tx1"/>
+                        <a:schemeClr val="bg1">
+                          <a:lumMod val="75000"/>
+                        </a:schemeClr>
                       </a:solidFill>
                       <a:prstDash val="solid"/>
                       <a:round/>
@@ -15401,7 +16806,9 @@
                   <a:tcPr anchor="ctr">
                     <a:lnL w="12700" cap="flat" cmpd="sng" algn="ctr">
                       <a:solidFill>
-                        <a:schemeClr val="tx1"/>
+                        <a:schemeClr val="bg1">
+                          <a:lumMod val="75000"/>
+                        </a:schemeClr>
                       </a:solidFill>
                       <a:prstDash val="solid"/>
                       <a:round/>
@@ -15410,7 +16817,9 @@
                     </a:lnL>
                     <a:lnR w="12700" cap="flat" cmpd="sng" algn="ctr">
                       <a:solidFill>
-                        <a:schemeClr val="tx1"/>
+                        <a:schemeClr val="bg1">
+                          <a:lumMod val="75000"/>
+                        </a:schemeClr>
                       </a:solidFill>
                       <a:prstDash val="solid"/>
                       <a:round/>
@@ -15419,7 +16828,9 @@
                     </a:lnR>
                     <a:lnT w="12700" cap="flat" cmpd="sng" algn="ctr">
                       <a:solidFill>
-                        <a:schemeClr val="tx1"/>
+                        <a:schemeClr val="bg1">
+                          <a:lumMod val="75000"/>
+                        </a:schemeClr>
                       </a:solidFill>
                       <a:prstDash val="solid"/>
                       <a:round/>
@@ -15428,7 +16839,9 @@
                     </a:lnT>
                     <a:lnB w="12700" cap="flat" cmpd="sng" algn="ctr">
                       <a:solidFill>
-                        <a:schemeClr val="tx1"/>
+                        <a:schemeClr val="bg1">
+                          <a:lumMod val="75000"/>
+                        </a:schemeClr>
                       </a:solidFill>
                       <a:prstDash val="solid"/>
                       <a:round/>
@@ -15456,7 +16869,9 @@
                   <a:tcPr anchor="ctr">
                     <a:lnL w="12700" cap="flat" cmpd="sng" algn="ctr">
                       <a:solidFill>
-                        <a:schemeClr val="tx1"/>
+                        <a:schemeClr val="bg1">
+                          <a:lumMod val="75000"/>
+                        </a:schemeClr>
                       </a:solidFill>
                       <a:prstDash val="solid"/>
                       <a:round/>
@@ -15465,7 +16880,9 @@
                     </a:lnL>
                     <a:lnR w="12700" cap="flat" cmpd="sng" algn="ctr">
                       <a:solidFill>
-                        <a:schemeClr val="tx1"/>
+                        <a:schemeClr val="bg1">
+                          <a:lumMod val="75000"/>
+                        </a:schemeClr>
                       </a:solidFill>
                       <a:prstDash val="solid"/>
                       <a:round/>
@@ -15474,7 +16891,9 @@
                     </a:lnR>
                     <a:lnT w="12700" cap="flat" cmpd="sng" algn="ctr">
                       <a:solidFill>
-                        <a:schemeClr val="tx1"/>
+                        <a:schemeClr val="bg1">
+                          <a:lumMod val="75000"/>
+                        </a:schemeClr>
                       </a:solidFill>
                       <a:prstDash val="solid"/>
                       <a:round/>
@@ -15483,7 +16902,9 @@
                     </a:lnT>
                     <a:lnB w="12700" cap="flat" cmpd="sng" algn="ctr">
                       <a:solidFill>
-                        <a:schemeClr val="tx1"/>
+                        <a:schemeClr val="bg1">
+                          <a:lumMod val="75000"/>
+                        </a:schemeClr>
                       </a:solidFill>
                       <a:prstDash val="solid"/>
                       <a:round/>
@@ -15511,7 +16932,9 @@
                   <a:tcPr anchor="ctr">
                     <a:lnL w="12700" cap="flat" cmpd="sng" algn="ctr">
                       <a:solidFill>
-                        <a:schemeClr val="tx1"/>
+                        <a:schemeClr val="bg1">
+                          <a:lumMod val="75000"/>
+                        </a:schemeClr>
                       </a:solidFill>
                       <a:prstDash val="solid"/>
                       <a:round/>
@@ -15520,7 +16943,9 @@
                     </a:lnL>
                     <a:lnR w="12700" cap="flat" cmpd="sng" algn="ctr">
                       <a:solidFill>
-                        <a:schemeClr val="tx1"/>
+                        <a:schemeClr val="bg1">
+                          <a:lumMod val="75000"/>
+                        </a:schemeClr>
                       </a:solidFill>
                       <a:prstDash val="solid"/>
                       <a:round/>
@@ -15529,7 +16954,9 @@
                     </a:lnR>
                     <a:lnT w="12700" cap="flat" cmpd="sng" algn="ctr">
                       <a:solidFill>
-                        <a:schemeClr val="tx1"/>
+                        <a:schemeClr val="bg1">
+                          <a:lumMod val="75000"/>
+                        </a:schemeClr>
                       </a:solidFill>
                       <a:prstDash val="solid"/>
                       <a:round/>
@@ -15538,7 +16965,9 @@
                     </a:lnT>
                     <a:lnB w="12700" cap="flat" cmpd="sng" algn="ctr">
                       <a:solidFill>
-                        <a:schemeClr val="tx1"/>
+                        <a:schemeClr val="bg1">
+                          <a:lumMod val="75000"/>
+                        </a:schemeClr>
                       </a:solidFill>
                       <a:prstDash val="solid"/>
                       <a:round/>
@@ -15567,7 +16996,9 @@
                   <a:tcPr anchor="ctr">
                     <a:lnL w="12700" cap="flat" cmpd="sng" algn="ctr">
                       <a:solidFill>
-                        <a:schemeClr val="tx1"/>
+                        <a:schemeClr val="bg1">
+                          <a:lumMod val="75000"/>
+                        </a:schemeClr>
                       </a:solidFill>
                       <a:prstDash val="solid"/>
                       <a:round/>
@@ -15576,7 +17007,9 @@
                     </a:lnL>
                     <a:lnR w="12700" cap="flat" cmpd="sng" algn="ctr">
                       <a:solidFill>
-                        <a:schemeClr val="tx1"/>
+                        <a:schemeClr val="bg1">
+                          <a:lumMod val="75000"/>
+                        </a:schemeClr>
                       </a:solidFill>
                       <a:prstDash val="solid"/>
                       <a:round/>
@@ -15585,7 +17018,9 @@
                     </a:lnR>
                     <a:lnT w="12700" cap="flat" cmpd="sng" algn="ctr">
                       <a:solidFill>
-                        <a:schemeClr val="tx1"/>
+                        <a:schemeClr val="bg1">
+                          <a:lumMod val="75000"/>
+                        </a:schemeClr>
                       </a:solidFill>
                       <a:prstDash val="solid"/>
                       <a:round/>
@@ -15594,7 +17029,9 @@
                     </a:lnT>
                     <a:lnB w="12700" cap="flat" cmpd="sng" algn="ctr">
                       <a:solidFill>
-                        <a:schemeClr val="tx1"/>
+                        <a:schemeClr val="bg1">
+                          <a:lumMod val="75000"/>
+                        </a:schemeClr>
                       </a:solidFill>
                       <a:prstDash val="solid"/>
                       <a:round/>
@@ -15623,7 +17060,9 @@
                   <a:tcPr anchor="ctr">
                     <a:lnL w="12700" cap="flat" cmpd="sng" algn="ctr">
                       <a:solidFill>
-                        <a:schemeClr val="tx1"/>
+                        <a:schemeClr val="bg1">
+                          <a:lumMod val="75000"/>
+                        </a:schemeClr>
                       </a:solidFill>
                       <a:prstDash val="solid"/>
                       <a:round/>
@@ -15632,7 +17071,9 @@
                     </a:lnL>
                     <a:lnR w="12700" cap="flat" cmpd="sng" algn="ctr">
                       <a:solidFill>
-                        <a:schemeClr val="tx1"/>
+                        <a:schemeClr val="bg1">
+                          <a:lumMod val="75000"/>
+                        </a:schemeClr>
                       </a:solidFill>
                       <a:prstDash val="solid"/>
                       <a:round/>
@@ -15641,7 +17082,9 @@
                     </a:lnR>
                     <a:lnT w="12700" cap="flat" cmpd="sng" algn="ctr">
                       <a:solidFill>
-                        <a:schemeClr val="tx1"/>
+                        <a:schemeClr val="bg1">
+                          <a:lumMod val="75000"/>
+                        </a:schemeClr>
                       </a:solidFill>
                       <a:prstDash val="solid"/>
                       <a:round/>
@@ -15650,7 +17093,9 @@
                     </a:lnT>
                     <a:lnB w="12700" cap="flat" cmpd="sng" algn="ctr">
                       <a:solidFill>
-                        <a:schemeClr val="tx1"/>
+                        <a:schemeClr val="bg1">
+                          <a:lumMod val="75000"/>
+                        </a:schemeClr>
                       </a:solidFill>
                       <a:prstDash val="solid"/>
                       <a:round/>
@@ -15888,7 +17333,13 @@
               <a:t>Most important: </a:t>
             </a:r>
             <a:r>
-              <a:rPr sz="2200" b="1"/>
+              <a:rPr sz="2200" b="1">
+                <a:solidFill>
+                  <a:schemeClr val="accent2">
+                    <a:lumMod val="75000"/>
+                  </a:schemeClr>
+                </a:solidFill>
+              </a:rPr>
               <a:t>Economic (20.7)</a:t>
             </a:r>
           </a:p>
@@ -15899,7 +17350,13 @@
               <a:t>Biggest issue: </a:t>
             </a:r>
             <a:r>
-              <a:rPr sz="2200" b="1"/>
+              <a:rPr sz="2200" b="1">
+                <a:solidFill>
+                  <a:schemeClr val="accent1">
+                    <a:lumMod val="50000"/>
+                  </a:schemeClr>
+                </a:solidFill>
+              </a:rPr>
               <a:t>Naira devaluation and FX shortages (25 of 25)</a:t>
             </a:r>
           </a:p>
@@ -15910,14 +17367,26 @@
               <a:t>High priority: </a:t>
             </a:r>
             <a:r>
-              <a:rPr sz="2200" b="1"/>
+              <a:rPr sz="2200" b="1">
+                <a:solidFill>
+                  <a:schemeClr val="accent1">
+                    <a:lumMod val="50000"/>
+                  </a:schemeClr>
+                </a:solidFill>
+              </a:rPr>
               <a:t>6 of 18 issues</a:t>
             </a:r>
           </a:p>
           <a:p>
             <a:pPr/>
             <a:r>
-              <a:rPr sz="2200" b="1"/>
+              <a:rPr sz="2200" b="1">
+                <a:solidFill>
+                  <a:schemeClr val="accent1">
+                    <a:lumMod val="50000"/>
+                  </a:schemeClr>
+                </a:solidFill>
+              </a:rPr>
               <a:t>12 threats and 6 opportunities</a:t>
             </a:r>
           </a:p>
@@ -16179,7 +17648,7 @@
                       <a:r>
                         <a:rPr sz="1500" b="1">
                           <a:solidFill>
-                            <a:schemeClr val="tx1"/>
+                            <a:schemeClr val="bg1"/>
                           </a:solidFill>
                         </a:rPr>
                         <a:t>Strengths (internal)</a:t>
@@ -16189,7 +17658,9 @@
                   <a:tcPr anchor="ctr">
                     <a:lnL w="12700" cap="flat" cmpd="sng" algn="ctr">
                       <a:solidFill>
-                        <a:schemeClr val="tx1"/>
+                        <a:schemeClr val="bg1">
+                          <a:lumMod val="75000"/>
+                        </a:schemeClr>
                       </a:solidFill>
                       <a:prstDash val="solid"/>
                       <a:round/>
@@ -16198,7 +17669,9 @@
                     </a:lnL>
                     <a:lnR w="12700" cap="flat" cmpd="sng" algn="ctr">
                       <a:solidFill>
-                        <a:schemeClr val="tx1"/>
+                        <a:schemeClr val="bg1">
+                          <a:lumMod val="75000"/>
+                        </a:schemeClr>
                       </a:solidFill>
                       <a:prstDash val="solid"/>
                       <a:round/>
@@ -16207,7 +17680,9 @@
                     </a:lnR>
                     <a:lnT w="12700" cap="flat" cmpd="sng" algn="ctr">
                       <a:solidFill>
-                        <a:schemeClr val="tx1"/>
+                        <a:schemeClr val="bg1">
+                          <a:lumMod val="75000"/>
+                        </a:schemeClr>
                       </a:solidFill>
                       <a:prstDash val="solid"/>
                       <a:round/>
@@ -16216,7 +17691,9 @@
                     </a:lnT>
                     <a:lnB w="12700" cap="flat" cmpd="sng" algn="ctr">
                       <a:solidFill>
-                        <a:schemeClr val="tx1"/>
+                        <a:schemeClr val="bg1">
+                          <a:lumMod val="75000"/>
+                        </a:schemeClr>
                       </a:solidFill>
                       <a:prstDash val="solid"/>
                       <a:round/>
@@ -16224,8 +17701,8 @@
                       <a:tailEnd type="none" w="med" len="med"/>
                     </a:lnB>
                     <a:solidFill>
-                      <a:schemeClr val="bg1">
-                        <a:lumMod val="85000"/>
+                      <a:schemeClr val="accent1">
+                        <a:lumMod val="50000"/>
                       </a:schemeClr>
                     </a:solidFill>
                   </a:tcPr>
@@ -16238,7 +17715,7 @@
                       <a:r>
                         <a:rPr sz="1500" b="1">
                           <a:solidFill>
-                            <a:schemeClr val="tx1"/>
+                            <a:schemeClr val="bg1"/>
                           </a:solidFill>
                         </a:rPr>
                         <a:t>Weaknesses (internal)</a:t>
@@ -16248,7 +17725,9 @@
                   <a:tcPr anchor="ctr">
                     <a:lnL w="12700" cap="flat" cmpd="sng" algn="ctr">
                       <a:solidFill>
-                        <a:schemeClr val="tx1"/>
+                        <a:schemeClr val="bg1">
+                          <a:lumMod val="75000"/>
+                        </a:schemeClr>
                       </a:solidFill>
                       <a:prstDash val="solid"/>
                       <a:round/>
@@ -16257,7 +17736,9 @@
                     </a:lnL>
                     <a:lnR w="12700" cap="flat" cmpd="sng" algn="ctr">
                       <a:solidFill>
-                        <a:schemeClr val="tx1"/>
+                        <a:schemeClr val="bg1">
+                          <a:lumMod val="75000"/>
+                        </a:schemeClr>
                       </a:solidFill>
                       <a:prstDash val="solid"/>
                       <a:round/>
@@ -16266,7 +17747,9 @@
                     </a:lnR>
                     <a:lnT w="12700" cap="flat" cmpd="sng" algn="ctr">
                       <a:solidFill>
-                        <a:schemeClr val="tx1"/>
+                        <a:schemeClr val="bg1">
+                          <a:lumMod val="75000"/>
+                        </a:schemeClr>
                       </a:solidFill>
                       <a:prstDash val="solid"/>
                       <a:round/>
@@ -16275,7 +17758,9 @@
                     </a:lnT>
                     <a:lnB w="12700" cap="flat" cmpd="sng" algn="ctr">
                       <a:solidFill>
-                        <a:schemeClr val="tx1"/>
+                        <a:schemeClr val="bg1">
+                          <a:lumMod val="75000"/>
+                        </a:schemeClr>
                       </a:solidFill>
                       <a:prstDash val="solid"/>
                       <a:round/>
@@ -16283,8 +17768,8 @@
                       <a:tailEnd type="none" w="med" len="med"/>
                     </a:lnB>
                     <a:solidFill>
-                      <a:schemeClr val="bg1">
-                        <a:lumMod val="85000"/>
+                      <a:schemeClr val="accent2">
+                        <a:lumMod val="75000"/>
                       </a:schemeClr>
                     </a:solidFill>
                   </a:tcPr>
@@ -16383,7 +17868,9 @@
                   <a:tcPr anchor="ctr">
                     <a:lnL w="12700" cap="flat" cmpd="sng" algn="ctr">
                       <a:solidFill>
-                        <a:schemeClr val="tx1"/>
+                        <a:schemeClr val="bg1">
+                          <a:lumMod val="75000"/>
+                        </a:schemeClr>
                       </a:solidFill>
                       <a:prstDash val="solid"/>
                       <a:round/>
@@ -16392,7 +17879,9 @@
                     </a:lnL>
                     <a:lnR w="12700" cap="flat" cmpd="sng" algn="ctr">
                       <a:solidFill>
-                        <a:schemeClr val="tx1"/>
+                        <a:schemeClr val="bg1">
+                          <a:lumMod val="75000"/>
+                        </a:schemeClr>
                       </a:solidFill>
                       <a:prstDash val="solid"/>
                       <a:round/>
@@ -16401,7 +17890,9 @@
                     </a:lnR>
                     <a:lnT w="12700" cap="flat" cmpd="sng" algn="ctr">
                       <a:solidFill>
-                        <a:schemeClr val="tx1"/>
+                        <a:schemeClr val="bg1">
+                          <a:lumMod val="75000"/>
+                        </a:schemeClr>
                       </a:solidFill>
                       <a:prstDash val="solid"/>
                       <a:round/>
@@ -16410,7 +17901,9 @@
                     </a:lnT>
                     <a:lnB w="12700" cap="flat" cmpd="sng" algn="ctr">
                       <a:solidFill>
-                        <a:schemeClr val="tx1"/>
+                        <a:schemeClr val="bg1">
+                          <a:lumMod val="75000"/>
+                        </a:schemeClr>
                       </a:solidFill>
                       <a:prstDash val="solid"/>
                       <a:round/>
@@ -16498,7 +17991,9 @@
                   <a:tcPr anchor="ctr">
                     <a:lnL w="12700" cap="flat" cmpd="sng" algn="ctr">
                       <a:solidFill>
-                        <a:schemeClr val="tx1"/>
+                        <a:schemeClr val="bg1">
+                          <a:lumMod val="75000"/>
+                        </a:schemeClr>
                       </a:solidFill>
                       <a:prstDash val="solid"/>
                       <a:round/>
@@ -16507,7 +18002,9 @@
                     </a:lnL>
                     <a:lnR w="12700" cap="flat" cmpd="sng" algn="ctr">
                       <a:solidFill>
-                        <a:schemeClr val="tx1"/>
+                        <a:schemeClr val="bg1">
+                          <a:lumMod val="75000"/>
+                        </a:schemeClr>
                       </a:solidFill>
                       <a:prstDash val="solid"/>
                       <a:round/>
@@ -16516,7 +18013,9 @@
                     </a:lnR>
                     <a:lnT w="12700" cap="flat" cmpd="sng" algn="ctr">
                       <a:solidFill>
-                        <a:schemeClr val="tx1"/>
+                        <a:schemeClr val="bg1">
+                          <a:lumMod val="75000"/>
+                        </a:schemeClr>
                       </a:solidFill>
                       <a:prstDash val="solid"/>
                       <a:round/>
@@ -16525,7 +18024,9 @@
                     </a:lnT>
                     <a:lnB w="12700" cap="flat" cmpd="sng" algn="ctr">
                       <a:solidFill>
-                        <a:schemeClr val="tx1"/>
+                        <a:schemeClr val="bg1">
+                          <a:lumMod val="75000"/>
+                        </a:schemeClr>
                       </a:solidFill>
                       <a:prstDash val="solid"/>
                       <a:round/>
@@ -16545,7 +18046,7 @@
                       <a:r>
                         <a:rPr sz="1500" b="1">
                           <a:solidFill>
-                            <a:schemeClr val="tx1"/>
+                            <a:schemeClr val="bg1"/>
                           </a:solidFill>
                         </a:rPr>
                         <a:t>Opportunities (external)</a:t>
@@ -16555,7 +18056,9 @@
                   <a:tcPr anchor="ctr">
                     <a:lnL w="12700" cap="flat" cmpd="sng" algn="ctr">
                       <a:solidFill>
-                        <a:schemeClr val="tx1"/>
+                        <a:schemeClr val="bg1">
+                          <a:lumMod val="75000"/>
+                        </a:schemeClr>
                       </a:solidFill>
                       <a:prstDash val="solid"/>
                       <a:round/>
@@ -16564,7 +18067,9 @@
                     </a:lnL>
                     <a:lnR w="12700" cap="flat" cmpd="sng" algn="ctr">
                       <a:solidFill>
-                        <a:schemeClr val="tx1"/>
+                        <a:schemeClr val="bg1">
+                          <a:lumMod val="75000"/>
+                        </a:schemeClr>
                       </a:solidFill>
                       <a:prstDash val="solid"/>
                       <a:round/>
@@ -16573,7 +18078,9 @@
                     </a:lnR>
                     <a:lnT w="12700" cap="flat" cmpd="sng" algn="ctr">
                       <a:solidFill>
-                        <a:schemeClr val="tx1"/>
+                        <a:schemeClr val="bg1">
+                          <a:lumMod val="75000"/>
+                        </a:schemeClr>
                       </a:solidFill>
                       <a:prstDash val="solid"/>
                       <a:round/>
@@ -16582,7 +18089,9 @@
                     </a:lnT>
                     <a:lnB w="12700" cap="flat" cmpd="sng" algn="ctr">
                       <a:solidFill>
-                        <a:schemeClr val="tx1"/>
+                        <a:schemeClr val="bg1">
+                          <a:lumMod val="75000"/>
+                        </a:schemeClr>
                       </a:solidFill>
                       <a:prstDash val="solid"/>
                       <a:round/>
@@ -16590,8 +18099,8 @@
                       <a:tailEnd type="none" w="med" len="med"/>
                     </a:lnB>
                     <a:solidFill>
-                      <a:schemeClr val="bg1">
-                        <a:lumMod val="85000"/>
+                      <a:schemeClr val="accent1">
+                        <a:lumMod val="50000"/>
                       </a:schemeClr>
                     </a:solidFill>
                   </a:tcPr>
@@ -16604,7 +18113,7 @@
                       <a:r>
                         <a:rPr sz="1500" b="1">
                           <a:solidFill>
-                            <a:schemeClr val="tx1"/>
+                            <a:schemeClr val="bg1"/>
                           </a:solidFill>
                         </a:rPr>
                         <a:t>Threats (external)</a:t>
@@ -16614,7 +18123,9 @@
                   <a:tcPr anchor="ctr">
                     <a:lnL w="12700" cap="flat" cmpd="sng" algn="ctr">
                       <a:solidFill>
-                        <a:schemeClr val="tx1"/>
+                        <a:schemeClr val="bg1">
+                          <a:lumMod val="75000"/>
+                        </a:schemeClr>
                       </a:solidFill>
                       <a:prstDash val="solid"/>
                       <a:round/>
@@ -16623,7 +18134,9 @@
                     </a:lnL>
                     <a:lnR w="12700" cap="flat" cmpd="sng" algn="ctr">
                       <a:solidFill>
-                        <a:schemeClr val="tx1"/>
+                        <a:schemeClr val="bg1">
+                          <a:lumMod val="75000"/>
+                        </a:schemeClr>
                       </a:solidFill>
                       <a:prstDash val="solid"/>
                       <a:round/>
@@ -16632,7 +18145,9 @@
                     </a:lnR>
                     <a:lnT w="12700" cap="flat" cmpd="sng" algn="ctr">
                       <a:solidFill>
-                        <a:schemeClr val="tx1"/>
+                        <a:schemeClr val="bg1">
+                          <a:lumMod val="75000"/>
+                        </a:schemeClr>
                       </a:solidFill>
                       <a:prstDash val="solid"/>
                       <a:round/>
@@ -16641,7 +18156,9 @@
                     </a:lnT>
                     <a:lnB w="12700" cap="flat" cmpd="sng" algn="ctr">
                       <a:solidFill>
-                        <a:schemeClr val="tx1"/>
+                        <a:schemeClr val="bg1">
+                          <a:lumMod val="75000"/>
+                        </a:schemeClr>
                       </a:solidFill>
                       <a:prstDash val="solid"/>
                       <a:round/>
@@ -16649,8 +18166,8 @@
                       <a:tailEnd type="none" w="med" len="med"/>
                     </a:lnB>
                     <a:solidFill>
-                      <a:schemeClr val="bg1">
-                        <a:lumMod val="85000"/>
+                      <a:schemeClr val="accent2">
+                        <a:lumMod val="75000"/>
                       </a:schemeClr>
                     </a:solidFill>
                   </a:tcPr>
@@ -16749,7 +18266,9 @@
                   <a:tcPr anchor="ctr">
                     <a:lnL w="12700" cap="flat" cmpd="sng" algn="ctr">
                       <a:solidFill>
-                        <a:schemeClr val="tx1"/>
+                        <a:schemeClr val="bg1">
+                          <a:lumMod val="75000"/>
+                        </a:schemeClr>
                       </a:solidFill>
                       <a:prstDash val="solid"/>
                       <a:round/>
@@ -16758,7 +18277,9 @@
                     </a:lnL>
                     <a:lnR w="12700" cap="flat" cmpd="sng" algn="ctr">
                       <a:solidFill>
-                        <a:schemeClr val="tx1"/>
+                        <a:schemeClr val="bg1">
+                          <a:lumMod val="75000"/>
+                        </a:schemeClr>
                       </a:solidFill>
                       <a:prstDash val="solid"/>
                       <a:round/>
@@ -16767,7 +18288,9 @@
                     </a:lnR>
                     <a:lnT w="12700" cap="flat" cmpd="sng" algn="ctr">
                       <a:solidFill>
-                        <a:schemeClr val="tx1"/>
+                        <a:schemeClr val="bg1">
+                          <a:lumMod val="75000"/>
+                        </a:schemeClr>
                       </a:solidFill>
                       <a:prstDash val="solid"/>
                       <a:round/>
@@ -16776,7 +18299,9 @@
                     </a:lnT>
                     <a:lnB w="12700" cap="flat" cmpd="sng" algn="ctr">
                       <a:solidFill>
-                        <a:schemeClr val="tx1"/>
+                        <a:schemeClr val="bg1">
+                          <a:lumMod val="75000"/>
+                        </a:schemeClr>
                       </a:solidFill>
                       <a:prstDash val="solid"/>
                       <a:round/>
@@ -16878,7 +18403,9 @@
                   <a:tcPr anchor="ctr">
                     <a:lnL w="12700" cap="flat" cmpd="sng" algn="ctr">
                       <a:solidFill>
-                        <a:schemeClr val="tx1"/>
+                        <a:schemeClr val="bg1">
+                          <a:lumMod val="75000"/>
+                        </a:schemeClr>
                       </a:solidFill>
                       <a:prstDash val="solid"/>
                       <a:round/>
@@ -16887,7 +18414,9 @@
                     </a:lnL>
                     <a:lnR w="12700" cap="flat" cmpd="sng" algn="ctr">
                       <a:solidFill>
-                        <a:schemeClr val="tx1"/>
+                        <a:schemeClr val="bg1">
+                          <a:lumMod val="75000"/>
+                        </a:schemeClr>
                       </a:solidFill>
                       <a:prstDash val="solid"/>
                       <a:round/>
@@ -16896,7 +18425,9 @@
                     </a:lnR>
                     <a:lnT w="12700" cap="flat" cmpd="sng" algn="ctr">
                       <a:solidFill>
-                        <a:schemeClr val="tx1"/>
+                        <a:schemeClr val="bg1">
+                          <a:lumMod val="75000"/>
+                        </a:schemeClr>
                       </a:solidFill>
                       <a:prstDash val="solid"/>
                       <a:round/>
@@ -16905,7 +18436,9 @@
                     </a:lnT>
                     <a:lnB w="12700" cap="flat" cmpd="sng" algn="ctr">
                       <a:solidFill>
-                        <a:schemeClr val="tx1"/>
+                        <a:schemeClr val="bg1">
+                          <a:lumMod val="75000"/>
+                        </a:schemeClr>
                       </a:solidFill>
                       <a:prstDash val="solid"/>
                       <a:round/>
@@ -17136,7 +18669,13 @@
               <a:t>IFE (internal): </a:t>
             </a:r>
             <a:r>
-              <a:rPr sz="2200" b="1"/>
+              <a:rPr sz="2200" b="1">
+                <a:solidFill>
+                  <a:schemeClr val="accent1">
+                    <a:lumMod val="50000"/>
+                  </a:schemeClr>
+                </a:solidFill>
+              </a:rPr>
               <a:t>2.73</a:t>
             </a:r>
           </a:p>
@@ -17154,7 +18693,13 @@
               <a:t>EFE (external): </a:t>
             </a:r>
             <a:r>
-              <a:rPr sz="2200" b="1"/>
+              <a:rPr sz="2200" b="1">
+                <a:solidFill>
+                  <a:schemeClr val="accent1">
+                    <a:lumMod val="50000"/>
+                  </a:schemeClr>
+                </a:solidFill>
+              </a:rPr>
               <a:t>2.41</a:t>
             </a:r>
           </a:p>
@@ -17172,7 +18717,13 @@
               <a:t>IE matrix: </a:t>
             </a:r>
             <a:r>
-              <a:rPr sz="2200" b="1"/>
+              <a:rPr sz="2200" b="1">
+                <a:solidFill>
+                  <a:schemeClr val="accent1">
+                    <a:lumMod val="50000"/>
+                  </a:schemeClr>
+                </a:solidFill>
+              </a:rPr>
               <a:t>cell V, hold and maintain</a:t>
             </a:r>
           </a:p>
@@ -17432,7 +18983,13 @@
           <a:p>
             <a:pPr/>
             <a:r>
-              <a:rPr sz="2400" b="1"/>
+              <a:rPr sz="2400" b="1">
+                <a:solidFill>
+                  <a:schemeClr val="accent1">
+                    <a:lumMod val="50000"/>
+                  </a:schemeClr>
+                </a:solidFill>
+              </a:rPr>
               <a:t>Industry: </a:t>
             </a:r>
             <a:r>
@@ -17443,7 +19000,13 @@
           <a:p>
             <a:pPr/>
             <a:r>
-              <a:rPr sz="2400" b="1"/>
+              <a:rPr sz="2400" b="1">
+                <a:solidFill>
+                  <a:schemeClr val="accent1">
+                    <a:lumMod val="50000"/>
+                  </a:schemeClr>
+                </a:solidFill>
+              </a:rPr>
               <a:t>Market: </a:t>
             </a:r>
             <a:r>
@@ -17454,7 +19017,13 @@
           <a:p>
             <a:pPr/>
             <a:r>
-              <a:rPr sz="2400" b="1"/>
+              <a:rPr sz="2400" b="1">
+                <a:solidFill>
+                  <a:schemeClr val="accent1">
+                    <a:lumMod val="50000"/>
+                  </a:schemeClr>
+                </a:solidFill>
+              </a:rPr>
               <a:t>Customers: </a:t>
             </a:r>
             <a:r>
@@ -17465,7 +19034,13 @@
           <a:p>
             <a:pPr/>
             <a:r>
-              <a:rPr sz="2400" b="1"/>
+              <a:rPr sz="2400" b="1">
+                <a:solidFill>
+                  <a:schemeClr val="accent1">
+                    <a:lumMod val="50000"/>
+                  </a:schemeClr>
+                </a:solidFill>
+              </a:rPr>
               <a:t>Key trends: </a:t>
             </a:r>
             <a:r>
@@ -17476,7 +19051,13 @@
           <a:p>
             <a:pPr/>
             <a:r>
-              <a:rPr sz="2400" b="1"/>
+              <a:rPr sz="2400" b="1">
+                <a:solidFill>
+                  <a:schemeClr val="accent1">
+                    <a:lumMod val="50000"/>
+                  </a:schemeClr>
+                </a:solidFill>
+              </a:rPr>
               <a:t>Key success factors: </a:t>
             </a:r>
             <a:r>
